--- a/memo/material.pptx
+++ b/memo/material.pptx
@@ -5,7 +5,7 @@
     <p:sldMasterId id="2147483660" r:id="rId1"/>
   </p:sldMasterIdLst>
   <p:notesMasterIdLst>
-    <p:notesMasterId r:id="rId28"/>
+    <p:notesMasterId r:id="rId31"/>
   </p:notesMasterIdLst>
   <p:sldIdLst>
     <p:sldId id="256" r:id="rId2"/>
@@ -31,9 +31,12 @@
     <p:sldId id="270" r:id="rId22"/>
     <p:sldId id="281" r:id="rId23"/>
     <p:sldId id="271" r:id="rId24"/>
-    <p:sldId id="280" r:id="rId25"/>
-    <p:sldId id="283" r:id="rId26"/>
-    <p:sldId id="279" r:id="rId27"/>
+    <p:sldId id="284" r:id="rId25"/>
+    <p:sldId id="288" r:id="rId26"/>
+    <p:sldId id="286" r:id="rId27"/>
+    <p:sldId id="280" r:id="rId28"/>
+    <p:sldId id="283" r:id="rId29"/>
+    <p:sldId id="279" r:id="rId30"/>
   </p:sldIdLst>
   <p:sldSz cx="12192000" cy="6858000"/>
   <p:notesSz cx="6858000" cy="9144000"/>
@@ -222,7 +225,7 @@
           <a:p>
             <a:fld id="{1EA1E70B-0470-4571-9876-5436CB0CE0CF}" type="datetimeFigureOut">
               <a:rPr kumimoji="1" lang="ja-JP" altLang="en-US" smtClean="0"/>
-              <a:t>2025/1/18</a:t>
+              <a:t>2025/4/26</a:t>
             </a:fld>
             <a:endParaRPr kumimoji="1" lang="ja-JP" altLang="en-US"/>
           </a:p>
@@ -928,7 +931,7 @@
           <a:p>
             <a:fld id="{1788137F-4795-4296-82D0-B103BE589F84}" type="datetimeFigureOut">
               <a:rPr kumimoji="1" lang="ja-JP" altLang="en-US" smtClean="0"/>
-              <a:t>2025/1/18</a:t>
+              <a:t>2025/4/26</a:t>
             </a:fld>
             <a:endParaRPr kumimoji="1" lang="ja-JP" altLang="en-US"/>
           </a:p>
@@ -1130,7 +1133,7 @@
           <a:p>
             <a:fld id="{1788137F-4795-4296-82D0-B103BE589F84}" type="datetimeFigureOut">
               <a:rPr kumimoji="1" lang="ja-JP" altLang="en-US" smtClean="0"/>
-              <a:t>2025/1/18</a:t>
+              <a:t>2025/4/26</a:t>
             </a:fld>
             <a:endParaRPr kumimoji="1" lang="ja-JP" altLang="en-US"/>
           </a:p>
@@ -1342,7 +1345,7 @@
           <a:p>
             <a:fld id="{1788137F-4795-4296-82D0-B103BE589F84}" type="datetimeFigureOut">
               <a:rPr kumimoji="1" lang="ja-JP" altLang="en-US" smtClean="0"/>
-              <a:t>2025/1/18</a:t>
+              <a:t>2025/4/26</a:t>
             </a:fld>
             <a:endParaRPr kumimoji="1" lang="ja-JP" altLang="en-US"/>
           </a:p>
@@ -1544,7 +1547,7 @@
           <a:p>
             <a:fld id="{1788137F-4795-4296-82D0-B103BE589F84}" type="datetimeFigureOut">
               <a:rPr kumimoji="1" lang="ja-JP" altLang="en-US" smtClean="0"/>
-              <a:t>2025/1/18</a:t>
+              <a:t>2025/4/26</a:t>
             </a:fld>
             <a:endParaRPr kumimoji="1" lang="ja-JP" altLang="en-US"/>
           </a:p>
@@ -1790,7 +1793,7 @@
           <a:p>
             <a:fld id="{1788137F-4795-4296-82D0-B103BE589F84}" type="datetimeFigureOut">
               <a:rPr kumimoji="1" lang="ja-JP" altLang="en-US" smtClean="0"/>
-              <a:t>2025/1/18</a:t>
+              <a:t>2025/4/26</a:t>
             </a:fld>
             <a:endParaRPr kumimoji="1" lang="ja-JP" altLang="en-US"/>
           </a:p>
@@ -2086,7 +2089,7 @@
           <a:p>
             <a:fld id="{1788137F-4795-4296-82D0-B103BE589F84}" type="datetimeFigureOut">
               <a:rPr kumimoji="1" lang="ja-JP" altLang="en-US" smtClean="0"/>
-              <a:t>2025/1/18</a:t>
+              <a:t>2025/4/26</a:t>
             </a:fld>
             <a:endParaRPr kumimoji="1" lang="ja-JP" altLang="en-US"/>
           </a:p>
@@ -2517,7 +2520,7 @@
           <a:p>
             <a:fld id="{1788137F-4795-4296-82D0-B103BE589F84}" type="datetimeFigureOut">
               <a:rPr kumimoji="1" lang="ja-JP" altLang="en-US" smtClean="0"/>
-              <a:t>2025/1/18</a:t>
+              <a:t>2025/4/26</a:t>
             </a:fld>
             <a:endParaRPr kumimoji="1" lang="ja-JP" altLang="en-US"/>
           </a:p>
@@ -2635,7 +2638,7 @@
           <a:p>
             <a:fld id="{1788137F-4795-4296-82D0-B103BE589F84}" type="datetimeFigureOut">
               <a:rPr kumimoji="1" lang="ja-JP" altLang="en-US" smtClean="0"/>
-              <a:t>2025/1/18</a:t>
+              <a:t>2025/4/26</a:t>
             </a:fld>
             <a:endParaRPr kumimoji="1" lang="ja-JP" altLang="en-US"/>
           </a:p>
@@ -2730,7 +2733,7 @@
           <a:p>
             <a:fld id="{1788137F-4795-4296-82D0-B103BE589F84}" type="datetimeFigureOut">
               <a:rPr kumimoji="1" lang="ja-JP" altLang="en-US" smtClean="0"/>
-              <a:t>2025/1/18</a:t>
+              <a:t>2025/4/26</a:t>
             </a:fld>
             <a:endParaRPr kumimoji="1" lang="ja-JP" altLang="en-US"/>
           </a:p>
@@ -3039,7 +3042,7 @@
           <a:p>
             <a:fld id="{1788137F-4795-4296-82D0-B103BE589F84}" type="datetimeFigureOut">
               <a:rPr kumimoji="1" lang="ja-JP" altLang="en-US" smtClean="0"/>
-              <a:t>2025/1/18</a:t>
+              <a:t>2025/4/26</a:t>
             </a:fld>
             <a:endParaRPr kumimoji="1" lang="ja-JP" altLang="en-US"/>
           </a:p>
@@ -3296,7 +3299,7 @@
           <a:p>
             <a:fld id="{1788137F-4795-4296-82D0-B103BE589F84}" type="datetimeFigureOut">
               <a:rPr kumimoji="1" lang="ja-JP" altLang="en-US" smtClean="0"/>
-              <a:t>2025/1/18</a:t>
+              <a:t>2025/4/26</a:t>
             </a:fld>
             <a:endParaRPr kumimoji="1" lang="ja-JP" altLang="en-US"/>
           </a:p>
@@ -3541,7 +3544,7 @@
           <a:p>
             <a:fld id="{1788137F-4795-4296-82D0-B103BE589F84}" type="datetimeFigureOut">
               <a:rPr kumimoji="1" lang="ja-JP" altLang="en-US" smtClean="0"/>
-              <a:t>2025/1/18</a:t>
+              <a:t>2025/4/26</a:t>
             </a:fld>
             <a:endParaRPr kumimoji="1" lang="ja-JP" altLang="en-US"/>
           </a:p>
@@ -5199,8 +5202,8 @@
           </a:p>
         </p:txBody>
       </p:sp>
-      <mc:AlternateContent xmlns:mc="http://schemas.openxmlformats.org/markup-compatibility/2006">
-        <mc:Choice xmlns:a14="http://schemas.microsoft.com/office/drawing/2010/main" Requires="a14">
+      <mc:AlternateContent xmlns:mc="http://schemas.openxmlformats.org/markup-compatibility/2006" xmlns:a14="http://schemas.microsoft.com/office/drawing/2010/main">
+        <mc:Choice Requires="a14">
           <p:sp>
             <p:nvSpPr>
               <p:cNvPr id="3" name="コンテンツ プレースホルダー 2">
@@ -6868,7 +6871,7 @@
             </p:txBody>
           </p:sp>
         </mc:Choice>
-        <mc:Fallback>
+        <mc:Fallback xmlns="">
           <p:sp>
             <p:nvSpPr>
               <p:cNvPr id="3" name="コンテンツ プレースホルダー 2">
@@ -6973,8 +6976,8 @@
           </a:p>
         </p:txBody>
       </p:sp>
-      <mc:AlternateContent xmlns:mc="http://schemas.openxmlformats.org/markup-compatibility/2006">
-        <mc:Choice xmlns:a14="http://schemas.microsoft.com/office/drawing/2010/main" Requires="a14">
+      <mc:AlternateContent xmlns:mc="http://schemas.openxmlformats.org/markup-compatibility/2006" xmlns:a14="http://schemas.microsoft.com/office/drawing/2010/main">
+        <mc:Choice Requires="a14">
           <p:sp>
             <p:nvSpPr>
               <p:cNvPr id="3" name="コンテンツ プレースホルダー 2">
@@ -7406,13 +7409,7 @@
                                 <a:rPr lang="en-US" altLang="ja-JP" sz="2400" i="1">
                                   <a:latin typeface="Cambria Math" panose="02040503050406030204" pitchFamily="18" charset="0"/>
                                 </a:rPr>
-                                <m:t>1</m:t>
-                              </m:r>
-                              <m:r>
-                                <a:rPr lang="en-US" altLang="ja-JP" sz="2400" i="1">
-                                  <a:latin typeface="Cambria Math" panose="02040503050406030204" pitchFamily="18" charset="0"/>
-                                </a:rPr>
-                                <m:t>−</m:t>
+                                <m:t>1−</m:t>
                               </m:r>
                               <m:sSub>
                                 <m:sSubPr>
@@ -7891,7 +7888,7 @@
             </p:txBody>
           </p:sp>
         </mc:Choice>
-        <mc:Fallback>
+        <mc:Fallback xmlns="">
           <p:sp>
             <p:nvSpPr>
               <p:cNvPr id="3" name="コンテンツ プレースホルダー 2">
@@ -12761,8 +12758,8 @@
           </a:p>
         </p:txBody>
       </p:sp>
-      <mc:AlternateContent xmlns:mc="http://schemas.openxmlformats.org/markup-compatibility/2006">
-        <mc:Choice xmlns:a14="http://schemas.microsoft.com/office/drawing/2010/main" Requires="a14">
+      <mc:AlternateContent xmlns:mc="http://schemas.openxmlformats.org/markup-compatibility/2006" xmlns:a14="http://schemas.microsoft.com/office/drawing/2010/main">
+        <mc:Choice Requires="a14">
           <p:sp>
             <p:nvSpPr>
               <p:cNvPr id="3" name="コンテンツ プレースホルダー 2">
@@ -13128,7 +13125,7 @@
             </p:txBody>
           </p:sp>
         </mc:Choice>
-        <mc:Fallback>
+        <mc:Fallback xmlns="">
           <p:sp>
             <p:nvSpPr>
               <p:cNvPr id="3" name="コンテンツ プレースホルダー 2">
@@ -22971,8 +22968,8 @@
           </p:sp>
         </mc:Fallback>
       </mc:AlternateContent>
-      <mc:AlternateContent xmlns:mc="http://schemas.openxmlformats.org/markup-compatibility/2006">
-        <mc:Choice xmlns:a14="http://schemas.microsoft.com/office/drawing/2010/main" Requires="a14">
+      <mc:AlternateContent xmlns:mc="http://schemas.openxmlformats.org/markup-compatibility/2006" xmlns:a14="http://schemas.microsoft.com/office/drawing/2010/main">
+        <mc:Choice Requires="a14">
           <p:sp>
             <p:nvSpPr>
               <p:cNvPr id="4" name="テキスト ボックス 3">
@@ -23001,6 +22998,7 @@
               </a:bodyPr>
               <a:lstStyle/>
               <a:p>
+                <a:pPr/>
                 <a:r>
                   <a:rPr kumimoji="1" lang="ja-JP" altLang="en-US" b="0">
                     <a:latin typeface="Cambria Math" panose="02040503050406030204" pitchFamily="18" charset="0"/>
@@ -23293,7 +23291,7 @@
             </p:txBody>
           </p:sp>
         </mc:Choice>
-        <mc:Fallback>
+        <mc:Fallback xmlns="">
           <p:sp>
             <p:nvSpPr>
               <p:cNvPr id="4" name="テキスト ボックス 3">
@@ -23352,6 +23350,5808 @@
 </file>
 
 <file path=ppt/slides/slide24.xml><?xml version="1.0" encoding="utf-8"?>
+<p:sld xmlns:a="http://schemas.openxmlformats.org/drawingml/2006/main" xmlns:r="http://schemas.openxmlformats.org/officeDocument/2006/relationships" xmlns:p="http://schemas.openxmlformats.org/presentationml/2006/main">
+  <p:cSld>
+    <p:spTree>
+      <p:nvGrpSpPr>
+        <p:cNvPr id="1" name=""/>
+        <p:cNvGrpSpPr/>
+        <p:nvPr/>
+      </p:nvGrpSpPr>
+      <p:grpSpPr>
+        <a:xfrm>
+          <a:off x="0" y="0"/>
+          <a:ext cx="0" cy="0"/>
+          <a:chOff x="0" y="0"/>
+          <a:chExt cx="0" cy="0"/>
+        </a:xfrm>
+      </p:grpSpPr>
+      <p:sp>
+        <p:nvSpPr>
+          <p:cNvPr id="2" name="タイトル 1">
+            <a:extLst>
+              <a:ext uri="{FF2B5EF4-FFF2-40B4-BE49-F238E27FC236}">
+                <a16:creationId xmlns:a16="http://schemas.microsoft.com/office/drawing/2014/main" id="{C2091782-6B09-C7BA-5D83-7A9355E051E3}"/>
+              </a:ext>
+            </a:extLst>
+          </p:cNvPr>
+          <p:cNvSpPr>
+            <a:spLocks noGrp="1"/>
+          </p:cNvSpPr>
+          <p:nvPr>
+            <p:ph type="title"/>
+          </p:nvPr>
+        </p:nvSpPr>
+        <p:spPr/>
+        <p:txBody>
+          <a:bodyPr/>
+          <a:lstStyle/>
+          <a:p>
+            <a:r>
+              <a:rPr kumimoji="1" lang="en-US" altLang="ja-JP"/>
+              <a:t>bssrdf</a:t>
+            </a:r>
+            <a:endParaRPr kumimoji="1" lang="ja-JP" altLang="en-US"/>
+          </a:p>
+        </p:txBody>
+      </p:sp>
+      <mc:AlternateContent xmlns:mc="http://schemas.openxmlformats.org/markup-compatibility/2006">
+        <mc:Choice xmlns:a14="http://schemas.microsoft.com/office/drawing/2010/main" Requires="a14">
+          <p:sp>
+            <p:nvSpPr>
+              <p:cNvPr id="3" name="コンテンツ プレースホルダー 2">
+                <a:extLst>
+                  <a:ext uri="{FF2B5EF4-FFF2-40B4-BE49-F238E27FC236}">
+                    <a16:creationId xmlns:a16="http://schemas.microsoft.com/office/drawing/2014/main" id="{8C7AE5F8-8DB9-6A41-976F-DB330CA5A88E}"/>
+                  </a:ext>
+                </a:extLst>
+              </p:cNvPr>
+              <p:cNvSpPr>
+                <a:spLocks noGrp="1"/>
+              </p:cNvSpPr>
+              <p:nvPr>
+                <p:ph idx="1"/>
+              </p:nvPr>
+            </p:nvSpPr>
+            <p:spPr>
+              <a:xfrm>
+                <a:off x="838200" y="1825625"/>
+                <a:ext cx="6914196" cy="4351338"/>
+              </a:xfrm>
+            </p:spPr>
+            <p:txBody>
+              <a:bodyPr>
+                <a:normAutofit/>
+              </a:bodyPr>
+              <a:lstStyle/>
+              <a:p>
+                <a:pPr lvl="8"/>
+                <a:endParaRPr kumimoji="1" lang="en-US" altLang="ja-JP" sz="1600"/>
+              </a:p>
+              <a:p>
+                <a:pPr marL="0" indent="0">
+                  <a:buNone/>
+                </a:pPr>
+                <a14:m>
+                  <m:oMathPara xmlns:m="http://schemas.openxmlformats.org/officeDocument/2006/math">
+                    <m:oMathParaPr>
+                      <m:jc m:val="centerGroup"/>
+                    </m:oMathParaPr>
+                    <m:oMath xmlns:m="http://schemas.openxmlformats.org/officeDocument/2006/math">
+                      <m:r>
+                        <a:rPr lang="en-US" altLang="ja-JP" sz="2400" b="0" i="1" smtClean="0">
+                          <a:latin typeface="Cambria Math" panose="02040503050406030204" pitchFamily="18" charset="0"/>
+                        </a:rPr>
+                        <m:t>𝑝</m:t>
+                      </m:r>
+                      <m:d>
+                        <m:dPr>
+                          <m:ctrlPr>
+                            <a:rPr lang="en-US" altLang="ja-JP" sz="2400" b="0" i="1" smtClean="0">
+                              <a:latin typeface="Cambria Math" panose="02040503050406030204" pitchFamily="18" charset="0"/>
+                            </a:rPr>
+                          </m:ctrlPr>
+                        </m:dPr>
+                        <m:e>
+                          <m:r>
+                            <a:rPr lang="en-US" altLang="ja-JP" sz="2400" b="0" i="1" smtClean="0">
+                              <a:latin typeface="Cambria Math" panose="02040503050406030204" pitchFamily="18" charset="0"/>
+                            </a:rPr>
+                            <m:t>𝑡</m:t>
+                          </m:r>
+                        </m:e>
+                      </m:d>
+                      <m:r>
+                        <a:rPr lang="en-US" altLang="ja-JP" sz="2400" b="0" i="1" smtClean="0">
+                          <a:latin typeface="Cambria Math" panose="02040503050406030204" pitchFamily="18" charset="0"/>
+                        </a:rPr>
+                        <m:t>=</m:t>
+                      </m:r>
+                      <m:r>
+                        <a:rPr lang="en-US" altLang="ja-JP" sz="2400" b="0" i="1" smtClean="0">
+                          <a:latin typeface="Cambria Math" panose="02040503050406030204" pitchFamily="18" charset="0"/>
+                        </a:rPr>
+                        <m:t>𝑜</m:t>
+                      </m:r>
+                      <m:r>
+                        <a:rPr lang="en-US" altLang="ja-JP" sz="2400" b="0" i="1" smtClean="0">
+                          <a:latin typeface="Cambria Math" panose="02040503050406030204" pitchFamily="18" charset="0"/>
+                        </a:rPr>
+                        <m:t>+</m:t>
+                      </m:r>
+                      <m:r>
+                        <a:rPr lang="en-US" altLang="ja-JP" sz="2400" b="0" i="1" smtClean="0">
+                          <a:latin typeface="Cambria Math" panose="02040503050406030204" pitchFamily="18" charset="0"/>
+                        </a:rPr>
+                        <m:t>𝑡𝑑</m:t>
+                      </m:r>
+                      <m:r>
+                        <a:rPr lang="en-US" altLang="ja-JP" sz="2400" b="0" i="1" smtClean="0">
+                          <a:latin typeface="Cambria Math" panose="02040503050406030204" pitchFamily="18" charset="0"/>
+                        </a:rPr>
+                        <m:t>,  </m:t>
+                      </m:r>
+                      <m:r>
+                        <a:rPr lang="en-US" altLang="ja-JP" sz="2400" b="0" i="1" smtClean="0">
+                          <a:latin typeface="Cambria Math" panose="02040503050406030204" pitchFamily="18" charset="0"/>
+                        </a:rPr>
+                        <m:t>𝑝</m:t>
+                      </m:r>
+                      <m:d>
+                        <m:dPr>
+                          <m:ctrlPr>
+                            <a:rPr lang="en-US" altLang="ja-JP" sz="2400" b="0" i="1" smtClean="0">
+                              <a:latin typeface="Cambria Math" panose="02040503050406030204" pitchFamily="18" charset="0"/>
+                            </a:rPr>
+                          </m:ctrlPr>
+                        </m:dPr>
+                        <m:e>
+                          <m:r>
+                            <a:rPr lang="en-US" altLang="ja-JP" sz="2400" b="0" i="1" smtClean="0">
+                              <a:latin typeface="Cambria Math" panose="02040503050406030204" pitchFamily="18" charset="0"/>
+                            </a:rPr>
+                            <m:t>𝑡</m:t>
+                          </m:r>
+                        </m:e>
+                      </m:d>
+                      <m:r>
+                        <a:rPr lang="en-US" altLang="ja-JP" sz="2400" b="0" i="1" smtClean="0">
+                          <a:latin typeface="Cambria Math" panose="02040503050406030204" pitchFamily="18" charset="0"/>
+                        </a:rPr>
+                        <m:t>∙</m:t>
+                      </m:r>
+                      <m:r>
+                        <a:rPr lang="en-US" altLang="ja-JP" sz="2400" b="0" i="1" smtClean="0">
+                          <a:latin typeface="Cambria Math" panose="02040503050406030204" pitchFamily="18" charset="0"/>
+                        </a:rPr>
+                        <m:t>𝑝</m:t>
+                      </m:r>
+                      <m:d>
+                        <m:dPr>
+                          <m:ctrlPr>
+                            <a:rPr lang="en-US" altLang="ja-JP" sz="2400" b="0" i="1" smtClean="0">
+                              <a:latin typeface="Cambria Math" panose="02040503050406030204" pitchFamily="18" charset="0"/>
+                            </a:rPr>
+                          </m:ctrlPr>
+                        </m:dPr>
+                        <m:e>
+                          <m:r>
+                            <a:rPr lang="en-US" altLang="ja-JP" sz="2400" b="0" i="1" smtClean="0">
+                              <a:latin typeface="Cambria Math" panose="02040503050406030204" pitchFamily="18" charset="0"/>
+                            </a:rPr>
+                            <m:t>𝑡</m:t>
+                          </m:r>
+                        </m:e>
+                      </m:d>
+                      <m:r>
+                        <a:rPr lang="en-US" altLang="ja-JP" sz="2400" b="0" i="1" smtClean="0">
+                          <a:latin typeface="Cambria Math" panose="02040503050406030204" pitchFamily="18" charset="0"/>
+                        </a:rPr>
+                        <m:t>=</m:t>
+                      </m:r>
+                      <m:sSup>
+                        <m:sSupPr>
+                          <m:ctrlPr>
+                            <a:rPr lang="en-US" altLang="ja-JP" sz="2400" b="0" i="1" smtClean="0">
+                              <a:latin typeface="Cambria Math" panose="02040503050406030204" pitchFamily="18" charset="0"/>
+                            </a:rPr>
+                          </m:ctrlPr>
+                        </m:sSupPr>
+                        <m:e>
+                          <m:r>
+                            <a:rPr lang="en-US" altLang="ja-JP" sz="2400" b="0" i="1" smtClean="0">
+                              <a:latin typeface="Cambria Math" panose="02040503050406030204" pitchFamily="18" charset="0"/>
+                            </a:rPr>
+                            <m:t>𝑅</m:t>
+                          </m:r>
+                        </m:e>
+                        <m:sup>
+                          <m:r>
+                            <a:rPr lang="en-US" altLang="ja-JP" sz="2400" b="0" i="1" smtClean="0">
+                              <a:latin typeface="Cambria Math" panose="02040503050406030204" pitchFamily="18" charset="0"/>
+                            </a:rPr>
+                            <m:t>2</m:t>
+                          </m:r>
+                        </m:sup>
+                      </m:sSup>
+                    </m:oMath>
+                    <m:oMath xmlns:m="http://schemas.openxmlformats.org/officeDocument/2006/math">
+                      <m:r>
+                        <a:rPr lang="en-US" altLang="ja-JP" sz="2400" b="0" i="1" smtClean="0">
+                          <a:latin typeface="Cambria Math" panose="02040503050406030204" pitchFamily="18" charset="0"/>
+                        </a:rPr>
+                        <m:t> </m:t>
+                      </m:r>
+                    </m:oMath>
+                    <m:oMath xmlns:m="http://schemas.openxmlformats.org/officeDocument/2006/math">
+                      <m:d>
+                        <m:dPr>
+                          <m:ctrlPr>
+                            <a:rPr lang="en-US" altLang="ja-JP" sz="2400" b="0" i="1" smtClean="0">
+                              <a:latin typeface="Cambria Math" panose="02040503050406030204" pitchFamily="18" charset="0"/>
+                            </a:rPr>
+                          </m:ctrlPr>
+                        </m:dPr>
+                        <m:e>
+                          <m:r>
+                            <a:rPr lang="en-US" altLang="ja-JP" sz="2400" b="0" i="1" smtClean="0">
+                              <a:latin typeface="Cambria Math" panose="02040503050406030204" pitchFamily="18" charset="0"/>
+                            </a:rPr>
+                            <m:t>𝑜</m:t>
+                          </m:r>
+                          <m:r>
+                            <a:rPr lang="en-US" altLang="ja-JP" sz="2400" b="0" i="1" smtClean="0">
+                              <a:latin typeface="Cambria Math" panose="02040503050406030204" pitchFamily="18" charset="0"/>
+                            </a:rPr>
+                            <m:t>∙</m:t>
+                          </m:r>
+                          <m:r>
+                            <a:rPr lang="en-US" altLang="ja-JP" sz="2400" b="0" i="1" smtClean="0">
+                              <a:latin typeface="Cambria Math" panose="02040503050406030204" pitchFamily="18" charset="0"/>
+                            </a:rPr>
+                            <m:t>𝑜</m:t>
+                          </m:r>
+                        </m:e>
+                      </m:d>
+                      <m:r>
+                        <a:rPr lang="en-US" altLang="ja-JP" sz="2400" b="0" i="1" smtClean="0">
+                          <a:latin typeface="Cambria Math" panose="02040503050406030204" pitchFamily="18" charset="0"/>
+                        </a:rPr>
+                        <m:t>+2</m:t>
+                      </m:r>
+                      <m:d>
+                        <m:dPr>
+                          <m:ctrlPr>
+                            <a:rPr lang="en-US" altLang="ja-JP" sz="2400" b="0" i="1" smtClean="0">
+                              <a:latin typeface="Cambria Math" panose="02040503050406030204" pitchFamily="18" charset="0"/>
+                            </a:rPr>
+                          </m:ctrlPr>
+                        </m:dPr>
+                        <m:e>
+                          <m:r>
+                            <a:rPr lang="en-US" altLang="ja-JP" sz="2400" b="0" i="1" smtClean="0">
+                              <a:latin typeface="Cambria Math" panose="02040503050406030204" pitchFamily="18" charset="0"/>
+                            </a:rPr>
+                            <m:t>𝑜</m:t>
+                          </m:r>
+                          <m:r>
+                            <a:rPr lang="en-US" altLang="ja-JP" sz="2400" b="0" i="1" smtClean="0">
+                              <a:latin typeface="Cambria Math" panose="02040503050406030204" pitchFamily="18" charset="0"/>
+                            </a:rPr>
+                            <m:t>∙</m:t>
+                          </m:r>
+                          <m:r>
+                            <a:rPr lang="en-US" altLang="ja-JP" sz="2400" b="0" i="1" smtClean="0">
+                              <a:latin typeface="Cambria Math" panose="02040503050406030204" pitchFamily="18" charset="0"/>
+                            </a:rPr>
+                            <m:t>𝑑</m:t>
+                          </m:r>
+                        </m:e>
+                      </m:d>
+                      <m:r>
+                        <a:rPr lang="en-US" altLang="ja-JP" sz="2400" b="0" i="1" smtClean="0">
+                          <a:latin typeface="Cambria Math" panose="02040503050406030204" pitchFamily="18" charset="0"/>
+                        </a:rPr>
+                        <m:t>𝑡</m:t>
+                      </m:r>
+                      <m:r>
+                        <a:rPr lang="en-US" altLang="ja-JP" sz="2400" b="0" i="1" smtClean="0">
+                          <a:latin typeface="Cambria Math" panose="02040503050406030204" pitchFamily="18" charset="0"/>
+                        </a:rPr>
+                        <m:t>+</m:t>
+                      </m:r>
+                      <m:d>
+                        <m:dPr>
+                          <m:ctrlPr>
+                            <a:rPr lang="en-US" altLang="ja-JP" sz="2400" b="0" i="1" smtClean="0">
+                              <a:latin typeface="Cambria Math" panose="02040503050406030204" pitchFamily="18" charset="0"/>
+                            </a:rPr>
+                          </m:ctrlPr>
+                        </m:dPr>
+                        <m:e>
+                          <m:r>
+                            <a:rPr lang="en-US" altLang="ja-JP" sz="2400" b="0" i="1" smtClean="0">
+                              <a:latin typeface="Cambria Math" panose="02040503050406030204" pitchFamily="18" charset="0"/>
+                            </a:rPr>
+                            <m:t>𝑑</m:t>
+                          </m:r>
+                          <m:r>
+                            <a:rPr lang="en-US" altLang="ja-JP" sz="2400" b="0" i="1" smtClean="0">
+                              <a:latin typeface="Cambria Math" panose="02040503050406030204" pitchFamily="18" charset="0"/>
+                            </a:rPr>
+                            <m:t>∙</m:t>
+                          </m:r>
+                          <m:r>
+                            <a:rPr lang="en-US" altLang="ja-JP" sz="2400" b="0" i="1" smtClean="0">
+                              <a:latin typeface="Cambria Math" panose="02040503050406030204" pitchFamily="18" charset="0"/>
+                            </a:rPr>
+                            <m:t>𝑑</m:t>
+                          </m:r>
+                        </m:e>
+                      </m:d>
+                      <m:sSup>
+                        <m:sSupPr>
+                          <m:ctrlPr>
+                            <a:rPr lang="en-US" altLang="ja-JP" sz="2400" b="0" i="1" smtClean="0">
+                              <a:latin typeface="Cambria Math" panose="02040503050406030204" pitchFamily="18" charset="0"/>
+                            </a:rPr>
+                          </m:ctrlPr>
+                        </m:sSupPr>
+                        <m:e>
+                          <m:r>
+                            <a:rPr lang="en-US" altLang="ja-JP" sz="2400" b="0" i="1" smtClean="0">
+                              <a:latin typeface="Cambria Math" panose="02040503050406030204" pitchFamily="18" charset="0"/>
+                            </a:rPr>
+                            <m:t>𝑡</m:t>
+                          </m:r>
+                        </m:e>
+                        <m:sup>
+                          <m:r>
+                            <a:rPr lang="en-US" altLang="ja-JP" sz="2400" b="0" i="1" smtClean="0">
+                              <a:latin typeface="Cambria Math" panose="02040503050406030204" pitchFamily="18" charset="0"/>
+                            </a:rPr>
+                            <m:t>2</m:t>
+                          </m:r>
+                        </m:sup>
+                      </m:sSup>
+                      <m:r>
+                        <a:rPr lang="en-US" altLang="ja-JP" sz="2400" b="0" i="1" smtClean="0">
+                          <a:latin typeface="Cambria Math" panose="02040503050406030204" pitchFamily="18" charset="0"/>
+                        </a:rPr>
+                        <m:t>=</m:t>
+                      </m:r>
+                      <m:sSup>
+                        <m:sSupPr>
+                          <m:ctrlPr>
+                            <a:rPr lang="en-US" altLang="ja-JP" sz="2400" b="0" i="1" smtClean="0">
+                              <a:latin typeface="Cambria Math" panose="02040503050406030204" pitchFamily="18" charset="0"/>
+                            </a:rPr>
+                          </m:ctrlPr>
+                        </m:sSupPr>
+                        <m:e>
+                          <m:r>
+                            <a:rPr lang="en-US" altLang="ja-JP" sz="2400" b="0" i="1" smtClean="0">
+                              <a:latin typeface="Cambria Math" panose="02040503050406030204" pitchFamily="18" charset="0"/>
+                            </a:rPr>
+                            <m:t>𝑅</m:t>
+                          </m:r>
+                        </m:e>
+                        <m:sup>
+                          <m:r>
+                            <a:rPr lang="en-US" altLang="ja-JP" sz="2400" b="0" i="1" smtClean="0">
+                              <a:latin typeface="Cambria Math" panose="02040503050406030204" pitchFamily="18" charset="0"/>
+                            </a:rPr>
+                            <m:t>2</m:t>
+                          </m:r>
+                        </m:sup>
+                      </m:sSup>
+                    </m:oMath>
+                    <m:oMath xmlns:m="http://schemas.openxmlformats.org/officeDocument/2006/math">
+                      <m:r>
+                        <a:rPr lang="en-US" altLang="ja-JP" sz="2400" b="0" i="1" smtClean="0">
+                          <a:latin typeface="Cambria Math" panose="02040503050406030204" pitchFamily="18" charset="0"/>
+                        </a:rPr>
+                        <m:t> </m:t>
+                      </m:r>
+                    </m:oMath>
+                    <m:oMath xmlns:m="http://schemas.openxmlformats.org/officeDocument/2006/math">
+                      <m:sSup>
+                        <m:sSupPr>
+                          <m:ctrlPr>
+                            <a:rPr lang="en-US" altLang="ja-JP" sz="2400" b="0" i="1" smtClean="0">
+                              <a:latin typeface="Cambria Math" panose="02040503050406030204" pitchFamily="18" charset="0"/>
+                            </a:rPr>
+                          </m:ctrlPr>
+                        </m:sSupPr>
+                        <m:e>
+                          <m:r>
+                            <a:rPr lang="en-US" altLang="ja-JP" sz="2400" b="0" i="1" smtClean="0">
+                              <a:latin typeface="Cambria Math" panose="02040503050406030204" pitchFamily="18" charset="0"/>
+                            </a:rPr>
+                            <m:t>𝑡</m:t>
+                          </m:r>
+                        </m:e>
+                        <m:sup>
+                          <m:r>
+                            <a:rPr lang="en-US" altLang="ja-JP" sz="2400" b="0" i="1" smtClean="0">
+                              <a:latin typeface="Cambria Math" panose="02040503050406030204" pitchFamily="18" charset="0"/>
+                            </a:rPr>
+                            <m:t>2</m:t>
+                          </m:r>
+                        </m:sup>
+                      </m:sSup>
+                      <m:r>
+                        <a:rPr lang="en-US" altLang="ja-JP" sz="2400" i="1">
+                          <a:latin typeface="Cambria Math" panose="02040503050406030204" pitchFamily="18" charset="0"/>
+                        </a:rPr>
+                        <m:t>+2</m:t>
+                      </m:r>
+                      <m:d>
+                        <m:dPr>
+                          <m:ctrlPr>
+                            <a:rPr lang="en-US" altLang="ja-JP" sz="2400" i="1">
+                              <a:latin typeface="Cambria Math" panose="02040503050406030204" pitchFamily="18" charset="0"/>
+                            </a:rPr>
+                          </m:ctrlPr>
+                        </m:dPr>
+                        <m:e>
+                          <m:r>
+                            <a:rPr lang="en-US" altLang="ja-JP" sz="2400" i="1">
+                              <a:latin typeface="Cambria Math" panose="02040503050406030204" pitchFamily="18" charset="0"/>
+                            </a:rPr>
+                            <m:t>𝑜</m:t>
+                          </m:r>
+                          <m:r>
+                            <a:rPr lang="en-US" altLang="ja-JP" sz="2400" i="1">
+                              <a:latin typeface="Cambria Math" panose="02040503050406030204" pitchFamily="18" charset="0"/>
+                            </a:rPr>
+                            <m:t>∙</m:t>
+                          </m:r>
+                          <m:r>
+                            <a:rPr lang="en-US" altLang="ja-JP" sz="2400" i="1">
+                              <a:latin typeface="Cambria Math" panose="02040503050406030204" pitchFamily="18" charset="0"/>
+                            </a:rPr>
+                            <m:t>𝑑</m:t>
+                          </m:r>
+                        </m:e>
+                      </m:d>
+                      <m:r>
+                        <a:rPr lang="en-US" altLang="ja-JP" sz="2400" i="1">
+                          <a:latin typeface="Cambria Math" panose="02040503050406030204" pitchFamily="18" charset="0"/>
+                        </a:rPr>
+                        <m:t>𝑡</m:t>
+                      </m:r>
+                      <m:r>
+                        <a:rPr lang="en-US" altLang="ja-JP" sz="2400" b="0" i="1" smtClean="0">
+                          <a:latin typeface="Cambria Math" panose="02040503050406030204" pitchFamily="18" charset="0"/>
+                        </a:rPr>
+                        <m:t>+</m:t>
+                      </m:r>
+                      <m:d>
+                        <m:dPr>
+                          <m:begChr m:val="{"/>
+                          <m:endChr m:val="}"/>
+                          <m:ctrlPr>
+                            <a:rPr lang="en-US" altLang="ja-JP" sz="2400" b="0" i="1" smtClean="0">
+                              <a:latin typeface="Cambria Math" panose="02040503050406030204" pitchFamily="18" charset="0"/>
+                            </a:rPr>
+                          </m:ctrlPr>
+                        </m:dPr>
+                        <m:e>
+                          <m:d>
+                            <m:dPr>
+                              <m:ctrlPr>
+                                <a:rPr lang="en-US" altLang="ja-JP" sz="2400" i="1">
+                                  <a:latin typeface="Cambria Math" panose="02040503050406030204" pitchFamily="18" charset="0"/>
+                                </a:rPr>
+                              </m:ctrlPr>
+                            </m:dPr>
+                            <m:e>
+                              <m:r>
+                                <a:rPr lang="en-US" altLang="ja-JP" sz="2400" i="1">
+                                  <a:latin typeface="Cambria Math" panose="02040503050406030204" pitchFamily="18" charset="0"/>
+                                </a:rPr>
+                                <m:t>𝑜</m:t>
+                              </m:r>
+                              <m:r>
+                                <a:rPr lang="en-US" altLang="ja-JP" sz="2400" i="1">
+                                  <a:latin typeface="Cambria Math" panose="02040503050406030204" pitchFamily="18" charset="0"/>
+                                </a:rPr>
+                                <m:t>∙</m:t>
+                              </m:r>
+                              <m:r>
+                                <a:rPr lang="en-US" altLang="ja-JP" sz="2400" i="1">
+                                  <a:latin typeface="Cambria Math" panose="02040503050406030204" pitchFamily="18" charset="0"/>
+                                </a:rPr>
+                                <m:t>𝑜</m:t>
+                              </m:r>
+                            </m:e>
+                          </m:d>
+                          <m:r>
+                            <a:rPr lang="en-US" altLang="ja-JP" sz="2400" b="0" i="1" smtClean="0">
+                              <a:latin typeface="Cambria Math" panose="02040503050406030204" pitchFamily="18" charset="0"/>
+                            </a:rPr>
+                            <m:t>−</m:t>
+                          </m:r>
+                          <m:sSup>
+                            <m:sSupPr>
+                              <m:ctrlPr>
+                                <a:rPr lang="en-US" altLang="ja-JP" sz="2400" b="0" i="1" smtClean="0">
+                                  <a:latin typeface="Cambria Math" panose="02040503050406030204" pitchFamily="18" charset="0"/>
+                                </a:rPr>
+                              </m:ctrlPr>
+                            </m:sSupPr>
+                            <m:e>
+                              <m:r>
+                                <a:rPr lang="en-US" altLang="ja-JP" sz="2400" b="0" i="1" smtClean="0">
+                                  <a:latin typeface="Cambria Math" panose="02040503050406030204" pitchFamily="18" charset="0"/>
+                                </a:rPr>
+                                <m:t>𝑅</m:t>
+                              </m:r>
+                            </m:e>
+                            <m:sup>
+                              <m:r>
+                                <a:rPr lang="en-US" altLang="ja-JP" sz="2400" b="0" i="1" smtClean="0">
+                                  <a:latin typeface="Cambria Math" panose="02040503050406030204" pitchFamily="18" charset="0"/>
+                                </a:rPr>
+                                <m:t>2</m:t>
+                              </m:r>
+                            </m:sup>
+                          </m:sSup>
+                        </m:e>
+                      </m:d>
+                      <m:r>
+                        <a:rPr lang="en-US" altLang="ja-JP" sz="2400" i="1">
+                          <a:latin typeface="Cambria Math" panose="02040503050406030204" pitchFamily="18" charset="0"/>
+                        </a:rPr>
+                        <m:t>=</m:t>
+                      </m:r>
+                      <m:r>
+                        <a:rPr lang="en-US" altLang="ja-JP" sz="2400" b="0" i="1" smtClean="0">
+                          <a:latin typeface="Cambria Math" panose="02040503050406030204" pitchFamily="18" charset="0"/>
+                        </a:rPr>
+                        <m:t>0</m:t>
+                      </m:r>
+                    </m:oMath>
+                    <m:oMath xmlns:m="http://schemas.openxmlformats.org/officeDocument/2006/math">
+                      <m:r>
+                        <a:rPr lang="en-US" altLang="ja-JP" sz="2400" b="0" i="1" smtClean="0">
+                          <a:latin typeface="Cambria Math" panose="02040503050406030204" pitchFamily="18" charset="0"/>
+                        </a:rPr>
+                        <m:t> </m:t>
+                      </m:r>
+                    </m:oMath>
+                    <m:oMath xmlns:m="http://schemas.openxmlformats.org/officeDocument/2006/math">
+                      <m:r>
+                        <a:rPr lang="en-US" altLang="ja-JP" sz="2400" b="0" i="1" smtClean="0">
+                          <a:latin typeface="Cambria Math" panose="02040503050406030204" pitchFamily="18" charset="0"/>
+                        </a:rPr>
+                        <m:t>𝑡</m:t>
+                      </m:r>
+                      <m:r>
+                        <a:rPr lang="en-US" altLang="ja-JP" sz="2400" b="0" i="1" smtClean="0">
+                          <a:latin typeface="Cambria Math" panose="02040503050406030204" pitchFamily="18" charset="0"/>
+                        </a:rPr>
+                        <m:t>=−</m:t>
+                      </m:r>
+                      <m:d>
+                        <m:dPr>
+                          <m:ctrlPr>
+                            <a:rPr lang="en-US" altLang="ja-JP" sz="2400" i="1">
+                              <a:latin typeface="Cambria Math" panose="02040503050406030204" pitchFamily="18" charset="0"/>
+                            </a:rPr>
+                          </m:ctrlPr>
+                        </m:dPr>
+                        <m:e>
+                          <m:r>
+                            <a:rPr lang="en-US" altLang="ja-JP" sz="2400" i="1">
+                              <a:latin typeface="Cambria Math" panose="02040503050406030204" pitchFamily="18" charset="0"/>
+                            </a:rPr>
+                            <m:t>𝑜</m:t>
+                          </m:r>
+                          <m:r>
+                            <a:rPr lang="en-US" altLang="ja-JP" sz="2400" i="1">
+                              <a:latin typeface="Cambria Math" panose="02040503050406030204" pitchFamily="18" charset="0"/>
+                            </a:rPr>
+                            <m:t>∙</m:t>
+                          </m:r>
+                          <m:r>
+                            <a:rPr lang="en-US" altLang="ja-JP" sz="2400" i="1">
+                              <a:latin typeface="Cambria Math" panose="02040503050406030204" pitchFamily="18" charset="0"/>
+                            </a:rPr>
+                            <m:t>𝑑</m:t>
+                          </m:r>
+                        </m:e>
+                      </m:d>
+                      <m:r>
+                        <a:rPr lang="en-US" altLang="ja-JP" sz="2400" i="1">
+                          <a:latin typeface="Cambria Math" panose="02040503050406030204" pitchFamily="18" charset="0"/>
+                        </a:rPr>
+                        <m:t>±</m:t>
+                      </m:r>
+                      <m:rad>
+                        <m:radPr>
+                          <m:degHide m:val="on"/>
+                          <m:ctrlPr>
+                            <a:rPr lang="en-US" altLang="ja-JP" sz="2400" i="1">
+                              <a:latin typeface="Cambria Math" panose="02040503050406030204" pitchFamily="18" charset="0"/>
+                            </a:rPr>
+                          </m:ctrlPr>
+                        </m:radPr>
+                        <m:deg/>
+                        <m:e>
+                          <m:sSup>
+                            <m:sSupPr>
+                              <m:ctrlPr>
+                                <a:rPr lang="en-US" altLang="ja-JP" sz="2400" i="1">
+                                  <a:latin typeface="Cambria Math" panose="02040503050406030204" pitchFamily="18" charset="0"/>
+                                </a:rPr>
+                              </m:ctrlPr>
+                            </m:sSupPr>
+                            <m:e>
+                              <m:d>
+                                <m:dPr>
+                                  <m:ctrlPr>
+                                    <a:rPr lang="en-US" altLang="ja-JP" sz="2400" i="1">
+                                      <a:latin typeface="Cambria Math" panose="02040503050406030204" pitchFamily="18" charset="0"/>
+                                    </a:rPr>
+                                  </m:ctrlPr>
+                                </m:dPr>
+                                <m:e>
+                                  <m:r>
+                                    <a:rPr lang="en-US" altLang="ja-JP" sz="2400" i="1">
+                                      <a:latin typeface="Cambria Math" panose="02040503050406030204" pitchFamily="18" charset="0"/>
+                                    </a:rPr>
+                                    <m:t>𝑜</m:t>
+                                  </m:r>
+                                  <m:r>
+                                    <a:rPr lang="en-US" altLang="ja-JP" sz="2400" i="1">
+                                      <a:latin typeface="Cambria Math" panose="02040503050406030204" pitchFamily="18" charset="0"/>
+                                    </a:rPr>
+                                    <m:t>∙</m:t>
+                                  </m:r>
+                                  <m:r>
+                                    <a:rPr lang="en-US" altLang="ja-JP" sz="2400" i="1">
+                                      <a:latin typeface="Cambria Math" panose="02040503050406030204" pitchFamily="18" charset="0"/>
+                                    </a:rPr>
+                                    <m:t>𝑑</m:t>
+                                  </m:r>
+                                </m:e>
+                              </m:d>
+                            </m:e>
+                            <m:sup>
+                              <m:r>
+                                <a:rPr lang="en-US" altLang="ja-JP" sz="2400" i="1">
+                                  <a:latin typeface="Cambria Math" panose="02040503050406030204" pitchFamily="18" charset="0"/>
+                                </a:rPr>
+                                <m:t>2</m:t>
+                              </m:r>
+                            </m:sup>
+                          </m:sSup>
+                          <m:r>
+                            <a:rPr lang="en-US" altLang="ja-JP" sz="2400" i="1">
+                              <a:latin typeface="Cambria Math" panose="02040503050406030204" pitchFamily="18" charset="0"/>
+                            </a:rPr>
+                            <m:t>−</m:t>
+                          </m:r>
+                          <m:d>
+                            <m:dPr>
+                              <m:begChr m:val="{"/>
+                              <m:endChr m:val="}"/>
+                              <m:ctrlPr>
+                                <a:rPr lang="en-US" altLang="ja-JP" sz="2400" i="1">
+                                  <a:latin typeface="Cambria Math" panose="02040503050406030204" pitchFamily="18" charset="0"/>
+                                </a:rPr>
+                              </m:ctrlPr>
+                            </m:dPr>
+                            <m:e>
+                              <m:d>
+                                <m:dPr>
+                                  <m:ctrlPr>
+                                    <a:rPr lang="en-US" altLang="ja-JP" sz="2400" i="1">
+                                      <a:latin typeface="Cambria Math" panose="02040503050406030204" pitchFamily="18" charset="0"/>
+                                    </a:rPr>
+                                  </m:ctrlPr>
+                                </m:dPr>
+                                <m:e>
+                                  <m:r>
+                                    <a:rPr lang="en-US" altLang="ja-JP" sz="2400" i="1">
+                                      <a:latin typeface="Cambria Math" panose="02040503050406030204" pitchFamily="18" charset="0"/>
+                                    </a:rPr>
+                                    <m:t>𝑜</m:t>
+                                  </m:r>
+                                  <m:r>
+                                    <a:rPr lang="en-US" altLang="ja-JP" sz="2400" i="1">
+                                      <a:latin typeface="Cambria Math" panose="02040503050406030204" pitchFamily="18" charset="0"/>
+                                    </a:rPr>
+                                    <m:t>∙</m:t>
+                                  </m:r>
+                                  <m:r>
+                                    <a:rPr lang="en-US" altLang="ja-JP" sz="2400" i="1">
+                                      <a:latin typeface="Cambria Math" panose="02040503050406030204" pitchFamily="18" charset="0"/>
+                                    </a:rPr>
+                                    <m:t>𝑜</m:t>
+                                  </m:r>
+                                </m:e>
+                              </m:d>
+                              <m:r>
+                                <a:rPr lang="en-US" altLang="ja-JP" sz="2400" i="1">
+                                  <a:latin typeface="Cambria Math" panose="02040503050406030204" pitchFamily="18" charset="0"/>
+                                </a:rPr>
+                                <m:t>−</m:t>
+                              </m:r>
+                              <m:sSup>
+                                <m:sSupPr>
+                                  <m:ctrlPr>
+                                    <a:rPr lang="en-US" altLang="ja-JP" sz="2400" i="1">
+                                      <a:latin typeface="Cambria Math" panose="02040503050406030204" pitchFamily="18" charset="0"/>
+                                    </a:rPr>
+                                  </m:ctrlPr>
+                                </m:sSupPr>
+                                <m:e>
+                                  <m:r>
+                                    <a:rPr lang="en-US" altLang="ja-JP" sz="2400" b="0" i="1" smtClean="0">
+                                      <a:latin typeface="Cambria Math" panose="02040503050406030204" pitchFamily="18" charset="0"/>
+                                    </a:rPr>
+                                    <m:t>𝑅</m:t>
+                                  </m:r>
+                                </m:e>
+                                <m:sup>
+                                  <m:r>
+                                    <a:rPr lang="en-US" altLang="ja-JP" sz="2400" i="1">
+                                      <a:latin typeface="Cambria Math" panose="02040503050406030204" pitchFamily="18" charset="0"/>
+                                    </a:rPr>
+                                    <m:t>2</m:t>
+                                  </m:r>
+                                </m:sup>
+                              </m:sSup>
+                            </m:e>
+                          </m:d>
+                        </m:e>
+                      </m:rad>
+                    </m:oMath>
+                  </m:oMathPara>
+                </a14:m>
+                <a:endParaRPr lang="en-US" altLang="ja-JP" sz="2400"/>
+              </a:p>
+              <a:p>
+                <a:pPr lvl="8"/>
+                <a:endParaRPr kumimoji="1" lang="en-US" altLang="ja-JP" sz="1600"/>
+              </a:p>
+              <a:p>
+                <a14:m>
+                  <m:oMath xmlns:m="http://schemas.openxmlformats.org/officeDocument/2006/math">
+                    <m:r>
+                      <a:rPr kumimoji="1" lang="en-US" altLang="ja-JP" sz="2400" b="0" i="1" smtClean="0">
+                        <a:latin typeface="Cambria Math" panose="02040503050406030204" pitchFamily="18" charset="0"/>
+                      </a:rPr>
+                      <m:t>𝑜</m:t>
+                    </m:r>
+                    <m:r>
+                      <a:rPr kumimoji="1" lang="en-US" altLang="ja-JP" sz="2400" b="0" i="1" smtClean="0">
+                        <a:latin typeface="Cambria Math" panose="02040503050406030204" pitchFamily="18" charset="0"/>
+                      </a:rPr>
+                      <m:t>=</m:t>
+                    </m:r>
+                    <m:d>
+                      <m:dPr>
+                        <m:ctrlPr>
+                          <a:rPr kumimoji="1" lang="en-US" altLang="ja-JP" sz="2400" b="0" i="1" smtClean="0">
+                            <a:latin typeface="Cambria Math" panose="02040503050406030204" pitchFamily="18" charset="0"/>
+                          </a:rPr>
+                        </m:ctrlPr>
+                      </m:dPr>
+                      <m:e>
+                        <m:r>
+                          <a:rPr kumimoji="1" lang="en-US" altLang="ja-JP" sz="2400" b="0" i="1" smtClean="0">
+                            <a:latin typeface="Cambria Math" panose="02040503050406030204" pitchFamily="18" charset="0"/>
+                          </a:rPr>
+                          <m:t>𝑥</m:t>
+                        </m:r>
+                        <m:r>
+                          <a:rPr kumimoji="1" lang="en-US" altLang="ja-JP" sz="2400" b="0" i="1" smtClean="0">
+                            <a:latin typeface="Cambria Math" panose="02040503050406030204" pitchFamily="18" charset="0"/>
+                          </a:rPr>
+                          <m:t>,</m:t>
+                        </m:r>
+                        <m:r>
+                          <a:rPr kumimoji="1" lang="en-US" altLang="ja-JP" sz="2400" b="0" i="1" smtClean="0">
+                            <a:latin typeface="Cambria Math" panose="02040503050406030204" pitchFamily="18" charset="0"/>
+                          </a:rPr>
+                          <m:t>𝑦</m:t>
+                        </m:r>
+                        <m:r>
+                          <a:rPr kumimoji="1" lang="en-US" altLang="ja-JP" sz="2400" b="0" i="1" smtClean="0">
+                            <a:latin typeface="Cambria Math" panose="02040503050406030204" pitchFamily="18" charset="0"/>
+                          </a:rPr>
+                          <m:t>,</m:t>
+                        </m:r>
+                        <m:r>
+                          <a:rPr kumimoji="1" lang="en-US" altLang="ja-JP" sz="2400" b="0" i="1" smtClean="0">
+                            <a:latin typeface="Cambria Math" panose="02040503050406030204" pitchFamily="18" charset="0"/>
+                          </a:rPr>
+                          <m:t>𝑅</m:t>
+                        </m:r>
+                      </m:e>
+                    </m:d>
+                    <m:r>
+                      <a:rPr kumimoji="1" lang="en-US" altLang="ja-JP" sz="2400" b="0" i="1" smtClean="0">
+                        <a:latin typeface="Cambria Math" panose="02040503050406030204" pitchFamily="18" charset="0"/>
+                      </a:rPr>
+                      <m:t>,</m:t>
+                    </m:r>
+                    <m:r>
+                      <a:rPr kumimoji="1" lang="en-US" altLang="ja-JP" sz="2400" b="0" i="1" smtClean="0">
+                        <a:latin typeface="Cambria Math" panose="02040503050406030204" pitchFamily="18" charset="0"/>
+                      </a:rPr>
+                      <m:t>𝑑</m:t>
+                    </m:r>
+                    <m:r>
+                      <a:rPr kumimoji="1" lang="en-US" altLang="ja-JP" sz="2400" b="0" i="1" smtClean="0">
+                        <a:latin typeface="Cambria Math" panose="02040503050406030204" pitchFamily="18" charset="0"/>
+                      </a:rPr>
+                      <m:t>=</m:t>
+                    </m:r>
+                    <m:d>
+                      <m:dPr>
+                        <m:ctrlPr>
+                          <a:rPr kumimoji="1" lang="en-US" altLang="ja-JP" sz="2400" b="0" i="1" smtClean="0">
+                            <a:latin typeface="Cambria Math" panose="02040503050406030204" pitchFamily="18" charset="0"/>
+                          </a:rPr>
+                        </m:ctrlPr>
+                      </m:dPr>
+                      <m:e>
+                        <m:r>
+                          <a:rPr kumimoji="1" lang="en-US" altLang="ja-JP" sz="2400" b="0" i="1" smtClean="0">
+                            <a:latin typeface="Cambria Math" panose="02040503050406030204" pitchFamily="18" charset="0"/>
+                          </a:rPr>
+                          <m:t>0,0,−1</m:t>
+                        </m:r>
+                      </m:e>
+                    </m:d>
+                  </m:oMath>
+                </a14:m>
+                <a:r>
+                  <a:rPr kumimoji="1" lang="ja-JP" altLang="en-US" sz="2400"/>
+                  <a:t>のローカル空間なら</a:t>
+                </a:r>
+                <a:endParaRPr kumimoji="1" lang="en-US" altLang="ja-JP" sz="2400"/>
+              </a:p>
+              <a:p>
+                <a:pPr lvl="8"/>
+                <a:endParaRPr kumimoji="1" lang="en-US" altLang="ja-JP" sz="1400"/>
+              </a:p>
+              <a:p>
+                <a:pPr marL="0" indent="0">
+                  <a:buNone/>
+                </a:pPr>
+                <a14:m>
+                  <m:oMathPara xmlns:m="http://schemas.openxmlformats.org/officeDocument/2006/math">
+                    <m:oMathParaPr>
+                      <m:jc m:val="centerGroup"/>
+                    </m:oMathParaPr>
+                    <m:oMath xmlns:m="http://schemas.openxmlformats.org/officeDocument/2006/math">
+                      <m:r>
+                        <a:rPr kumimoji="1" lang="en-US" altLang="ja-JP" sz="2400" b="0" i="1" smtClean="0">
+                          <a:latin typeface="Cambria Math" panose="02040503050406030204" pitchFamily="18" charset="0"/>
+                        </a:rPr>
+                        <m:t>𝑡</m:t>
+                      </m:r>
+                      <m:r>
+                        <a:rPr kumimoji="1" lang="en-US" altLang="ja-JP" sz="2400" b="0" i="1" smtClean="0">
+                          <a:latin typeface="Cambria Math" panose="02040503050406030204" pitchFamily="18" charset="0"/>
+                        </a:rPr>
+                        <m:t>=</m:t>
+                      </m:r>
+                      <m:r>
+                        <a:rPr lang="en-US" altLang="ja-JP" sz="2400" b="0" i="1" smtClean="0">
+                          <a:latin typeface="Cambria Math" panose="02040503050406030204" pitchFamily="18" charset="0"/>
+                        </a:rPr>
+                        <m:t>𝑅</m:t>
+                      </m:r>
+                      <m:r>
+                        <a:rPr lang="en-US" altLang="ja-JP" sz="2400" i="1">
+                          <a:latin typeface="Cambria Math" panose="02040503050406030204" pitchFamily="18" charset="0"/>
+                        </a:rPr>
+                        <m:t>±</m:t>
+                      </m:r>
+                      <m:rad>
+                        <m:radPr>
+                          <m:degHide m:val="on"/>
+                          <m:ctrlPr>
+                            <a:rPr lang="en-US" altLang="ja-JP" sz="2400" i="1">
+                              <a:latin typeface="Cambria Math" panose="02040503050406030204" pitchFamily="18" charset="0"/>
+                            </a:rPr>
+                          </m:ctrlPr>
+                        </m:radPr>
+                        <m:deg/>
+                        <m:e>
+                          <m:sSup>
+                            <m:sSupPr>
+                              <m:ctrlPr>
+                                <a:rPr lang="en-US" altLang="ja-JP" sz="2400" i="1">
+                                  <a:latin typeface="Cambria Math" panose="02040503050406030204" pitchFamily="18" charset="0"/>
+                                </a:rPr>
+                              </m:ctrlPr>
+                            </m:sSupPr>
+                            <m:e>
+                              <m:r>
+                                <a:rPr lang="en-US" altLang="ja-JP" sz="2400" b="0" i="1" smtClean="0">
+                                  <a:latin typeface="Cambria Math" panose="02040503050406030204" pitchFamily="18" charset="0"/>
+                                </a:rPr>
+                                <m:t>𝑅</m:t>
+                              </m:r>
+                            </m:e>
+                            <m:sup>
+                              <m:r>
+                                <a:rPr lang="en-US" altLang="ja-JP" sz="2400" i="1">
+                                  <a:latin typeface="Cambria Math" panose="02040503050406030204" pitchFamily="18" charset="0"/>
+                                </a:rPr>
+                                <m:t>2</m:t>
+                              </m:r>
+                            </m:sup>
+                          </m:sSup>
+                          <m:r>
+                            <a:rPr lang="en-US" altLang="ja-JP" sz="2400" i="1">
+                              <a:latin typeface="Cambria Math" panose="02040503050406030204" pitchFamily="18" charset="0"/>
+                            </a:rPr>
+                            <m:t>−</m:t>
+                          </m:r>
+                          <m:d>
+                            <m:dPr>
+                              <m:begChr m:val="{"/>
+                              <m:endChr m:val="}"/>
+                              <m:ctrlPr>
+                                <a:rPr lang="en-US" altLang="ja-JP" sz="2400" i="1">
+                                  <a:latin typeface="Cambria Math" panose="02040503050406030204" pitchFamily="18" charset="0"/>
+                                </a:rPr>
+                              </m:ctrlPr>
+                            </m:dPr>
+                            <m:e>
+                              <m:sSup>
+                                <m:sSupPr>
+                                  <m:ctrlPr>
+                                    <a:rPr lang="en-US" altLang="ja-JP" sz="2400" b="0" i="1" smtClean="0">
+                                      <a:latin typeface="Cambria Math" panose="02040503050406030204" pitchFamily="18" charset="0"/>
+                                    </a:rPr>
+                                  </m:ctrlPr>
+                                </m:sSupPr>
+                                <m:e>
+                                  <m:r>
+                                    <a:rPr lang="en-US" altLang="ja-JP" sz="2400" b="0" i="1" smtClean="0">
+                                      <a:latin typeface="Cambria Math" panose="02040503050406030204" pitchFamily="18" charset="0"/>
+                                    </a:rPr>
+                                    <m:t>𝑟</m:t>
+                                  </m:r>
+                                </m:e>
+                                <m:sup>
+                                  <m:r>
+                                    <a:rPr lang="en-US" altLang="ja-JP" sz="2400" b="0" i="1" smtClean="0">
+                                      <a:latin typeface="Cambria Math" panose="02040503050406030204" pitchFamily="18" charset="0"/>
+                                    </a:rPr>
+                                    <m:t>2</m:t>
+                                  </m:r>
+                                </m:sup>
+                              </m:sSup>
+                              <m:r>
+                                <a:rPr lang="en-US" altLang="ja-JP" sz="2400" b="0" i="1" smtClean="0">
+                                  <a:latin typeface="Cambria Math" panose="02040503050406030204" pitchFamily="18" charset="0"/>
+                                </a:rPr>
+                                <m:t>+</m:t>
+                              </m:r>
+                              <m:sSup>
+                                <m:sSupPr>
+                                  <m:ctrlPr>
+                                    <a:rPr lang="en-US" altLang="ja-JP" sz="2400" b="0" i="1" smtClean="0">
+                                      <a:latin typeface="Cambria Math" panose="02040503050406030204" pitchFamily="18" charset="0"/>
+                                    </a:rPr>
+                                  </m:ctrlPr>
+                                </m:sSupPr>
+                                <m:e>
+                                  <m:r>
+                                    <a:rPr lang="en-US" altLang="ja-JP" sz="2400" b="0" i="1" smtClean="0">
+                                      <a:latin typeface="Cambria Math" panose="02040503050406030204" pitchFamily="18" charset="0"/>
+                                    </a:rPr>
+                                    <m:t>𝑅</m:t>
+                                  </m:r>
+                                </m:e>
+                                <m:sup>
+                                  <m:r>
+                                    <a:rPr lang="en-US" altLang="ja-JP" sz="2400" b="0" i="1" smtClean="0">
+                                      <a:latin typeface="Cambria Math" panose="02040503050406030204" pitchFamily="18" charset="0"/>
+                                    </a:rPr>
+                                    <m:t>2</m:t>
+                                  </m:r>
+                                </m:sup>
+                              </m:sSup>
+                              <m:r>
+                                <a:rPr lang="en-US" altLang="ja-JP" sz="2400" i="1">
+                                  <a:latin typeface="Cambria Math" panose="02040503050406030204" pitchFamily="18" charset="0"/>
+                                </a:rPr>
+                                <m:t>−</m:t>
+                              </m:r>
+                              <m:sSup>
+                                <m:sSupPr>
+                                  <m:ctrlPr>
+                                    <a:rPr lang="en-US" altLang="ja-JP" sz="2400" i="1">
+                                      <a:latin typeface="Cambria Math" panose="02040503050406030204" pitchFamily="18" charset="0"/>
+                                    </a:rPr>
+                                  </m:ctrlPr>
+                                </m:sSupPr>
+                                <m:e>
+                                  <m:r>
+                                    <a:rPr lang="en-US" altLang="ja-JP" sz="2400" b="0" i="1" smtClean="0">
+                                      <a:latin typeface="Cambria Math" panose="02040503050406030204" pitchFamily="18" charset="0"/>
+                                    </a:rPr>
+                                    <m:t>𝑅</m:t>
+                                  </m:r>
+                                </m:e>
+                                <m:sup>
+                                  <m:r>
+                                    <a:rPr lang="en-US" altLang="ja-JP" sz="2400" i="1">
+                                      <a:latin typeface="Cambria Math" panose="02040503050406030204" pitchFamily="18" charset="0"/>
+                                    </a:rPr>
+                                    <m:t>2</m:t>
+                                  </m:r>
+                                </m:sup>
+                              </m:sSup>
+                            </m:e>
+                          </m:d>
+                        </m:e>
+                      </m:rad>
+                      <m:r>
+                        <a:rPr lang="en-US" altLang="ja-JP" sz="2400" b="0" i="1" smtClean="0">
+                          <a:latin typeface="Cambria Math" panose="02040503050406030204" pitchFamily="18" charset="0"/>
+                        </a:rPr>
+                        <m:t>=</m:t>
+                      </m:r>
+                      <m:r>
+                        <a:rPr lang="en-US" altLang="ja-JP" sz="2400" i="1">
+                          <a:latin typeface="Cambria Math" panose="02040503050406030204" pitchFamily="18" charset="0"/>
+                        </a:rPr>
+                        <m:t>𝑅</m:t>
+                      </m:r>
+                      <m:r>
+                        <a:rPr lang="en-US" altLang="ja-JP" sz="2400" i="1">
+                          <a:latin typeface="Cambria Math" panose="02040503050406030204" pitchFamily="18" charset="0"/>
+                        </a:rPr>
+                        <m:t>±</m:t>
+                      </m:r>
+                      <m:rad>
+                        <m:radPr>
+                          <m:degHide m:val="on"/>
+                          <m:ctrlPr>
+                            <a:rPr lang="en-US" altLang="ja-JP" sz="2400" i="1">
+                              <a:latin typeface="Cambria Math" panose="02040503050406030204" pitchFamily="18" charset="0"/>
+                            </a:rPr>
+                          </m:ctrlPr>
+                        </m:radPr>
+                        <m:deg/>
+                        <m:e>
+                          <m:sSup>
+                            <m:sSupPr>
+                              <m:ctrlPr>
+                                <a:rPr lang="en-US" altLang="ja-JP" sz="2400" i="1">
+                                  <a:latin typeface="Cambria Math" panose="02040503050406030204" pitchFamily="18" charset="0"/>
+                                </a:rPr>
+                              </m:ctrlPr>
+                            </m:sSupPr>
+                            <m:e>
+                              <m:r>
+                                <a:rPr lang="en-US" altLang="ja-JP" sz="2400" i="1">
+                                  <a:latin typeface="Cambria Math" panose="02040503050406030204" pitchFamily="18" charset="0"/>
+                                </a:rPr>
+                                <m:t>𝑅</m:t>
+                              </m:r>
+                            </m:e>
+                            <m:sup>
+                              <m:r>
+                                <a:rPr lang="en-US" altLang="ja-JP" sz="2400" i="1">
+                                  <a:latin typeface="Cambria Math" panose="02040503050406030204" pitchFamily="18" charset="0"/>
+                                </a:rPr>
+                                <m:t>2</m:t>
+                              </m:r>
+                            </m:sup>
+                          </m:sSup>
+                          <m:r>
+                            <a:rPr lang="en-US" altLang="ja-JP" sz="2400" i="1">
+                              <a:latin typeface="Cambria Math" panose="02040503050406030204" pitchFamily="18" charset="0"/>
+                            </a:rPr>
+                            <m:t>−</m:t>
+                          </m:r>
+                          <m:sSup>
+                            <m:sSupPr>
+                              <m:ctrlPr>
+                                <a:rPr lang="en-US" altLang="ja-JP" sz="2400" i="1">
+                                  <a:latin typeface="Cambria Math" panose="02040503050406030204" pitchFamily="18" charset="0"/>
+                                </a:rPr>
+                              </m:ctrlPr>
+                            </m:sSupPr>
+                            <m:e>
+                              <m:r>
+                                <a:rPr lang="en-US" altLang="ja-JP" sz="2400" i="1">
+                                  <a:latin typeface="Cambria Math" panose="02040503050406030204" pitchFamily="18" charset="0"/>
+                                </a:rPr>
+                                <m:t>𝑟</m:t>
+                              </m:r>
+                            </m:e>
+                            <m:sup>
+                              <m:r>
+                                <a:rPr lang="en-US" altLang="ja-JP" sz="2400" i="1">
+                                  <a:latin typeface="Cambria Math" panose="02040503050406030204" pitchFamily="18" charset="0"/>
+                                </a:rPr>
+                                <m:t>2</m:t>
+                              </m:r>
+                            </m:sup>
+                          </m:sSup>
+                        </m:e>
+                      </m:rad>
+                    </m:oMath>
+                  </m:oMathPara>
+                </a14:m>
+                <a:endParaRPr kumimoji="1" lang="en-US" altLang="ja-JP" sz="2400"/>
+              </a:p>
+            </p:txBody>
+          </p:sp>
+        </mc:Choice>
+        <mc:Fallback>
+          <p:sp>
+            <p:nvSpPr>
+              <p:cNvPr id="3" name="コンテンツ プレースホルダー 2">
+                <a:extLst>
+                  <a:ext uri="{FF2B5EF4-FFF2-40B4-BE49-F238E27FC236}">
+                    <a16:creationId xmlns:a16="http://schemas.microsoft.com/office/drawing/2014/main" id="{8C7AE5F8-8DB9-6A41-976F-DB330CA5A88E}"/>
+                  </a:ext>
+                </a:extLst>
+              </p:cNvPr>
+              <p:cNvSpPr>
+                <a:spLocks noGrp="1" noRot="1" noChangeAspect="1" noMove="1" noResize="1" noEditPoints="1" noAdjustHandles="1" noChangeArrowheads="1" noChangeShapeType="1" noTextEdit="1"/>
+              </p:cNvSpPr>
+              <p:nvPr>
+                <p:ph idx="1"/>
+              </p:nvPr>
+            </p:nvSpPr>
+            <p:spPr>
+              <a:xfrm>
+                <a:off x="838200" y="1825625"/>
+                <a:ext cx="6914196" cy="4351338"/>
+              </a:xfrm>
+              <a:blipFill>
+                <a:blip r:embed="rId2"/>
+                <a:stretch>
+                  <a:fillRect l="-1235"/>
+                </a:stretch>
+              </a:blipFill>
+            </p:spPr>
+            <p:txBody>
+              <a:bodyPr/>
+              <a:lstStyle/>
+              <a:p>
+                <a:r>
+                  <a:rPr lang="ja-JP" altLang="en-US">
+                    <a:noFill/>
+                  </a:rPr>
+                  <a:t> </a:t>
+                </a:r>
+              </a:p>
+            </p:txBody>
+          </p:sp>
+        </mc:Fallback>
+      </mc:AlternateContent>
+      <p:sp>
+        <p:nvSpPr>
+          <p:cNvPr id="4" name="楕円 3">
+            <a:extLst>
+              <a:ext uri="{FF2B5EF4-FFF2-40B4-BE49-F238E27FC236}">
+                <a16:creationId xmlns:a16="http://schemas.microsoft.com/office/drawing/2014/main" id="{492B23DD-B2E3-CA92-7847-C25F848353F0}"/>
+              </a:ext>
+            </a:extLst>
+          </p:cNvPr>
+          <p:cNvSpPr/>
+          <p:nvPr/>
+        </p:nvSpPr>
+        <p:spPr>
+          <a:xfrm>
+            <a:off x="8633147" y="2758825"/>
+            <a:ext cx="2235200" cy="2235200"/>
+          </a:xfrm>
+          <a:prstGeom prst="ellipse">
+            <a:avLst/>
+          </a:prstGeom>
+          <a:noFill/>
+        </p:spPr>
+        <p:style>
+          <a:lnRef idx="2">
+            <a:schemeClr val="accent1">
+              <a:shade val="15000"/>
+            </a:schemeClr>
+          </a:lnRef>
+          <a:fillRef idx="1">
+            <a:schemeClr val="accent1"/>
+          </a:fillRef>
+          <a:effectRef idx="0">
+            <a:schemeClr val="accent1"/>
+          </a:effectRef>
+          <a:fontRef idx="minor">
+            <a:schemeClr val="lt1"/>
+          </a:fontRef>
+        </p:style>
+        <p:txBody>
+          <a:bodyPr rtlCol="0" anchor="ctr"/>
+          <a:lstStyle/>
+          <a:p>
+            <a:pPr algn="ctr"/>
+            <a:endParaRPr kumimoji="1" lang="ja-JP" altLang="en-US"/>
+          </a:p>
+        </p:txBody>
+      </p:sp>
+      <p:cxnSp>
+        <p:nvCxnSpPr>
+          <p:cNvPr id="7" name="直線矢印コネクタ 6">
+            <a:extLst>
+              <a:ext uri="{FF2B5EF4-FFF2-40B4-BE49-F238E27FC236}">
+                <a16:creationId xmlns:a16="http://schemas.microsoft.com/office/drawing/2014/main" id="{62B98877-DC6E-C5F3-8DC1-62F153537FAF}"/>
+              </a:ext>
+            </a:extLst>
+          </p:cNvPr>
+          <p:cNvCxnSpPr>
+            <a:cxnSpLocks/>
+            <a:stCxn id="4" idx="1"/>
+            <a:endCxn id="101" idx="0"/>
+          </p:cNvCxnSpPr>
+          <p:nvPr/>
+        </p:nvCxnSpPr>
+        <p:spPr>
+          <a:xfrm>
+            <a:off x="8960484" y="3086162"/>
+            <a:ext cx="0" cy="1523378"/>
+          </a:xfrm>
+          <a:prstGeom prst="straightConnector1">
+            <a:avLst/>
+          </a:prstGeom>
+          <a:ln>
+            <a:tailEnd type="triangle"/>
+          </a:ln>
+        </p:spPr>
+        <p:style>
+          <a:lnRef idx="1">
+            <a:schemeClr val="accent1"/>
+          </a:lnRef>
+          <a:fillRef idx="0">
+            <a:schemeClr val="accent1"/>
+          </a:fillRef>
+          <a:effectRef idx="0">
+            <a:schemeClr val="accent1"/>
+          </a:effectRef>
+          <a:fontRef idx="minor">
+            <a:schemeClr val="tx1"/>
+          </a:fontRef>
+        </p:style>
+      </p:cxnSp>
+      <p:sp>
+        <p:nvSpPr>
+          <p:cNvPr id="10" name="正方形/長方形 9">
+            <a:extLst>
+              <a:ext uri="{FF2B5EF4-FFF2-40B4-BE49-F238E27FC236}">
+                <a16:creationId xmlns:a16="http://schemas.microsoft.com/office/drawing/2014/main" id="{AC42A7E6-A685-94CF-8664-981DA8A3CF17}"/>
+              </a:ext>
+            </a:extLst>
+          </p:cNvPr>
+          <p:cNvSpPr/>
+          <p:nvPr/>
+        </p:nvSpPr>
+        <p:spPr>
+          <a:xfrm>
+            <a:off x="8633147" y="2758824"/>
+            <a:ext cx="2235200" cy="2235199"/>
+          </a:xfrm>
+          <a:prstGeom prst="rect">
+            <a:avLst/>
+          </a:prstGeom>
+          <a:noFill/>
+          <a:ln>
+            <a:prstDash val="dash"/>
+          </a:ln>
+        </p:spPr>
+        <p:style>
+          <a:lnRef idx="2">
+            <a:schemeClr val="accent1">
+              <a:shade val="15000"/>
+            </a:schemeClr>
+          </a:lnRef>
+          <a:fillRef idx="1">
+            <a:schemeClr val="accent1"/>
+          </a:fillRef>
+          <a:effectRef idx="0">
+            <a:schemeClr val="accent1"/>
+          </a:effectRef>
+          <a:fontRef idx="minor">
+            <a:schemeClr val="lt1"/>
+          </a:fontRef>
+        </p:style>
+        <p:txBody>
+          <a:bodyPr rtlCol="0" anchor="ctr"/>
+          <a:lstStyle/>
+          <a:p>
+            <a:pPr algn="ctr"/>
+            <a:endParaRPr kumimoji="1" lang="ja-JP" altLang="en-US"/>
+          </a:p>
+        </p:txBody>
+      </p:sp>
+      <p:sp>
+        <p:nvSpPr>
+          <p:cNvPr id="21" name="楕円 20">
+            <a:extLst>
+              <a:ext uri="{FF2B5EF4-FFF2-40B4-BE49-F238E27FC236}">
+                <a16:creationId xmlns:a16="http://schemas.microsoft.com/office/drawing/2014/main" id="{2473EBC7-1D60-5CA2-8EF2-26B758A84992}"/>
+              </a:ext>
+            </a:extLst>
+          </p:cNvPr>
+          <p:cNvSpPr/>
+          <p:nvPr/>
+        </p:nvSpPr>
+        <p:spPr>
+          <a:xfrm>
+            <a:off x="8903334" y="2701672"/>
+            <a:ext cx="114300" cy="114300"/>
+          </a:xfrm>
+          <a:prstGeom prst="ellipse">
+            <a:avLst/>
+          </a:prstGeom>
+        </p:spPr>
+        <p:style>
+          <a:lnRef idx="2">
+            <a:schemeClr val="accent1">
+              <a:shade val="15000"/>
+            </a:schemeClr>
+          </a:lnRef>
+          <a:fillRef idx="1">
+            <a:schemeClr val="accent1"/>
+          </a:fillRef>
+          <a:effectRef idx="0">
+            <a:schemeClr val="accent1"/>
+          </a:effectRef>
+          <a:fontRef idx="minor">
+            <a:schemeClr val="lt1"/>
+          </a:fontRef>
+        </p:style>
+        <p:txBody>
+          <a:bodyPr rtlCol="0" anchor="ctr"/>
+          <a:lstStyle/>
+          <a:p>
+            <a:pPr algn="ctr"/>
+            <a:endParaRPr kumimoji="1" lang="ja-JP" altLang="en-US"/>
+          </a:p>
+        </p:txBody>
+      </p:sp>
+      <p:cxnSp>
+        <p:nvCxnSpPr>
+          <p:cNvPr id="76" name="直線矢印コネクタ 75">
+            <a:extLst>
+              <a:ext uri="{FF2B5EF4-FFF2-40B4-BE49-F238E27FC236}">
+                <a16:creationId xmlns:a16="http://schemas.microsoft.com/office/drawing/2014/main" id="{549E17BE-2792-BEF8-B488-D2801BFBBEB0}"/>
+              </a:ext>
+            </a:extLst>
+          </p:cNvPr>
+          <p:cNvCxnSpPr>
+            <a:cxnSpLocks/>
+            <a:endCxn id="4" idx="1"/>
+          </p:cNvCxnSpPr>
+          <p:nvPr/>
+        </p:nvCxnSpPr>
+        <p:spPr>
+          <a:xfrm>
+            <a:off x="8960484" y="2758824"/>
+            <a:ext cx="0" cy="327338"/>
+          </a:xfrm>
+          <a:prstGeom prst="straightConnector1">
+            <a:avLst/>
+          </a:prstGeom>
+          <a:ln>
+            <a:prstDash val="dash"/>
+            <a:headEnd type="none" w="med" len="med"/>
+            <a:tailEnd type="none" w="med" len="med"/>
+          </a:ln>
+        </p:spPr>
+        <p:style>
+          <a:lnRef idx="1">
+            <a:schemeClr val="accent1"/>
+          </a:lnRef>
+          <a:fillRef idx="0">
+            <a:schemeClr val="accent1"/>
+          </a:fillRef>
+          <a:effectRef idx="0">
+            <a:schemeClr val="accent1"/>
+          </a:effectRef>
+          <a:fontRef idx="minor">
+            <a:schemeClr val="tx1"/>
+          </a:fontRef>
+        </p:style>
+      </p:cxnSp>
+      <p:cxnSp>
+        <p:nvCxnSpPr>
+          <p:cNvPr id="80" name="直線矢印コネクタ 79">
+            <a:extLst>
+              <a:ext uri="{FF2B5EF4-FFF2-40B4-BE49-F238E27FC236}">
+                <a16:creationId xmlns:a16="http://schemas.microsoft.com/office/drawing/2014/main" id="{B601B9EE-F196-50DC-2795-68D6F3CC8FA5}"/>
+              </a:ext>
+            </a:extLst>
+          </p:cNvPr>
+          <p:cNvCxnSpPr>
+            <a:cxnSpLocks/>
+            <a:stCxn id="4" idx="3"/>
+          </p:cNvCxnSpPr>
+          <p:nvPr/>
+        </p:nvCxnSpPr>
+        <p:spPr>
+          <a:xfrm>
+            <a:off x="8960484" y="4666688"/>
+            <a:ext cx="0" cy="302187"/>
+          </a:xfrm>
+          <a:prstGeom prst="straightConnector1">
+            <a:avLst/>
+          </a:prstGeom>
+          <a:ln>
+            <a:prstDash val="dash"/>
+            <a:headEnd type="none" w="med" len="med"/>
+            <a:tailEnd type="none" w="med" len="med"/>
+          </a:ln>
+        </p:spPr>
+        <p:style>
+          <a:lnRef idx="1">
+            <a:schemeClr val="accent1"/>
+          </a:lnRef>
+          <a:fillRef idx="0">
+            <a:schemeClr val="accent1"/>
+          </a:fillRef>
+          <a:effectRef idx="0">
+            <a:schemeClr val="accent1"/>
+          </a:effectRef>
+          <a:fontRef idx="minor">
+            <a:schemeClr val="tx1"/>
+          </a:fontRef>
+        </p:style>
+      </p:cxnSp>
+      <p:sp>
+        <p:nvSpPr>
+          <p:cNvPr id="100" name="楕円 99">
+            <a:extLst>
+              <a:ext uri="{FF2B5EF4-FFF2-40B4-BE49-F238E27FC236}">
+                <a16:creationId xmlns:a16="http://schemas.microsoft.com/office/drawing/2014/main" id="{5A6A942E-7D34-4571-BC10-B314919D6849}"/>
+              </a:ext>
+            </a:extLst>
+          </p:cNvPr>
+          <p:cNvSpPr/>
+          <p:nvPr/>
+        </p:nvSpPr>
+        <p:spPr>
+          <a:xfrm>
+            <a:off x="8903334" y="3029010"/>
+            <a:ext cx="114300" cy="114300"/>
+          </a:xfrm>
+          <a:prstGeom prst="ellipse">
+            <a:avLst/>
+          </a:prstGeom>
+        </p:spPr>
+        <p:style>
+          <a:lnRef idx="2">
+            <a:schemeClr val="accent1">
+              <a:shade val="15000"/>
+            </a:schemeClr>
+          </a:lnRef>
+          <a:fillRef idx="1">
+            <a:schemeClr val="accent1"/>
+          </a:fillRef>
+          <a:effectRef idx="0">
+            <a:schemeClr val="accent1"/>
+          </a:effectRef>
+          <a:fontRef idx="minor">
+            <a:schemeClr val="lt1"/>
+          </a:fontRef>
+        </p:style>
+        <p:txBody>
+          <a:bodyPr rtlCol="0" anchor="ctr"/>
+          <a:lstStyle/>
+          <a:p>
+            <a:pPr algn="ctr"/>
+            <a:endParaRPr kumimoji="1" lang="ja-JP" altLang="en-US"/>
+          </a:p>
+        </p:txBody>
+      </p:sp>
+      <p:sp>
+        <p:nvSpPr>
+          <p:cNvPr id="101" name="楕円 100">
+            <a:extLst>
+              <a:ext uri="{FF2B5EF4-FFF2-40B4-BE49-F238E27FC236}">
+                <a16:creationId xmlns:a16="http://schemas.microsoft.com/office/drawing/2014/main" id="{A949FD1C-84D3-C264-42F1-190B7A0AF5AC}"/>
+              </a:ext>
+            </a:extLst>
+          </p:cNvPr>
+          <p:cNvSpPr/>
+          <p:nvPr/>
+        </p:nvSpPr>
+        <p:spPr>
+          <a:xfrm>
+            <a:off x="8903334" y="4609540"/>
+            <a:ext cx="114300" cy="114300"/>
+          </a:xfrm>
+          <a:prstGeom prst="ellipse">
+            <a:avLst/>
+          </a:prstGeom>
+        </p:spPr>
+        <p:style>
+          <a:lnRef idx="2">
+            <a:schemeClr val="accent1">
+              <a:shade val="15000"/>
+            </a:schemeClr>
+          </a:lnRef>
+          <a:fillRef idx="1">
+            <a:schemeClr val="accent1"/>
+          </a:fillRef>
+          <a:effectRef idx="0">
+            <a:schemeClr val="accent1"/>
+          </a:effectRef>
+          <a:fontRef idx="minor">
+            <a:schemeClr val="lt1"/>
+          </a:fontRef>
+        </p:style>
+        <p:txBody>
+          <a:bodyPr rtlCol="0" anchor="ctr"/>
+          <a:lstStyle/>
+          <a:p>
+            <a:pPr algn="ctr"/>
+            <a:endParaRPr kumimoji="1" lang="ja-JP" altLang="en-US"/>
+          </a:p>
+        </p:txBody>
+      </p:sp>
+      <p:cxnSp>
+        <p:nvCxnSpPr>
+          <p:cNvPr id="6" name="直線コネクタ 5">
+            <a:extLst>
+              <a:ext uri="{FF2B5EF4-FFF2-40B4-BE49-F238E27FC236}">
+                <a16:creationId xmlns:a16="http://schemas.microsoft.com/office/drawing/2014/main" id="{0FEA7523-54F8-DEAA-0A09-37B88139E193}"/>
+              </a:ext>
+            </a:extLst>
+          </p:cNvPr>
+          <p:cNvCxnSpPr>
+            <a:stCxn id="10" idx="1"/>
+            <a:endCxn id="10" idx="3"/>
+          </p:cNvCxnSpPr>
+          <p:nvPr/>
+        </p:nvCxnSpPr>
+        <p:spPr>
+          <a:xfrm>
+            <a:off x="8633147" y="3876424"/>
+            <a:ext cx="2235200" cy="0"/>
+          </a:xfrm>
+          <a:prstGeom prst="line">
+            <a:avLst/>
+          </a:prstGeom>
+        </p:spPr>
+        <p:style>
+          <a:lnRef idx="1">
+            <a:schemeClr val="accent1"/>
+          </a:lnRef>
+          <a:fillRef idx="0">
+            <a:schemeClr val="accent1"/>
+          </a:fillRef>
+          <a:effectRef idx="0">
+            <a:schemeClr val="accent1"/>
+          </a:effectRef>
+          <a:fontRef idx="minor">
+            <a:schemeClr val="tx1"/>
+          </a:fontRef>
+        </p:style>
+      </p:cxnSp>
+      <p:cxnSp>
+        <p:nvCxnSpPr>
+          <p:cNvPr id="8" name="直線コネクタ 7">
+            <a:extLst>
+              <a:ext uri="{FF2B5EF4-FFF2-40B4-BE49-F238E27FC236}">
+                <a16:creationId xmlns:a16="http://schemas.microsoft.com/office/drawing/2014/main" id="{EDB0BB1E-5392-9E6B-65DF-C7EACFCA484F}"/>
+              </a:ext>
+            </a:extLst>
+          </p:cNvPr>
+          <p:cNvCxnSpPr>
+            <a:cxnSpLocks/>
+            <a:stCxn id="10" idx="2"/>
+            <a:endCxn id="10" idx="0"/>
+          </p:cNvCxnSpPr>
+          <p:nvPr/>
+        </p:nvCxnSpPr>
+        <p:spPr>
+          <a:xfrm flipV="1">
+            <a:off x="9750747" y="2758824"/>
+            <a:ext cx="0" cy="2235199"/>
+          </a:xfrm>
+          <a:prstGeom prst="line">
+            <a:avLst/>
+          </a:prstGeom>
+        </p:spPr>
+        <p:style>
+          <a:lnRef idx="1">
+            <a:schemeClr val="accent1"/>
+          </a:lnRef>
+          <a:fillRef idx="0">
+            <a:schemeClr val="accent1"/>
+          </a:fillRef>
+          <a:effectRef idx="0">
+            <a:schemeClr val="accent1"/>
+          </a:effectRef>
+          <a:fontRef idx="minor">
+            <a:schemeClr val="tx1"/>
+          </a:fontRef>
+        </p:style>
+      </p:cxnSp>
+      <p:cxnSp>
+        <p:nvCxnSpPr>
+          <p:cNvPr id="13" name="直線矢印コネクタ 12">
+            <a:extLst>
+              <a:ext uri="{FF2B5EF4-FFF2-40B4-BE49-F238E27FC236}">
+                <a16:creationId xmlns:a16="http://schemas.microsoft.com/office/drawing/2014/main" id="{006A351F-D030-8DFB-2000-0355DB0B7076}"/>
+              </a:ext>
+            </a:extLst>
+          </p:cNvPr>
+          <p:cNvCxnSpPr/>
+          <p:nvPr/>
+        </p:nvCxnSpPr>
+        <p:spPr>
+          <a:xfrm>
+            <a:off x="9745133" y="2611967"/>
+            <a:ext cx="1123214" cy="0"/>
+          </a:xfrm>
+          <a:prstGeom prst="straightConnector1">
+            <a:avLst/>
+          </a:prstGeom>
+          <a:ln>
+            <a:headEnd type="triangle"/>
+            <a:tailEnd type="triangle"/>
+          </a:ln>
+        </p:spPr>
+        <p:style>
+          <a:lnRef idx="1">
+            <a:schemeClr val="accent1"/>
+          </a:lnRef>
+          <a:fillRef idx="0">
+            <a:schemeClr val="accent1"/>
+          </a:fillRef>
+          <a:effectRef idx="0">
+            <a:schemeClr val="accent1"/>
+          </a:effectRef>
+          <a:fontRef idx="minor">
+            <a:schemeClr val="tx1"/>
+          </a:fontRef>
+        </p:style>
+      </p:cxnSp>
+      <p:cxnSp>
+        <p:nvCxnSpPr>
+          <p:cNvPr id="14" name="直線矢印コネクタ 13">
+            <a:extLst>
+              <a:ext uri="{FF2B5EF4-FFF2-40B4-BE49-F238E27FC236}">
+                <a16:creationId xmlns:a16="http://schemas.microsoft.com/office/drawing/2014/main" id="{96212068-1849-E199-934B-442F4B53A6F3}"/>
+              </a:ext>
+            </a:extLst>
+          </p:cNvPr>
+          <p:cNvCxnSpPr>
+            <a:cxnSpLocks/>
+          </p:cNvCxnSpPr>
+          <p:nvPr/>
+        </p:nvCxnSpPr>
+        <p:spPr>
+          <a:xfrm>
+            <a:off x="8960484" y="2611967"/>
+            <a:ext cx="784649" cy="0"/>
+          </a:xfrm>
+          <a:prstGeom prst="straightConnector1">
+            <a:avLst/>
+          </a:prstGeom>
+          <a:ln>
+            <a:headEnd type="triangle"/>
+            <a:tailEnd type="triangle"/>
+          </a:ln>
+        </p:spPr>
+        <p:style>
+          <a:lnRef idx="1">
+            <a:schemeClr val="accent1"/>
+          </a:lnRef>
+          <a:fillRef idx="0">
+            <a:schemeClr val="accent1"/>
+          </a:fillRef>
+          <a:effectRef idx="0">
+            <a:schemeClr val="accent1"/>
+          </a:effectRef>
+          <a:fontRef idx="minor">
+            <a:schemeClr val="tx1"/>
+          </a:fontRef>
+        </p:style>
+      </p:cxnSp>
+      <mc:AlternateContent xmlns:mc="http://schemas.openxmlformats.org/markup-compatibility/2006">
+        <mc:Choice xmlns:a14="http://schemas.microsoft.com/office/drawing/2010/main" Requires="a14">
+          <p:sp>
+            <p:nvSpPr>
+              <p:cNvPr id="16" name="テキスト ボックス 15">
+                <a:extLst>
+                  <a:ext uri="{FF2B5EF4-FFF2-40B4-BE49-F238E27FC236}">
+                    <a16:creationId xmlns:a16="http://schemas.microsoft.com/office/drawing/2014/main" id="{302F4123-55B9-A7A8-A85E-B3A37B3D614D}"/>
+                  </a:ext>
+                </a:extLst>
+              </p:cNvPr>
+              <p:cNvSpPr txBox="1"/>
+              <p:nvPr/>
+            </p:nvSpPr>
+            <p:spPr>
+              <a:xfrm>
+                <a:off x="10110853" y="2239136"/>
+                <a:ext cx="391774" cy="369332"/>
+              </a:xfrm>
+              <a:prstGeom prst="rect">
+                <a:avLst/>
+              </a:prstGeom>
+              <a:noFill/>
+            </p:spPr>
+            <p:txBody>
+              <a:bodyPr wrap="none" rtlCol="0">
+                <a:spAutoFit/>
+              </a:bodyPr>
+              <a:lstStyle/>
+              <a:p>
+                <a14:m>
+                  <m:oMathPara xmlns:m="http://schemas.openxmlformats.org/officeDocument/2006/math">
+                    <m:oMathParaPr>
+                      <m:jc m:val="centerGroup"/>
+                    </m:oMathParaPr>
+                    <m:oMath xmlns:m="http://schemas.openxmlformats.org/officeDocument/2006/math">
+                      <m:r>
+                        <a:rPr kumimoji="1" lang="en-US" altLang="ja-JP" b="0" i="1" smtClean="0">
+                          <a:latin typeface="Cambria Math" panose="02040503050406030204" pitchFamily="18" charset="0"/>
+                        </a:rPr>
+                        <m:t>𝑅</m:t>
+                      </m:r>
+                    </m:oMath>
+                  </m:oMathPara>
+                </a14:m>
+                <a:endParaRPr kumimoji="1" lang="ja-JP" altLang="en-US"/>
+              </a:p>
+            </p:txBody>
+          </p:sp>
+        </mc:Choice>
+        <mc:Fallback>
+          <p:sp>
+            <p:nvSpPr>
+              <p:cNvPr id="16" name="テキスト ボックス 15">
+                <a:extLst>
+                  <a:ext uri="{FF2B5EF4-FFF2-40B4-BE49-F238E27FC236}">
+                    <a16:creationId xmlns:a16="http://schemas.microsoft.com/office/drawing/2014/main" id="{302F4123-55B9-A7A8-A85E-B3A37B3D614D}"/>
+                  </a:ext>
+                </a:extLst>
+              </p:cNvPr>
+              <p:cNvSpPr txBox="1">
+                <a:spLocks noRot="1" noChangeAspect="1" noMove="1" noResize="1" noEditPoints="1" noAdjustHandles="1" noChangeArrowheads="1" noChangeShapeType="1" noTextEdit="1"/>
+              </p:cNvSpPr>
+              <p:nvPr/>
+            </p:nvSpPr>
+            <p:spPr>
+              <a:xfrm>
+                <a:off x="10110853" y="2239136"/>
+                <a:ext cx="391774" cy="369332"/>
+              </a:xfrm>
+              <a:prstGeom prst="rect">
+                <a:avLst/>
+              </a:prstGeom>
+              <a:blipFill>
+                <a:blip r:embed="rId3"/>
+                <a:stretch>
+                  <a:fillRect/>
+                </a:stretch>
+              </a:blipFill>
+            </p:spPr>
+            <p:txBody>
+              <a:bodyPr/>
+              <a:lstStyle/>
+              <a:p>
+                <a:r>
+                  <a:rPr lang="ja-JP" altLang="en-US">
+                    <a:noFill/>
+                  </a:rPr>
+                  <a:t> </a:t>
+                </a:r>
+              </a:p>
+            </p:txBody>
+          </p:sp>
+        </mc:Fallback>
+      </mc:AlternateContent>
+      <mc:AlternateContent xmlns:mc="http://schemas.openxmlformats.org/markup-compatibility/2006">
+        <mc:Choice xmlns:a14="http://schemas.microsoft.com/office/drawing/2010/main" Requires="a14">
+          <p:sp>
+            <p:nvSpPr>
+              <p:cNvPr id="17" name="テキスト ボックス 16">
+                <a:extLst>
+                  <a:ext uri="{FF2B5EF4-FFF2-40B4-BE49-F238E27FC236}">
+                    <a16:creationId xmlns:a16="http://schemas.microsoft.com/office/drawing/2014/main" id="{DB1B6D03-D579-E35A-3737-C4EF2BA72BE5}"/>
+                  </a:ext>
+                </a:extLst>
+              </p:cNvPr>
+              <p:cNvSpPr txBox="1"/>
+              <p:nvPr/>
+            </p:nvSpPr>
+            <p:spPr>
+              <a:xfrm>
+                <a:off x="9176990" y="2180739"/>
+                <a:ext cx="351635" cy="369332"/>
+              </a:xfrm>
+              <a:prstGeom prst="rect">
+                <a:avLst/>
+              </a:prstGeom>
+              <a:noFill/>
+            </p:spPr>
+            <p:txBody>
+              <a:bodyPr wrap="none" rtlCol="0">
+                <a:spAutoFit/>
+              </a:bodyPr>
+              <a:lstStyle/>
+              <a:p>
+                <a14:m>
+                  <m:oMathPara xmlns:m="http://schemas.openxmlformats.org/officeDocument/2006/math">
+                    <m:oMathParaPr>
+                      <m:jc m:val="centerGroup"/>
+                    </m:oMathParaPr>
+                    <m:oMath xmlns:m="http://schemas.openxmlformats.org/officeDocument/2006/math">
+                      <m:r>
+                        <a:rPr kumimoji="1" lang="en-US" altLang="ja-JP" b="0" i="1" smtClean="0">
+                          <a:latin typeface="Cambria Math" panose="02040503050406030204" pitchFamily="18" charset="0"/>
+                        </a:rPr>
+                        <m:t>𝑟</m:t>
+                      </m:r>
+                    </m:oMath>
+                  </m:oMathPara>
+                </a14:m>
+                <a:endParaRPr kumimoji="1" lang="ja-JP" altLang="en-US"/>
+              </a:p>
+            </p:txBody>
+          </p:sp>
+        </mc:Choice>
+        <mc:Fallback>
+          <p:sp>
+            <p:nvSpPr>
+              <p:cNvPr id="17" name="テキスト ボックス 16">
+                <a:extLst>
+                  <a:ext uri="{FF2B5EF4-FFF2-40B4-BE49-F238E27FC236}">
+                    <a16:creationId xmlns:a16="http://schemas.microsoft.com/office/drawing/2014/main" id="{DB1B6D03-D579-E35A-3737-C4EF2BA72BE5}"/>
+                  </a:ext>
+                </a:extLst>
+              </p:cNvPr>
+              <p:cNvSpPr txBox="1">
+                <a:spLocks noRot="1" noChangeAspect="1" noMove="1" noResize="1" noEditPoints="1" noAdjustHandles="1" noChangeArrowheads="1" noChangeShapeType="1" noTextEdit="1"/>
+              </p:cNvSpPr>
+              <p:nvPr/>
+            </p:nvSpPr>
+            <p:spPr>
+              <a:xfrm>
+                <a:off x="9176990" y="2180739"/>
+                <a:ext cx="351635" cy="369332"/>
+              </a:xfrm>
+              <a:prstGeom prst="rect">
+                <a:avLst/>
+              </a:prstGeom>
+              <a:blipFill>
+                <a:blip r:embed="rId4"/>
+                <a:stretch>
+                  <a:fillRect/>
+                </a:stretch>
+              </a:blipFill>
+            </p:spPr>
+            <p:txBody>
+              <a:bodyPr/>
+              <a:lstStyle/>
+              <a:p>
+                <a:r>
+                  <a:rPr lang="ja-JP" altLang="en-US">
+                    <a:noFill/>
+                  </a:rPr>
+                  <a:t> </a:t>
+                </a:r>
+              </a:p>
+            </p:txBody>
+          </p:sp>
+        </mc:Fallback>
+      </mc:AlternateContent>
+    </p:spTree>
+    <p:extLst>
+      <p:ext uri="{BB962C8B-B14F-4D97-AF65-F5344CB8AC3E}">
+        <p14:creationId xmlns:p14="http://schemas.microsoft.com/office/powerpoint/2010/main" val="41193366"/>
+      </p:ext>
+    </p:extLst>
+  </p:cSld>
+  <p:clrMapOvr>
+    <a:masterClrMapping/>
+  </p:clrMapOvr>
+</p:sld>
+</file>
+
+<file path=ppt/slides/slide25.xml><?xml version="1.0" encoding="utf-8"?>
+<p:sld xmlns:a="http://schemas.openxmlformats.org/drawingml/2006/main" xmlns:r="http://schemas.openxmlformats.org/officeDocument/2006/relationships" xmlns:p="http://schemas.openxmlformats.org/presentationml/2006/main">
+  <p:cSld>
+    <p:spTree>
+      <p:nvGrpSpPr>
+        <p:cNvPr id="1" name="">
+          <a:extLst>
+            <a:ext uri="{FF2B5EF4-FFF2-40B4-BE49-F238E27FC236}">
+              <a16:creationId xmlns:a16="http://schemas.microsoft.com/office/drawing/2014/main" id="{B64896ED-244F-4204-8B92-2B0C626A73C8}"/>
+            </a:ext>
+          </a:extLst>
+        </p:cNvPr>
+        <p:cNvGrpSpPr/>
+        <p:nvPr/>
+      </p:nvGrpSpPr>
+      <p:grpSpPr>
+        <a:xfrm>
+          <a:off x="0" y="0"/>
+          <a:ext cx="0" cy="0"/>
+          <a:chOff x="0" y="0"/>
+          <a:chExt cx="0" cy="0"/>
+        </a:xfrm>
+      </p:grpSpPr>
+      <p:sp>
+        <p:nvSpPr>
+          <p:cNvPr id="2" name="タイトル 1">
+            <a:extLst>
+              <a:ext uri="{FF2B5EF4-FFF2-40B4-BE49-F238E27FC236}">
+                <a16:creationId xmlns:a16="http://schemas.microsoft.com/office/drawing/2014/main" id="{07865059-8259-E2FC-4405-55552DBBB6C6}"/>
+              </a:ext>
+            </a:extLst>
+          </p:cNvPr>
+          <p:cNvSpPr>
+            <a:spLocks noGrp="1"/>
+          </p:cNvSpPr>
+          <p:nvPr>
+            <p:ph type="title"/>
+          </p:nvPr>
+        </p:nvSpPr>
+        <p:spPr/>
+        <p:txBody>
+          <a:bodyPr/>
+          <a:lstStyle/>
+          <a:p>
+            <a:r>
+              <a:rPr kumimoji="1" lang="en-US" altLang="ja-JP"/>
+              <a:t>bssrdf</a:t>
+            </a:r>
+            <a:endParaRPr kumimoji="1" lang="ja-JP" altLang="en-US"/>
+          </a:p>
+        </p:txBody>
+      </p:sp>
+      <mc:AlternateContent xmlns:mc="http://schemas.openxmlformats.org/markup-compatibility/2006">
+        <mc:Choice xmlns:a14="http://schemas.microsoft.com/office/drawing/2010/main" Requires="a14">
+          <p:sp>
+            <p:nvSpPr>
+              <p:cNvPr id="3" name="コンテンツ プレースホルダー 2">
+                <a:extLst>
+                  <a:ext uri="{FF2B5EF4-FFF2-40B4-BE49-F238E27FC236}">
+                    <a16:creationId xmlns:a16="http://schemas.microsoft.com/office/drawing/2014/main" id="{8920CBE6-4496-1F77-4F15-5558092D5C39}"/>
+                  </a:ext>
+                </a:extLst>
+              </p:cNvPr>
+              <p:cNvSpPr>
+                <a:spLocks noGrp="1"/>
+              </p:cNvSpPr>
+              <p:nvPr>
+                <p:ph idx="1"/>
+              </p:nvPr>
+            </p:nvSpPr>
+            <p:spPr>
+              <a:xfrm>
+                <a:off x="838200" y="1825625"/>
+                <a:ext cx="6914196" cy="4351338"/>
+              </a:xfrm>
+            </p:spPr>
+            <p:txBody>
+              <a:bodyPr>
+                <a:normAutofit fontScale="70000" lnSpcReduction="20000"/>
+              </a:bodyPr>
+              <a:lstStyle/>
+              <a:p>
+                <a:r>
+                  <a:rPr kumimoji="1" lang="en-US" altLang="ja-JP" sz="2600"/>
+                  <a:t>bssrdf</a:t>
+                </a:r>
+                <a:r>
+                  <a:rPr kumimoji="1" lang="ja-JP" altLang="en-US" sz="2600"/>
+                  <a:t>は正規化済み</a:t>
+                </a:r>
+                <a:endParaRPr kumimoji="1" lang="en-US" altLang="ja-JP" sz="2600"/>
+              </a:p>
+              <a:p>
+                <a:r>
+                  <a:rPr kumimoji="1" lang="en-US" altLang="ja-JP" sz="2600"/>
+                  <a:t>pdf</a:t>
+                </a:r>
+                <a:r>
+                  <a:rPr kumimoji="1" lang="ja-JP" altLang="en-US" sz="2600"/>
+                  <a:t>として使用可能</a:t>
+                </a:r>
+                <a:endParaRPr kumimoji="1" lang="en-US" altLang="ja-JP" sz="2600"/>
+              </a:p>
+              <a:p>
+                <a:pPr lvl="8"/>
+                <a:endParaRPr kumimoji="1" lang="en-US" altLang="ja-JP" sz="1600"/>
+              </a:p>
+              <a:p>
+                <a:pPr marL="0" indent="0">
+                  <a:buNone/>
+                </a:pPr>
+                <a14:m>
+                  <m:oMathPara xmlns:m="http://schemas.openxmlformats.org/officeDocument/2006/math">
+                    <m:oMathParaPr>
+                      <m:jc m:val="centerGroup"/>
+                    </m:oMathParaPr>
+                    <m:oMath xmlns:m="http://schemas.openxmlformats.org/officeDocument/2006/math">
+                      <m:nary>
+                        <m:naryPr>
+                          <m:ctrlPr>
+                            <a:rPr lang="en-US" altLang="ja-JP" sz="2400" b="0" i="1" smtClean="0">
+                              <a:latin typeface="Cambria Math" panose="02040503050406030204" pitchFamily="18" charset="0"/>
+                            </a:rPr>
+                          </m:ctrlPr>
+                        </m:naryPr>
+                        <m:sub>
+                          <m:r>
+                            <a:rPr lang="en-US" altLang="ja-JP" sz="2400" b="0" i="1" smtClean="0">
+                              <a:latin typeface="Cambria Math" panose="02040503050406030204" pitchFamily="18" charset="0"/>
+                            </a:rPr>
+                            <m:t>0</m:t>
+                          </m:r>
+                        </m:sub>
+                        <m:sup>
+                          <m:r>
+                            <a:rPr lang="en-US" altLang="ja-JP" sz="2400" b="0" i="1" smtClean="0">
+                              <a:latin typeface="Cambria Math" panose="02040503050406030204" pitchFamily="18" charset="0"/>
+                            </a:rPr>
+                            <m:t>2</m:t>
+                          </m:r>
+                          <m:r>
+                            <a:rPr lang="en-US" altLang="ja-JP" sz="2400" b="0" i="1" smtClean="0">
+                              <a:latin typeface="Cambria Math" panose="02040503050406030204" pitchFamily="18" charset="0"/>
+                            </a:rPr>
+                            <m:t>𝜋</m:t>
+                          </m:r>
+                        </m:sup>
+                        <m:e>
+                          <m:nary>
+                            <m:naryPr>
+                              <m:ctrlPr>
+                                <a:rPr lang="en-US" altLang="ja-JP" sz="2400" b="0" i="1" smtClean="0">
+                                  <a:latin typeface="Cambria Math" panose="02040503050406030204" pitchFamily="18" charset="0"/>
+                                </a:rPr>
+                              </m:ctrlPr>
+                            </m:naryPr>
+                            <m:sub>
+                              <m:r>
+                                <a:rPr lang="en-US" altLang="ja-JP" sz="2400" b="0" i="1" smtClean="0">
+                                  <a:latin typeface="Cambria Math" panose="02040503050406030204" pitchFamily="18" charset="0"/>
+                                </a:rPr>
+                                <m:t>0</m:t>
+                              </m:r>
+                            </m:sub>
+                            <m:sup>
+                              <m:r>
+                                <a:rPr lang="en-US" altLang="ja-JP" sz="2400" b="0" i="1" smtClean="0">
+                                  <a:latin typeface="Cambria Math" panose="02040503050406030204" pitchFamily="18" charset="0"/>
+                                </a:rPr>
+                                <m:t>∞</m:t>
+                              </m:r>
+                            </m:sup>
+                            <m:e>
+                              <m:f>
+                                <m:fPr>
+                                  <m:ctrlPr>
+                                    <a:rPr lang="en-US" altLang="ja-JP" sz="2400" i="1">
+                                      <a:latin typeface="Cambria Math" panose="02040503050406030204" pitchFamily="18" charset="0"/>
+                                    </a:rPr>
+                                  </m:ctrlPr>
+                                </m:fPr>
+                                <m:num>
+                                  <m:sSup>
+                                    <m:sSupPr>
+                                      <m:ctrlPr>
+                                        <a:rPr lang="en-US" altLang="ja-JP" sz="2400" i="1">
+                                          <a:latin typeface="Cambria Math" panose="02040503050406030204" pitchFamily="18" charset="0"/>
+                                        </a:rPr>
+                                      </m:ctrlPr>
+                                    </m:sSupPr>
+                                    <m:e>
+                                      <m:r>
+                                        <a:rPr lang="en-US" altLang="ja-JP" sz="2400" i="1">
+                                          <a:latin typeface="Cambria Math" panose="02040503050406030204" pitchFamily="18" charset="0"/>
+                                        </a:rPr>
+                                        <m:t>𝑒</m:t>
+                                      </m:r>
+                                    </m:e>
+                                    <m:sup>
+                                      <m:r>
+                                        <a:rPr lang="en-US" altLang="ja-JP" sz="2400" i="1">
+                                          <a:latin typeface="Cambria Math" panose="02040503050406030204" pitchFamily="18" charset="0"/>
+                                        </a:rPr>
+                                        <m:t>−</m:t>
+                                      </m:r>
+                                      <m:f>
+                                        <m:fPr>
+                                          <m:ctrlPr>
+                                            <a:rPr lang="en-US" altLang="ja-JP" sz="2400" i="1">
+                                              <a:latin typeface="Cambria Math" panose="02040503050406030204" pitchFamily="18" charset="0"/>
+                                            </a:rPr>
+                                          </m:ctrlPr>
+                                        </m:fPr>
+                                        <m:num>
+                                          <m:r>
+                                            <a:rPr lang="en-US" altLang="ja-JP" sz="2400" i="1">
+                                              <a:latin typeface="Cambria Math" panose="02040503050406030204" pitchFamily="18" charset="0"/>
+                                            </a:rPr>
+                                            <m:t>𝑟</m:t>
+                                          </m:r>
+                                        </m:num>
+                                        <m:den>
+                                          <m:r>
+                                            <a:rPr lang="en-US" altLang="ja-JP" sz="2400" i="1">
+                                              <a:latin typeface="Cambria Math" panose="02040503050406030204" pitchFamily="18" charset="0"/>
+                                            </a:rPr>
+                                            <m:t>𝑑</m:t>
+                                          </m:r>
+                                        </m:den>
+                                      </m:f>
+                                    </m:sup>
+                                  </m:sSup>
+                                  <m:r>
+                                    <a:rPr lang="en-US" altLang="ja-JP" sz="2400" i="1">
+                                      <a:latin typeface="Cambria Math" panose="02040503050406030204" pitchFamily="18" charset="0"/>
+                                    </a:rPr>
+                                    <m:t>+</m:t>
+                                  </m:r>
+                                  <m:sSup>
+                                    <m:sSupPr>
+                                      <m:ctrlPr>
+                                        <a:rPr lang="en-US" altLang="ja-JP" sz="2400" i="1">
+                                          <a:latin typeface="Cambria Math" panose="02040503050406030204" pitchFamily="18" charset="0"/>
+                                        </a:rPr>
+                                      </m:ctrlPr>
+                                    </m:sSupPr>
+                                    <m:e>
+                                      <m:r>
+                                        <a:rPr lang="en-US" altLang="ja-JP" sz="2400" i="1">
+                                          <a:latin typeface="Cambria Math" panose="02040503050406030204" pitchFamily="18" charset="0"/>
+                                        </a:rPr>
+                                        <m:t>𝑒</m:t>
+                                      </m:r>
+                                    </m:e>
+                                    <m:sup>
+                                      <m:r>
+                                        <a:rPr lang="en-US" altLang="ja-JP" sz="2400" i="1">
+                                          <a:latin typeface="Cambria Math" panose="02040503050406030204" pitchFamily="18" charset="0"/>
+                                        </a:rPr>
+                                        <m:t>−</m:t>
+                                      </m:r>
+                                      <m:f>
+                                        <m:fPr>
+                                          <m:ctrlPr>
+                                            <a:rPr lang="en-US" altLang="ja-JP" sz="2400" i="1">
+                                              <a:latin typeface="Cambria Math" panose="02040503050406030204" pitchFamily="18" charset="0"/>
+                                            </a:rPr>
+                                          </m:ctrlPr>
+                                        </m:fPr>
+                                        <m:num>
+                                          <m:r>
+                                            <a:rPr lang="en-US" altLang="ja-JP" sz="2400" i="1">
+                                              <a:latin typeface="Cambria Math" panose="02040503050406030204" pitchFamily="18" charset="0"/>
+                                            </a:rPr>
+                                            <m:t>𝑟</m:t>
+                                          </m:r>
+                                        </m:num>
+                                        <m:den>
+                                          <m:r>
+                                            <a:rPr lang="en-US" altLang="ja-JP" sz="2400" i="1">
+                                              <a:latin typeface="Cambria Math" panose="02040503050406030204" pitchFamily="18" charset="0"/>
+                                            </a:rPr>
+                                            <m:t>3</m:t>
+                                          </m:r>
+                                          <m:r>
+                                            <a:rPr lang="en-US" altLang="ja-JP" sz="2400" i="1">
+                                              <a:latin typeface="Cambria Math" panose="02040503050406030204" pitchFamily="18" charset="0"/>
+                                            </a:rPr>
+                                            <m:t>𝑑</m:t>
+                                          </m:r>
+                                        </m:den>
+                                      </m:f>
+                                    </m:sup>
+                                  </m:sSup>
+                                </m:num>
+                                <m:den>
+                                  <m:r>
+                                    <a:rPr lang="en-US" altLang="ja-JP" sz="2400" i="1">
+                                      <a:latin typeface="Cambria Math" panose="02040503050406030204" pitchFamily="18" charset="0"/>
+                                    </a:rPr>
+                                    <m:t>8</m:t>
+                                  </m:r>
+                                  <m:r>
+                                    <a:rPr lang="en-US" altLang="ja-JP" sz="2400" i="1">
+                                      <a:latin typeface="Cambria Math" panose="02040503050406030204" pitchFamily="18" charset="0"/>
+                                    </a:rPr>
+                                    <m:t>𝜋</m:t>
+                                  </m:r>
+                                  <m:r>
+                                    <a:rPr lang="en-US" altLang="ja-JP" sz="2400" i="1">
+                                      <a:latin typeface="Cambria Math" panose="02040503050406030204" pitchFamily="18" charset="0"/>
+                                    </a:rPr>
+                                    <m:t>𝑑𝑟</m:t>
+                                  </m:r>
+                                </m:den>
+                              </m:f>
+                              <m:r>
+                                <a:rPr lang="en-US" altLang="ja-JP" sz="2400" b="0" i="1" smtClean="0">
+                                  <a:latin typeface="Cambria Math" panose="02040503050406030204" pitchFamily="18" charset="0"/>
+                                </a:rPr>
+                                <m:t>𝑟𝑑𝑟𝑑</m:t>
+                              </m:r>
+                              <m:r>
+                                <a:rPr lang="en-US" altLang="ja-JP" sz="2400" b="0" i="1" smtClean="0">
+                                  <a:latin typeface="Cambria Math" panose="02040503050406030204" pitchFamily="18" charset="0"/>
+                                </a:rPr>
+                                <m:t>𝜙</m:t>
+                              </m:r>
+                            </m:e>
+                          </m:nary>
+                        </m:e>
+                      </m:nary>
+                    </m:oMath>
+                    <m:oMath xmlns:m="http://schemas.openxmlformats.org/officeDocument/2006/math">
+                      <m:r>
+                        <a:rPr lang="en-US" altLang="ja-JP" sz="2400" b="0" i="1" smtClean="0">
+                          <a:latin typeface="Cambria Math" panose="02040503050406030204" pitchFamily="18" charset="0"/>
+                        </a:rPr>
+                        <m:t> </m:t>
+                      </m:r>
+                    </m:oMath>
+                    <m:oMath xmlns:m="http://schemas.openxmlformats.org/officeDocument/2006/math">
+                      <m:r>
+                        <a:rPr lang="en-US" altLang="ja-JP" sz="2400" b="0" i="0" smtClean="0">
+                          <a:latin typeface="Cambria Math" panose="02040503050406030204" pitchFamily="18" charset="0"/>
+                        </a:rPr>
+                        <m:t>=</m:t>
+                      </m:r>
+                      <m:nary>
+                        <m:naryPr>
+                          <m:ctrlPr>
+                            <a:rPr lang="en-US" altLang="ja-JP" sz="2400" i="1">
+                              <a:latin typeface="Cambria Math" panose="02040503050406030204" pitchFamily="18" charset="0"/>
+                            </a:rPr>
+                          </m:ctrlPr>
+                        </m:naryPr>
+                        <m:sub>
+                          <m:r>
+                            <a:rPr lang="en-US" altLang="ja-JP" sz="2400" i="1">
+                              <a:latin typeface="Cambria Math" panose="02040503050406030204" pitchFamily="18" charset="0"/>
+                            </a:rPr>
+                            <m:t>0</m:t>
+                          </m:r>
+                        </m:sub>
+                        <m:sup>
+                          <m:r>
+                            <a:rPr lang="en-US" altLang="ja-JP" sz="2400" i="1">
+                              <a:latin typeface="Cambria Math" panose="02040503050406030204" pitchFamily="18" charset="0"/>
+                            </a:rPr>
+                            <m:t>∞</m:t>
+                          </m:r>
+                        </m:sup>
+                        <m:e>
+                          <m:f>
+                            <m:fPr>
+                              <m:ctrlPr>
+                                <a:rPr lang="en-US" altLang="ja-JP" sz="2400" i="1">
+                                  <a:latin typeface="Cambria Math" panose="02040503050406030204" pitchFamily="18" charset="0"/>
+                                </a:rPr>
+                              </m:ctrlPr>
+                            </m:fPr>
+                            <m:num>
+                              <m:sSup>
+                                <m:sSupPr>
+                                  <m:ctrlPr>
+                                    <a:rPr lang="en-US" altLang="ja-JP" sz="2400" i="1">
+                                      <a:latin typeface="Cambria Math" panose="02040503050406030204" pitchFamily="18" charset="0"/>
+                                    </a:rPr>
+                                  </m:ctrlPr>
+                                </m:sSupPr>
+                                <m:e>
+                                  <m:r>
+                                    <a:rPr lang="en-US" altLang="ja-JP" sz="2400" i="1">
+                                      <a:latin typeface="Cambria Math" panose="02040503050406030204" pitchFamily="18" charset="0"/>
+                                    </a:rPr>
+                                    <m:t>𝑒</m:t>
+                                  </m:r>
+                                </m:e>
+                                <m:sup>
+                                  <m:r>
+                                    <a:rPr lang="en-US" altLang="ja-JP" sz="2400" i="1">
+                                      <a:latin typeface="Cambria Math" panose="02040503050406030204" pitchFamily="18" charset="0"/>
+                                    </a:rPr>
+                                    <m:t>−</m:t>
+                                  </m:r>
+                                  <m:f>
+                                    <m:fPr>
+                                      <m:ctrlPr>
+                                        <a:rPr lang="en-US" altLang="ja-JP" sz="2400" i="1">
+                                          <a:latin typeface="Cambria Math" panose="02040503050406030204" pitchFamily="18" charset="0"/>
+                                        </a:rPr>
+                                      </m:ctrlPr>
+                                    </m:fPr>
+                                    <m:num>
+                                      <m:r>
+                                        <a:rPr lang="en-US" altLang="ja-JP" sz="2400" i="1">
+                                          <a:latin typeface="Cambria Math" panose="02040503050406030204" pitchFamily="18" charset="0"/>
+                                        </a:rPr>
+                                        <m:t>𝑟</m:t>
+                                      </m:r>
+                                    </m:num>
+                                    <m:den>
+                                      <m:r>
+                                        <a:rPr lang="en-US" altLang="ja-JP" sz="2400" i="1">
+                                          <a:latin typeface="Cambria Math" panose="02040503050406030204" pitchFamily="18" charset="0"/>
+                                        </a:rPr>
+                                        <m:t>𝑑</m:t>
+                                      </m:r>
+                                    </m:den>
+                                  </m:f>
+                                </m:sup>
+                              </m:sSup>
+                              <m:r>
+                                <a:rPr lang="en-US" altLang="ja-JP" sz="2400" i="1">
+                                  <a:latin typeface="Cambria Math" panose="02040503050406030204" pitchFamily="18" charset="0"/>
+                                </a:rPr>
+                                <m:t>+</m:t>
+                              </m:r>
+                              <m:sSup>
+                                <m:sSupPr>
+                                  <m:ctrlPr>
+                                    <a:rPr lang="en-US" altLang="ja-JP" sz="2400" i="1">
+                                      <a:latin typeface="Cambria Math" panose="02040503050406030204" pitchFamily="18" charset="0"/>
+                                    </a:rPr>
+                                  </m:ctrlPr>
+                                </m:sSupPr>
+                                <m:e>
+                                  <m:r>
+                                    <a:rPr lang="en-US" altLang="ja-JP" sz="2400" i="1">
+                                      <a:latin typeface="Cambria Math" panose="02040503050406030204" pitchFamily="18" charset="0"/>
+                                    </a:rPr>
+                                    <m:t>𝑒</m:t>
+                                  </m:r>
+                                </m:e>
+                                <m:sup>
+                                  <m:r>
+                                    <a:rPr lang="en-US" altLang="ja-JP" sz="2400" i="1">
+                                      <a:latin typeface="Cambria Math" panose="02040503050406030204" pitchFamily="18" charset="0"/>
+                                    </a:rPr>
+                                    <m:t>−</m:t>
+                                  </m:r>
+                                  <m:f>
+                                    <m:fPr>
+                                      <m:ctrlPr>
+                                        <a:rPr lang="en-US" altLang="ja-JP" sz="2400" i="1">
+                                          <a:latin typeface="Cambria Math" panose="02040503050406030204" pitchFamily="18" charset="0"/>
+                                        </a:rPr>
+                                      </m:ctrlPr>
+                                    </m:fPr>
+                                    <m:num>
+                                      <m:r>
+                                        <a:rPr lang="en-US" altLang="ja-JP" sz="2400" i="1">
+                                          <a:latin typeface="Cambria Math" panose="02040503050406030204" pitchFamily="18" charset="0"/>
+                                        </a:rPr>
+                                        <m:t>𝑟</m:t>
+                                      </m:r>
+                                    </m:num>
+                                    <m:den>
+                                      <m:r>
+                                        <a:rPr lang="en-US" altLang="ja-JP" sz="2400" i="1">
+                                          <a:latin typeface="Cambria Math" panose="02040503050406030204" pitchFamily="18" charset="0"/>
+                                        </a:rPr>
+                                        <m:t>3</m:t>
+                                      </m:r>
+                                      <m:r>
+                                        <a:rPr lang="en-US" altLang="ja-JP" sz="2400" i="1">
+                                          <a:latin typeface="Cambria Math" panose="02040503050406030204" pitchFamily="18" charset="0"/>
+                                        </a:rPr>
+                                        <m:t>𝑑</m:t>
+                                      </m:r>
+                                    </m:den>
+                                  </m:f>
+                                </m:sup>
+                              </m:sSup>
+                            </m:num>
+                            <m:den>
+                              <m:r>
+                                <a:rPr lang="en-US" altLang="ja-JP" sz="2400" b="0" i="1" smtClean="0">
+                                  <a:latin typeface="Cambria Math" panose="02040503050406030204" pitchFamily="18" charset="0"/>
+                                </a:rPr>
+                                <m:t>4</m:t>
+                              </m:r>
+                              <m:r>
+                                <a:rPr lang="en-US" altLang="ja-JP" sz="2400" i="1">
+                                  <a:latin typeface="Cambria Math" panose="02040503050406030204" pitchFamily="18" charset="0"/>
+                                </a:rPr>
+                                <m:t>𝑑</m:t>
+                              </m:r>
+                            </m:den>
+                          </m:f>
+                          <m:r>
+                            <a:rPr lang="en-US" altLang="ja-JP" sz="2400" i="1">
+                              <a:latin typeface="Cambria Math" panose="02040503050406030204" pitchFamily="18" charset="0"/>
+                            </a:rPr>
+                            <m:t>𝑑𝑟</m:t>
+                          </m:r>
+                        </m:e>
+                      </m:nary>
+                    </m:oMath>
+                    <m:oMath xmlns:m="http://schemas.openxmlformats.org/officeDocument/2006/math">
+                      <m:r>
+                        <a:rPr lang="en-US" altLang="ja-JP" sz="2400" b="0" i="1" smtClean="0">
+                          <a:latin typeface="Cambria Math" panose="02040503050406030204" pitchFamily="18" charset="0"/>
+                        </a:rPr>
+                        <m:t> </m:t>
+                      </m:r>
+                    </m:oMath>
+                    <m:oMath xmlns:m="http://schemas.openxmlformats.org/officeDocument/2006/math">
+                      <m:r>
+                        <a:rPr lang="en-US" altLang="ja-JP" sz="2400" b="0" i="1" smtClean="0">
+                          <a:latin typeface="Cambria Math" panose="02040503050406030204" pitchFamily="18" charset="0"/>
+                        </a:rPr>
+                        <m:t>=</m:t>
+                      </m:r>
+                      <m:f>
+                        <m:fPr>
+                          <m:ctrlPr>
+                            <a:rPr lang="en-US" altLang="ja-JP" sz="2400" b="0" i="1" smtClean="0">
+                              <a:latin typeface="Cambria Math" panose="02040503050406030204" pitchFamily="18" charset="0"/>
+                            </a:rPr>
+                          </m:ctrlPr>
+                        </m:fPr>
+                        <m:num>
+                          <m:r>
+                            <a:rPr lang="en-US" altLang="ja-JP" sz="2400" b="0" i="1" smtClean="0">
+                              <a:latin typeface="Cambria Math" panose="02040503050406030204" pitchFamily="18" charset="0"/>
+                            </a:rPr>
+                            <m:t>1</m:t>
+                          </m:r>
+                        </m:num>
+                        <m:den>
+                          <m:r>
+                            <a:rPr lang="en-US" altLang="ja-JP" sz="2400" b="0" i="1" smtClean="0">
+                              <a:latin typeface="Cambria Math" panose="02040503050406030204" pitchFamily="18" charset="0"/>
+                            </a:rPr>
+                            <m:t>4</m:t>
+                          </m:r>
+                          <m:r>
+                            <a:rPr lang="en-US" altLang="ja-JP" sz="2400" b="0" i="1" smtClean="0">
+                              <a:latin typeface="Cambria Math" panose="02040503050406030204" pitchFamily="18" charset="0"/>
+                            </a:rPr>
+                            <m:t>𝑑</m:t>
+                          </m:r>
+                        </m:den>
+                      </m:f>
+                      <m:sSubSup>
+                        <m:sSubSupPr>
+                          <m:ctrlPr>
+                            <a:rPr lang="en-US" altLang="ja-JP" sz="2400" b="0" i="1" smtClean="0">
+                              <a:latin typeface="Cambria Math" panose="02040503050406030204" pitchFamily="18" charset="0"/>
+                            </a:rPr>
+                          </m:ctrlPr>
+                        </m:sSubSupPr>
+                        <m:e>
+                          <m:d>
+                            <m:dPr>
+                              <m:begChr m:val="["/>
+                              <m:endChr m:val="]"/>
+                              <m:ctrlPr>
+                                <a:rPr lang="en-US" altLang="ja-JP" sz="2400" b="0" i="1" smtClean="0">
+                                  <a:latin typeface="Cambria Math" panose="02040503050406030204" pitchFamily="18" charset="0"/>
+                                </a:rPr>
+                              </m:ctrlPr>
+                            </m:dPr>
+                            <m:e>
+                              <m:r>
+                                <a:rPr lang="en-US" altLang="ja-JP" sz="2400" b="0" i="1" smtClean="0">
+                                  <a:latin typeface="Cambria Math" panose="02040503050406030204" pitchFamily="18" charset="0"/>
+                                </a:rPr>
+                                <m:t>−</m:t>
+                              </m:r>
+                              <m:r>
+                                <a:rPr lang="en-US" altLang="ja-JP" sz="2400" b="0" i="1" smtClean="0">
+                                  <a:latin typeface="Cambria Math" panose="02040503050406030204" pitchFamily="18" charset="0"/>
+                                </a:rPr>
+                                <m:t>𝑑</m:t>
+                              </m:r>
+                              <m:sSup>
+                                <m:sSupPr>
+                                  <m:ctrlPr>
+                                    <a:rPr lang="en-US" altLang="ja-JP" sz="2400" b="0" i="1" smtClean="0">
+                                      <a:latin typeface="Cambria Math" panose="02040503050406030204" pitchFamily="18" charset="0"/>
+                                    </a:rPr>
+                                  </m:ctrlPr>
+                                </m:sSupPr>
+                                <m:e>
+                                  <m:r>
+                                    <a:rPr lang="en-US" altLang="ja-JP" sz="2400" b="0" i="1" smtClean="0">
+                                      <a:latin typeface="Cambria Math" panose="02040503050406030204" pitchFamily="18" charset="0"/>
+                                    </a:rPr>
+                                    <m:t>𝑒</m:t>
+                                  </m:r>
+                                </m:e>
+                                <m:sup>
+                                  <m:r>
+                                    <a:rPr lang="en-US" altLang="ja-JP" sz="2400" b="0" i="1" smtClean="0">
+                                      <a:latin typeface="Cambria Math" panose="02040503050406030204" pitchFamily="18" charset="0"/>
+                                    </a:rPr>
+                                    <m:t>−</m:t>
+                                  </m:r>
+                                  <m:f>
+                                    <m:fPr>
+                                      <m:ctrlPr>
+                                        <a:rPr lang="en-US" altLang="ja-JP" sz="2400" b="0" i="1" smtClean="0">
+                                          <a:latin typeface="Cambria Math" panose="02040503050406030204" pitchFamily="18" charset="0"/>
+                                        </a:rPr>
+                                      </m:ctrlPr>
+                                    </m:fPr>
+                                    <m:num>
+                                      <m:r>
+                                        <a:rPr lang="en-US" altLang="ja-JP" sz="2400" b="0" i="1" smtClean="0">
+                                          <a:latin typeface="Cambria Math" panose="02040503050406030204" pitchFamily="18" charset="0"/>
+                                        </a:rPr>
+                                        <m:t>𝑟</m:t>
+                                      </m:r>
+                                    </m:num>
+                                    <m:den>
+                                      <m:r>
+                                        <a:rPr lang="en-US" altLang="ja-JP" sz="2400" b="0" i="1" smtClean="0">
+                                          <a:latin typeface="Cambria Math" panose="02040503050406030204" pitchFamily="18" charset="0"/>
+                                        </a:rPr>
+                                        <m:t>𝑑</m:t>
+                                      </m:r>
+                                    </m:den>
+                                  </m:f>
+                                </m:sup>
+                              </m:sSup>
+                              <m:r>
+                                <a:rPr lang="en-US" altLang="ja-JP" sz="2400" b="0" i="1" smtClean="0">
+                                  <a:latin typeface="Cambria Math" panose="02040503050406030204" pitchFamily="18" charset="0"/>
+                                </a:rPr>
+                                <m:t>−3</m:t>
+                              </m:r>
+                              <m:r>
+                                <a:rPr lang="en-US" altLang="ja-JP" sz="2400" b="0" i="1" smtClean="0">
+                                  <a:latin typeface="Cambria Math" panose="02040503050406030204" pitchFamily="18" charset="0"/>
+                                </a:rPr>
+                                <m:t>𝑑</m:t>
+                              </m:r>
+                              <m:sSup>
+                                <m:sSupPr>
+                                  <m:ctrlPr>
+                                    <a:rPr lang="en-US" altLang="ja-JP" sz="2400" b="0" i="1" smtClean="0">
+                                      <a:latin typeface="Cambria Math" panose="02040503050406030204" pitchFamily="18" charset="0"/>
+                                    </a:rPr>
+                                  </m:ctrlPr>
+                                </m:sSupPr>
+                                <m:e>
+                                  <m:r>
+                                    <a:rPr lang="en-US" altLang="ja-JP" sz="2400" b="0" i="1" smtClean="0">
+                                      <a:latin typeface="Cambria Math" panose="02040503050406030204" pitchFamily="18" charset="0"/>
+                                    </a:rPr>
+                                    <m:t>𝑒</m:t>
+                                  </m:r>
+                                </m:e>
+                                <m:sup>
+                                  <m:r>
+                                    <a:rPr lang="en-US" altLang="ja-JP" sz="2400" b="0" i="1" smtClean="0">
+                                      <a:latin typeface="Cambria Math" panose="02040503050406030204" pitchFamily="18" charset="0"/>
+                                    </a:rPr>
+                                    <m:t>−</m:t>
+                                  </m:r>
+                                  <m:f>
+                                    <m:fPr>
+                                      <m:ctrlPr>
+                                        <a:rPr lang="en-US" altLang="ja-JP" sz="2400" b="0" i="1" smtClean="0">
+                                          <a:latin typeface="Cambria Math" panose="02040503050406030204" pitchFamily="18" charset="0"/>
+                                        </a:rPr>
+                                      </m:ctrlPr>
+                                    </m:fPr>
+                                    <m:num>
+                                      <m:r>
+                                        <a:rPr lang="en-US" altLang="ja-JP" sz="2400" b="0" i="1" smtClean="0">
+                                          <a:latin typeface="Cambria Math" panose="02040503050406030204" pitchFamily="18" charset="0"/>
+                                        </a:rPr>
+                                        <m:t>𝑟</m:t>
+                                      </m:r>
+                                    </m:num>
+                                    <m:den>
+                                      <m:r>
+                                        <a:rPr lang="en-US" altLang="ja-JP" sz="2400" b="0" i="1" smtClean="0">
+                                          <a:latin typeface="Cambria Math" panose="02040503050406030204" pitchFamily="18" charset="0"/>
+                                        </a:rPr>
+                                        <m:t>3</m:t>
+                                      </m:r>
+                                      <m:r>
+                                        <a:rPr lang="en-US" altLang="ja-JP" sz="2400" b="0" i="1" smtClean="0">
+                                          <a:latin typeface="Cambria Math" panose="02040503050406030204" pitchFamily="18" charset="0"/>
+                                        </a:rPr>
+                                        <m:t>𝑑</m:t>
+                                      </m:r>
+                                    </m:den>
+                                  </m:f>
+                                </m:sup>
+                              </m:sSup>
+                            </m:e>
+                          </m:d>
+                        </m:e>
+                        <m:sub>
+                          <m:r>
+                            <a:rPr lang="en-US" altLang="ja-JP" sz="2400" b="0" i="1" smtClean="0">
+                              <a:latin typeface="Cambria Math" panose="02040503050406030204" pitchFamily="18" charset="0"/>
+                            </a:rPr>
+                            <m:t>0</m:t>
+                          </m:r>
+                        </m:sub>
+                        <m:sup>
+                          <m:r>
+                            <a:rPr lang="en-US" altLang="ja-JP" sz="2400" b="0" i="1" smtClean="0">
+                              <a:latin typeface="Cambria Math" panose="02040503050406030204" pitchFamily="18" charset="0"/>
+                            </a:rPr>
+                            <m:t>∞</m:t>
+                          </m:r>
+                        </m:sup>
+                      </m:sSubSup>
+                    </m:oMath>
+                    <m:oMath xmlns:m="http://schemas.openxmlformats.org/officeDocument/2006/math">
+                      <m:r>
+                        <a:rPr lang="en-US" altLang="ja-JP" sz="2400" i="1">
+                          <a:latin typeface="Cambria Math" panose="02040503050406030204" pitchFamily="18" charset="0"/>
+                        </a:rPr>
+                        <m:t> </m:t>
+                      </m:r>
+                    </m:oMath>
+                    <m:oMath xmlns:m="http://schemas.openxmlformats.org/officeDocument/2006/math">
+                      <m:r>
+                        <a:rPr lang="en-US" altLang="ja-JP" sz="2400" i="1">
+                          <a:latin typeface="Cambria Math" panose="02040503050406030204" pitchFamily="18" charset="0"/>
+                        </a:rPr>
+                        <m:t>=</m:t>
+                      </m:r>
+                      <m:f>
+                        <m:fPr>
+                          <m:ctrlPr>
+                            <a:rPr lang="en-US" altLang="ja-JP" sz="2400" b="0" i="1" smtClean="0">
+                              <a:latin typeface="Cambria Math" panose="02040503050406030204" pitchFamily="18" charset="0"/>
+                            </a:rPr>
+                          </m:ctrlPr>
+                        </m:fPr>
+                        <m:num>
+                          <m:r>
+                            <a:rPr lang="en-US" altLang="ja-JP" sz="2400" b="0" i="1" smtClean="0">
+                              <a:latin typeface="Cambria Math" panose="02040503050406030204" pitchFamily="18" charset="0"/>
+                            </a:rPr>
+                            <m:t>1</m:t>
+                          </m:r>
+                        </m:num>
+                        <m:den>
+                          <m:r>
+                            <a:rPr lang="en-US" altLang="ja-JP" sz="2400" b="0" i="1" smtClean="0">
+                              <a:latin typeface="Cambria Math" panose="02040503050406030204" pitchFamily="18" charset="0"/>
+                            </a:rPr>
+                            <m:t>4</m:t>
+                          </m:r>
+                        </m:den>
+                      </m:f>
+                      <m:sSubSup>
+                        <m:sSubSupPr>
+                          <m:ctrlPr>
+                            <a:rPr lang="en-US" altLang="ja-JP" sz="2400" i="1" smtClean="0">
+                              <a:latin typeface="Cambria Math" panose="02040503050406030204" pitchFamily="18" charset="0"/>
+                            </a:rPr>
+                          </m:ctrlPr>
+                        </m:sSubSupPr>
+                        <m:e>
+                          <m:d>
+                            <m:dPr>
+                              <m:begChr m:val="["/>
+                              <m:endChr m:val="]"/>
+                              <m:ctrlPr>
+                                <a:rPr lang="en-US" altLang="ja-JP" sz="2400" i="1">
+                                  <a:latin typeface="Cambria Math" panose="02040503050406030204" pitchFamily="18" charset="0"/>
+                                </a:rPr>
+                              </m:ctrlPr>
+                            </m:dPr>
+                            <m:e>
+                              <m:sSup>
+                                <m:sSupPr>
+                                  <m:ctrlPr>
+                                    <a:rPr lang="en-US" altLang="ja-JP" sz="2400" i="1">
+                                      <a:latin typeface="Cambria Math" panose="02040503050406030204" pitchFamily="18" charset="0"/>
+                                    </a:rPr>
+                                  </m:ctrlPr>
+                                </m:sSupPr>
+                                <m:e>
+                                  <m:r>
+                                    <a:rPr lang="en-US" altLang="ja-JP" sz="2400" i="1">
+                                      <a:latin typeface="Cambria Math" panose="02040503050406030204" pitchFamily="18" charset="0"/>
+                                    </a:rPr>
+                                    <m:t>𝑒</m:t>
+                                  </m:r>
+                                </m:e>
+                                <m:sup>
+                                  <m:r>
+                                    <a:rPr lang="en-US" altLang="ja-JP" sz="2400" i="1">
+                                      <a:latin typeface="Cambria Math" panose="02040503050406030204" pitchFamily="18" charset="0"/>
+                                    </a:rPr>
+                                    <m:t>−</m:t>
+                                  </m:r>
+                                  <m:f>
+                                    <m:fPr>
+                                      <m:ctrlPr>
+                                        <a:rPr lang="en-US" altLang="ja-JP" sz="2400" i="1">
+                                          <a:latin typeface="Cambria Math" panose="02040503050406030204" pitchFamily="18" charset="0"/>
+                                        </a:rPr>
+                                      </m:ctrlPr>
+                                    </m:fPr>
+                                    <m:num>
+                                      <m:r>
+                                        <a:rPr lang="en-US" altLang="ja-JP" sz="2400" i="1">
+                                          <a:latin typeface="Cambria Math" panose="02040503050406030204" pitchFamily="18" charset="0"/>
+                                        </a:rPr>
+                                        <m:t>𝑟</m:t>
+                                      </m:r>
+                                    </m:num>
+                                    <m:den>
+                                      <m:r>
+                                        <a:rPr lang="en-US" altLang="ja-JP" sz="2400" i="1">
+                                          <a:latin typeface="Cambria Math" panose="02040503050406030204" pitchFamily="18" charset="0"/>
+                                        </a:rPr>
+                                        <m:t>𝑑</m:t>
+                                      </m:r>
+                                    </m:den>
+                                  </m:f>
+                                </m:sup>
+                              </m:sSup>
+                              <m:r>
+                                <a:rPr lang="en-US" altLang="ja-JP" sz="2400" b="0" i="1" smtClean="0">
+                                  <a:latin typeface="Cambria Math" panose="02040503050406030204" pitchFamily="18" charset="0"/>
+                                </a:rPr>
+                                <m:t>+</m:t>
+                              </m:r>
+                              <m:sSup>
+                                <m:sSupPr>
+                                  <m:ctrlPr>
+                                    <a:rPr lang="en-US" altLang="ja-JP" sz="2400" i="1">
+                                      <a:latin typeface="Cambria Math" panose="02040503050406030204" pitchFamily="18" charset="0"/>
+                                    </a:rPr>
+                                  </m:ctrlPr>
+                                </m:sSupPr>
+                                <m:e>
+                                  <m:r>
+                                    <a:rPr lang="en-US" altLang="ja-JP" sz="2400" i="1">
+                                      <a:latin typeface="Cambria Math" panose="02040503050406030204" pitchFamily="18" charset="0"/>
+                                    </a:rPr>
+                                    <m:t>𝑒</m:t>
+                                  </m:r>
+                                </m:e>
+                                <m:sup>
+                                  <m:r>
+                                    <a:rPr lang="en-US" altLang="ja-JP" sz="2400" i="1">
+                                      <a:latin typeface="Cambria Math" panose="02040503050406030204" pitchFamily="18" charset="0"/>
+                                    </a:rPr>
+                                    <m:t>−</m:t>
+                                  </m:r>
+                                  <m:f>
+                                    <m:fPr>
+                                      <m:ctrlPr>
+                                        <a:rPr lang="en-US" altLang="ja-JP" sz="2400" i="1">
+                                          <a:latin typeface="Cambria Math" panose="02040503050406030204" pitchFamily="18" charset="0"/>
+                                        </a:rPr>
+                                      </m:ctrlPr>
+                                    </m:fPr>
+                                    <m:num>
+                                      <m:r>
+                                        <a:rPr lang="en-US" altLang="ja-JP" sz="2400" i="1">
+                                          <a:latin typeface="Cambria Math" panose="02040503050406030204" pitchFamily="18" charset="0"/>
+                                        </a:rPr>
+                                        <m:t>𝑟</m:t>
+                                      </m:r>
+                                    </m:num>
+                                    <m:den>
+                                      <m:r>
+                                        <a:rPr lang="en-US" altLang="ja-JP" sz="2400" i="1">
+                                          <a:latin typeface="Cambria Math" panose="02040503050406030204" pitchFamily="18" charset="0"/>
+                                        </a:rPr>
+                                        <m:t>3</m:t>
+                                      </m:r>
+                                      <m:r>
+                                        <a:rPr lang="en-US" altLang="ja-JP" sz="2400" i="1">
+                                          <a:latin typeface="Cambria Math" panose="02040503050406030204" pitchFamily="18" charset="0"/>
+                                        </a:rPr>
+                                        <m:t>𝑑</m:t>
+                                      </m:r>
+                                    </m:den>
+                                  </m:f>
+                                </m:sup>
+                              </m:sSup>
+                            </m:e>
+                          </m:d>
+                        </m:e>
+                        <m:sub>
+                          <m:r>
+                            <a:rPr lang="en-US" altLang="ja-JP" sz="2400" b="0" i="1" smtClean="0">
+                              <a:latin typeface="Cambria Math" panose="02040503050406030204" pitchFamily="18" charset="0"/>
+                            </a:rPr>
+                            <m:t>∞</m:t>
+                          </m:r>
+                        </m:sub>
+                        <m:sup>
+                          <m:r>
+                            <a:rPr lang="en-US" altLang="ja-JP" sz="2400" b="0" i="1" smtClean="0">
+                              <a:latin typeface="Cambria Math" panose="02040503050406030204" pitchFamily="18" charset="0"/>
+                            </a:rPr>
+                            <m:t>0</m:t>
+                          </m:r>
+                        </m:sup>
+                      </m:sSubSup>
+                    </m:oMath>
+                    <m:oMath xmlns:m="http://schemas.openxmlformats.org/officeDocument/2006/math">
+                      <m:r>
+                        <a:rPr lang="en-US" altLang="ja-JP" sz="2400" i="1">
+                          <a:latin typeface="Cambria Math" panose="02040503050406030204" pitchFamily="18" charset="0"/>
+                        </a:rPr>
+                        <m:t> </m:t>
+                      </m:r>
+                    </m:oMath>
+                    <m:oMath xmlns:m="http://schemas.openxmlformats.org/officeDocument/2006/math">
+                      <m:r>
+                        <a:rPr lang="en-US" altLang="ja-JP" sz="2400" i="1">
+                          <a:latin typeface="Cambria Math" panose="02040503050406030204" pitchFamily="18" charset="0"/>
+                        </a:rPr>
+                        <m:t>=</m:t>
+                      </m:r>
+                      <m:r>
+                        <a:rPr lang="en-US" altLang="ja-JP" sz="2400" i="1" smtClean="0">
+                          <a:latin typeface="Cambria Math" panose="02040503050406030204" pitchFamily="18" charset="0"/>
+                        </a:rPr>
+                        <m:t>1</m:t>
+                      </m:r>
+                    </m:oMath>
+                  </m:oMathPara>
+                </a14:m>
+                <a:endParaRPr kumimoji="1" lang="en-US" altLang="ja-JP" sz="2400"/>
+              </a:p>
+              <a:p>
+                <a:pPr lvl="8"/>
+                <a:endParaRPr kumimoji="1" lang="en-US" altLang="ja-JP" sz="1400"/>
+              </a:p>
+            </p:txBody>
+          </p:sp>
+        </mc:Choice>
+        <mc:Fallback>
+          <p:sp>
+            <p:nvSpPr>
+              <p:cNvPr id="3" name="コンテンツ プレースホルダー 2">
+                <a:extLst>
+                  <a:ext uri="{FF2B5EF4-FFF2-40B4-BE49-F238E27FC236}">
+                    <a16:creationId xmlns:a16="http://schemas.microsoft.com/office/drawing/2014/main" id="{8920CBE6-4496-1F77-4F15-5558092D5C39}"/>
+                  </a:ext>
+                </a:extLst>
+              </p:cNvPr>
+              <p:cNvSpPr>
+                <a:spLocks noGrp="1" noRot="1" noChangeAspect="1" noMove="1" noResize="1" noEditPoints="1" noAdjustHandles="1" noChangeArrowheads="1" noChangeShapeType="1" noTextEdit="1"/>
+              </p:cNvSpPr>
+              <p:nvPr>
+                <p:ph idx="1"/>
+              </p:nvPr>
+            </p:nvSpPr>
+            <p:spPr>
+              <a:xfrm>
+                <a:off x="838200" y="1825625"/>
+                <a:ext cx="6914196" cy="4351338"/>
+              </a:xfrm>
+              <a:blipFill>
+                <a:blip r:embed="rId2"/>
+                <a:stretch>
+                  <a:fillRect l="-617" t="-2241"/>
+                </a:stretch>
+              </a:blipFill>
+            </p:spPr>
+            <p:txBody>
+              <a:bodyPr/>
+              <a:lstStyle/>
+              <a:p>
+                <a:r>
+                  <a:rPr lang="ja-JP" altLang="en-US">
+                    <a:noFill/>
+                  </a:rPr>
+                  <a:t> </a:t>
+                </a:r>
+              </a:p>
+            </p:txBody>
+          </p:sp>
+        </mc:Fallback>
+      </mc:AlternateContent>
+      <p:sp>
+        <p:nvSpPr>
+          <p:cNvPr id="4" name="楕円 3">
+            <a:extLst>
+              <a:ext uri="{FF2B5EF4-FFF2-40B4-BE49-F238E27FC236}">
+                <a16:creationId xmlns:a16="http://schemas.microsoft.com/office/drawing/2014/main" id="{A13131F6-7055-34F1-D5DA-DE98C5DAEE3E}"/>
+              </a:ext>
+            </a:extLst>
+          </p:cNvPr>
+          <p:cNvSpPr/>
+          <p:nvPr/>
+        </p:nvSpPr>
+        <p:spPr>
+          <a:xfrm>
+            <a:off x="8633147" y="2758825"/>
+            <a:ext cx="2235200" cy="2235200"/>
+          </a:xfrm>
+          <a:prstGeom prst="ellipse">
+            <a:avLst/>
+          </a:prstGeom>
+          <a:noFill/>
+        </p:spPr>
+        <p:style>
+          <a:lnRef idx="2">
+            <a:schemeClr val="accent1">
+              <a:shade val="15000"/>
+            </a:schemeClr>
+          </a:lnRef>
+          <a:fillRef idx="1">
+            <a:schemeClr val="accent1"/>
+          </a:fillRef>
+          <a:effectRef idx="0">
+            <a:schemeClr val="accent1"/>
+          </a:effectRef>
+          <a:fontRef idx="minor">
+            <a:schemeClr val="lt1"/>
+          </a:fontRef>
+        </p:style>
+        <p:txBody>
+          <a:bodyPr rtlCol="0" anchor="ctr"/>
+          <a:lstStyle/>
+          <a:p>
+            <a:pPr algn="ctr"/>
+            <a:endParaRPr kumimoji="1" lang="ja-JP" altLang="en-US"/>
+          </a:p>
+        </p:txBody>
+      </p:sp>
+      <p:cxnSp>
+        <p:nvCxnSpPr>
+          <p:cNvPr id="7" name="直線矢印コネクタ 6">
+            <a:extLst>
+              <a:ext uri="{FF2B5EF4-FFF2-40B4-BE49-F238E27FC236}">
+                <a16:creationId xmlns:a16="http://schemas.microsoft.com/office/drawing/2014/main" id="{A32E2617-CD7F-F337-4E84-EC8B998B8BE4}"/>
+              </a:ext>
+            </a:extLst>
+          </p:cNvPr>
+          <p:cNvCxnSpPr>
+            <a:cxnSpLocks/>
+            <a:stCxn id="4" idx="1"/>
+            <a:endCxn id="101" idx="0"/>
+          </p:cNvCxnSpPr>
+          <p:nvPr/>
+        </p:nvCxnSpPr>
+        <p:spPr>
+          <a:xfrm>
+            <a:off x="8960484" y="3086162"/>
+            <a:ext cx="0" cy="1523378"/>
+          </a:xfrm>
+          <a:prstGeom prst="straightConnector1">
+            <a:avLst/>
+          </a:prstGeom>
+          <a:ln>
+            <a:tailEnd type="triangle"/>
+          </a:ln>
+        </p:spPr>
+        <p:style>
+          <a:lnRef idx="1">
+            <a:schemeClr val="accent1"/>
+          </a:lnRef>
+          <a:fillRef idx="0">
+            <a:schemeClr val="accent1"/>
+          </a:fillRef>
+          <a:effectRef idx="0">
+            <a:schemeClr val="accent1"/>
+          </a:effectRef>
+          <a:fontRef idx="minor">
+            <a:schemeClr val="tx1"/>
+          </a:fontRef>
+        </p:style>
+      </p:cxnSp>
+      <p:sp>
+        <p:nvSpPr>
+          <p:cNvPr id="10" name="正方形/長方形 9">
+            <a:extLst>
+              <a:ext uri="{FF2B5EF4-FFF2-40B4-BE49-F238E27FC236}">
+                <a16:creationId xmlns:a16="http://schemas.microsoft.com/office/drawing/2014/main" id="{6FC9F652-5E7E-5827-5CA7-E9C3D3DC7251}"/>
+              </a:ext>
+            </a:extLst>
+          </p:cNvPr>
+          <p:cNvSpPr/>
+          <p:nvPr/>
+        </p:nvSpPr>
+        <p:spPr>
+          <a:xfrm>
+            <a:off x="8633147" y="2758824"/>
+            <a:ext cx="2235200" cy="2235199"/>
+          </a:xfrm>
+          <a:prstGeom prst="rect">
+            <a:avLst/>
+          </a:prstGeom>
+          <a:noFill/>
+          <a:ln>
+            <a:prstDash val="dash"/>
+          </a:ln>
+        </p:spPr>
+        <p:style>
+          <a:lnRef idx="2">
+            <a:schemeClr val="accent1">
+              <a:shade val="15000"/>
+            </a:schemeClr>
+          </a:lnRef>
+          <a:fillRef idx="1">
+            <a:schemeClr val="accent1"/>
+          </a:fillRef>
+          <a:effectRef idx="0">
+            <a:schemeClr val="accent1"/>
+          </a:effectRef>
+          <a:fontRef idx="minor">
+            <a:schemeClr val="lt1"/>
+          </a:fontRef>
+        </p:style>
+        <p:txBody>
+          <a:bodyPr rtlCol="0" anchor="ctr"/>
+          <a:lstStyle/>
+          <a:p>
+            <a:pPr algn="ctr"/>
+            <a:endParaRPr kumimoji="1" lang="ja-JP" altLang="en-US"/>
+          </a:p>
+        </p:txBody>
+      </p:sp>
+      <p:sp>
+        <p:nvSpPr>
+          <p:cNvPr id="21" name="楕円 20">
+            <a:extLst>
+              <a:ext uri="{FF2B5EF4-FFF2-40B4-BE49-F238E27FC236}">
+                <a16:creationId xmlns:a16="http://schemas.microsoft.com/office/drawing/2014/main" id="{E4DB930D-5074-AB02-2E09-ED51F07AED0B}"/>
+              </a:ext>
+            </a:extLst>
+          </p:cNvPr>
+          <p:cNvSpPr/>
+          <p:nvPr/>
+        </p:nvSpPr>
+        <p:spPr>
+          <a:xfrm>
+            <a:off x="8903334" y="2701672"/>
+            <a:ext cx="114300" cy="114300"/>
+          </a:xfrm>
+          <a:prstGeom prst="ellipse">
+            <a:avLst/>
+          </a:prstGeom>
+        </p:spPr>
+        <p:style>
+          <a:lnRef idx="2">
+            <a:schemeClr val="accent1">
+              <a:shade val="15000"/>
+            </a:schemeClr>
+          </a:lnRef>
+          <a:fillRef idx="1">
+            <a:schemeClr val="accent1"/>
+          </a:fillRef>
+          <a:effectRef idx="0">
+            <a:schemeClr val="accent1"/>
+          </a:effectRef>
+          <a:fontRef idx="minor">
+            <a:schemeClr val="lt1"/>
+          </a:fontRef>
+        </p:style>
+        <p:txBody>
+          <a:bodyPr rtlCol="0" anchor="ctr"/>
+          <a:lstStyle/>
+          <a:p>
+            <a:pPr algn="ctr"/>
+            <a:endParaRPr kumimoji="1" lang="ja-JP" altLang="en-US"/>
+          </a:p>
+        </p:txBody>
+      </p:sp>
+      <p:cxnSp>
+        <p:nvCxnSpPr>
+          <p:cNvPr id="76" name="直線矢印コネクタ 75">
+            <a:extLst>
+              <a:ext uri="{FF2B5EF4-FFF2-40B4-BE49-F238E27FC236}">
+                <a16:creationId xmlns:a16="http://schemas.microsoft.com/office/drawing/2014/main" id="{35C61ECA-1135-853F-5647-71E3BDD22241}"/>
+              </a:ext>
+            </a:extLst>
+          </p:cNvPr>
+          <p:cNvCxnSpPr>
+            <a:cxnSpLocks/>
+            <a:endCxn id="4" idx="1"/>
+          </p:cNvCxnSpPr>
+          <p:nvPr/>
+        </p:nvCxnSpPr>
+        <p:spPr>
+          <a:xfrm>
+            <a:off x="8960484" y="2758824"/>
+            <a:ext cx="0" cy="327338"/>
+          </a:xfrm>
+          <a:prstGeom prst="straightConnector1">
+            <a:avLst/>
+          </a:prstGeom>
+          <a:ln>
+            <a:prstDash val="dash"/>
+            <a:headEnd type="none" w="med" len="med"/>
+            <a:tailEnd type="none" w="med" len="med"/>
+          </a:ln>
+        </p:spPr>
+        <p:style>
+          <a:lnRef idx="1">
+            <a:schemeClr val="accent1"/>
+          </a:lnRef>
+          <a:fillRef idx="0">
+            <a:schemeClr val="accent1"/>
+          </a:fillRef>
+          <a:effectRef idx="0">
+            <a:schemeClr val="accent1"/>
+          </a:effectRef>
+          <a:fontRef idx="minor">
+            <a:schemeClr val="tx1"/>
+          </a:fontRef>
+        </p:style>
+      </p:cxnSp>
+      <p:cxnSp>
+        <p:nvCxnSpPr>
+          <p:cNvPr id="80" name="直線矢印コネクタ 79">
+            <a:extLst>
+              <a:ext uri="{FF2B5EF4-FFF2-40B4-BE49-F238E27FC236}">
+                <a16:creationId xmlns:a16="http://schemas.microsoft.com/office/drawing/2014/main" id="{2BA5DB6E-E9C2-773B-3397-EC6E2C306A58}"/>
+              </a:ext>
+            </a:extLst>
+          </p:cNvPr>
+          <p:cNvCxnSpPr>
+            <a:cxnSpLocks/>
+            <a:stCxn id="4" idx="3"/>
+          </p:cNvCxnSpPr>
+          <p:nvPr/>
+        </p:nvCxnSpPr>
+        <p:spPr>
+          <a:xfrm>
+            <a:off x="8960484" y="4666688"/>
+            <a:ext cx="0" cy="302187"/>
+          </a:xfrm>
+          <a:prstGeom prst="straightConnector1">
+            <a:avLst/>
+          </a:prstGeom>
+          <a:ln>
+            <a:prstDash val="dash"/>
+            <a:headEnd type="none" w="med" len="med"/>
+            <a:tailEnd type="none" w="med" len="med"/>
+          </a:ln>
+        </p:spPr>
+        <p:style>
+          <a:lnRef idx="1">
+            <a:schemeClr val="accent1"/>
+          </a:lnRef>
+          <a:fillRef idx="0">
+            <a:schemeClr val="accent1"/>
+          </a:fillRef>
+          <a:effectRef idx="0">
+            <a:schemeClr val="accent1"/>
+          </a:effectRef>
+          <a:fontRef idx="minor">
+            <a:schemeClr val="tx1"/>
+          </a:fontRef>
+        </p:style>
+      </p:cxnSp>
+      <p:sp>
+        <p:nvSpPr>
+          <p:cNvPr id="100" name="楕円 99">
+            <a:extLst>
+              <a:ext uri="{FF2B5EF4-FFF2-40B4-BE49-F238E27FC236}">
+                <a16:creationId xmlns:a16="http://schemas.microsoft.com/office/drawing/2014/main" id="{F2B01D12-7CE1-E61B-F337-3A974F9FC36A}"/>
+              </a:ext>
+            </a:extLst>
+          </p:cNvPr>
+          <p:cNvSpPr/>
+          <p:nvPr/>
+        </p:nvSpPr>
+        <p:spPr>
+          <a:xfrm>
+            <a:off x="8903334" y="3029010"/>
+            <a:ext cx="114300" cy="114300"/>
+          </a:xfrm>
+          <a:prstGeom prst="ellipse">
+            <a:avLst/>
+          </a:prstGeom>
+        </p:spPr>
+        <p:style>
+          <a:lnRef idx="2">
+            <a:schemeClr val="accent1">
+              <a:shade val="15000"/>
+            </a:schemeClr>
+          </a:lnRef>
+          <a:fillRef idx="1">
+            <a:schemeClr val="accent1"/>
+          </a:fillRef>
+          <a:effectRef idx="0">
+            <a:schemeClr val="accent1"/>
+          </a:effectRef>
+          <a:fontRef idx="minor">
+            <a:schemeClr val="lt1"/>
+          </a:fontRef>
+        </p:style>
+        <p:txBody>
+          <a:bodyPr rtlCol="0" anchor="ctr"/>
+          <a:lstStyle/>
+          <a:p>
+            <a:pPr algn="ctr"/>
+            <a:endParaRPr kumimoji="1" lang="ja-JP" altLang="en-US"/>
+          </a:p>
+        </p:txBody>
+      </p:sp>
+      <p:sp>
+        <p:nvSpPr>
+          <p:cNvPr id="101" name="楕円 100">
+            <a:extLst>
+              <a:ext uri="{FF2B5EF4-FFF2-40B4-BE49-F238E27FC236}">
+                <a16:creationId xmlns:a16="http://schemas.microsoft.com/office/drawing/2014/main" id="{C22169A7-ADA7-4548-1FBD-FEF4C400EA08}"/>
+              </a:ext>
+            </a:extLst>
+          </p:cNvPr>
+          <p:cNvSpPr/>
+          <p:nvPr/>
+        </p:nvSpPr>
+        <p:spPr>
+          <a:xfrm>
+            <a:off x="8903334" y="4609540"/>
+            <a:ext cx="114300" cy="114300"/>
+          </a:xfrm>
+          <a:prstGeom prst="ellipse">
+            <a:avLst/>
+          </a:prstGeom>
+        </p:spPr>
+        <p:style>
+          <a:lnRef idx="2">
+            <a:schemeClr val="accent1">
+              <a:shade val="15000"/>
+            </a:schemeClr>
+          </a:lnRef>
+          <a:fillRef idx="1">
+            <a:schemeClr val="accent1"/>
+          </a:fillRef>
+          <a:effectRef idx="0">
+            <a:schemeClr val="accent1"/>
+          </a:effectRef>
+          <a:fontRef idx="minor">
+            <a:schemeClr val="lt1"/>
+          </a:fontRef>
+        </p:style>
+        <p:txBody>
+          <a:bodyPr rtlCol="0" anchor="ctr"/>
+          <a:lstStyle/>
+          <a:p>
+            <a:pPr algn="ctr"/>
+            <a:endParaRPr kumimoji="1" lang="ja-JP" altLang="en-US"/>
+          </a:p>
+        </p:txBody>
+      </p:sp>
+      <p:cxnSp>
+        <p:nvCxnSpPr>
+          <p:cNvPr id="6" name="直線コネクタ 5">
+            <a:extLst>
+              <a:ext uri="{FF2B5EF4-FFF2-40B4-BE49-F238E27FC236}">
+                <a16:creationId xmlns:a16="http://schemas.microsoft.com/office/drawing/2014/main" id="{E538D34B-7085-1012-46EA-50227D9E1923}"/>
+              </a:ext>
+            </a:extLst>
+          </p:cNvPr>
+          <p:cNvCxnSpPr>
+            <a:stCxn id="10" idx="1"/>
+            <a:endCxn id="10" idx="3"/>
+          </p:cNvCxnSpPr>
+          <p:nvPr/>
+        </p:nvCxnSpPr>
+        <p:spPr>
+          <a:xfrm>
+            <a:off x="8633147" y="3876424"/>
+            <a:ext cx="2235200" cy="0"/>
+          </a:xfrm>
+          <a:prstGeom prst="line">
+            <a:avLst/>
+          </a:prstGeom>
+        </p:spPr>
+        <p:style>
+          <a:lnRef idx="1">
+            <a:schemeClr val="accent1"/>
+          </a:lnRef>
+          <a:fillRef idx="0">
+            <a:schemeClr val="accent1"/>
+          </a:fillRef>
+          <a:effectRef idx="0">
+            <a:schemeClr val="accent1"/>
+          </a:effectRef>
+          <a:fontRef idx="minor">
+            <a:schemeClr val="tx1"/>
+          </a:fontRef>
+        </p:style>
+      </p:cxnSp>
+      <p:cxnSp>
+        <p:nvCxnSpPr>
+          <p:cNvPr id="8" name="直線コネクタ 7">
+            <a:extLst>
+              <a:ext uri="{FF2B5EF4-FFF2-40B4-BE49-F238E27FC236}">
+                <a16:creationId xmlns:a16="http://schemas.microsoft.com/office/drawing/2014/main" id="{09FB0EE5-5D5B-CE51-CD7C-F0B769E0088D}"/>
+              </a:ext>
+            </a:extLst>
+          </p:cNvPr>
+          <p:cNvCxnSpPr>
+            <a:cxnSpLocks/>
+            <a:stCxn id="10" idx="2"/>
+            <a:endCxn id="10" idx="0"/>
+          </p:cNvCxnSpPr>
+          <p:nvPr/>
+        </p:nvCxnSpPr>
+        <p:spPr>
+          <a:xfrm flipV="1">
+            <a:off x="9750747" y="2758824"/>
+            <a:ext cx="0" cy="2235199"/>
+          </a:xfrm>
+          <a:prstGeom prst="line">
+            <a:avLst/>
+          </a:prstGeom>
+        </p:spPr>
+        <p:style>
+          <a:lnRef idx="1">
+            <a:schemeClr val="accent1"/>
+          </a:lnRef>
+          <a:fillRef idx="0">
+            <a:schemeClr val="accent1"/>
+          </a:fillRef>
+          <a:effectRef idx="0">
+            <a:schemeClr val="accent1"/>
+          </a:effectRef>
+          <a:fontRef idx="minor">
+            <a:schemeClr val="tx1"/>
+          </a:fontRef>
+        </p:style>
+      </p:cxnSp>
+      <p:cxnSp>
+        <p:nvCxnSpPr>
+          <p:cNvPr id="13" name="直線矢印コネクタ 12">
+            <a:extLst>
+              <a:ext uri="{FF2B5EF4-FFF2-40B4-BE49-F238E27FC236}">
+                <a16:creationId xmlns:a16="http://schemas.microsoft.com/office/drawing/2014/main" id="{BE1519ED-0804-98DA-316B-A5C86888AE98}"/>
+              </a:ext>
+            </a:extLst>
+          </p:cNvPr>
+          <p:cNvCxnSpPr/>
+          <p:nvPr/>
+        </p:nvCxnSpPr>
+        <p:spPr>
+          <a:xfrm>
+            <a:off x="9745133" y="2611967"/>
+            <a:ext cx="1123214" cy="0"/>
+          </a:xfrm>
+          <a:prstGeom prst="straightConnector1">
+            <a:avLst/>
+          </a:prstGeom>
+          <a:ln>
+            <a:headEnd type="triangle"/>
+            <a:tailEnd type="triangle"/>
+          </a:ln>
+        </p:spPr>
+        <p:style>
+          <a:lnRef idx="1">
+            <a:schemeClr val="accent1"/>
+          </a:lnRef>
+          <a:fillRef idx="0">
+            <a:schemeClr val="accent1"/>
+          </a:fillRef>
+          <a:effectRef idx="0">
+            <a:schemeClr val="accent1"/>
+          </a:effectRef>
+          <a:fontRef idx="minor">
+            <a:schemeClr val="tx1"/>
+          </a:fontRef>
+        </p:style>
+      </p:cxnSp>
+      <p:cxnSp>
+        <p:nvCxnSpPr>
+          <p:cNvPr id="14" name="直線矢印コネクタ 13">
+            <a:extLst>
+              <a:ext uri="{FF2B5EF4-FFF2-40B4-BE49-F238E27FC236}">
+                <a16:creationId xmlns:a16="http://schemas.microsoft.com/office/drawing/2014/main" id="{D8F171F6-5761-1CE0-E35B-423F42F3FA8F}"/>
+              </a:ext>
+            </a:extLst>
+          </p:cNvPr>
+          <p:cNvCxnSpPr>
+            <a:cxnSpLocks/>
+          </p:cNvCxnSpPr>
+          <p:nvPr/>
+        </p:nvCxnSpPr>
+        <p:spPr>
+          <a:xfrm>
+            <a:off x="8960484" y="2611967"/>
+            <a:ext cx="784649" cy="0"/>
+          </a:xfrm>
+          <a:prstGeom prst="straightConnector1">
+            <a:avLst/>
+          </a:prstGeom>
+          <a:ln>
+            <a:headEnd type="triangle"/>
+            <a:tailEnd type="triangle"/>
+          </a:ln>
+        </p:spPr>
+        <p:style>
+          <a:lnRef idx="1">
+            <a:schemeClr val="accent1"/>
+          </a:lnRef>
+          <a:fillRef idx="0">
+            <a:schemeClr val="accent1"/>
+          </a:fillRef>
+          <a:effectRef idx="0">
+            <a:schemeClr val="accent1"/>
+          </a:effectRef>
+          <a:fontRef idx="minor">
+            <a:schemeClr val="tx1"/>
+          </a:fontRef>
+        </p:style>
+      </p:cxnSp>
+      <mc:AlternateContent xmlns:mc="http://schemas.openxmlformats.org/markup-compatibility/2006">
+        <mc:Choice xmlns:a14="http://schemas.microsoft.com/office/drawing/2010/main" Requires="a14">
+          <p:sp>
+            <p:nvSpPr>
+              <p:cNvPr id="16" name="テキスト ボックス 15">
+                <a:extLst>
+                  <a:ext uri="{FF2B5EF4-FFF2-40B4-BE49-F238E27FC236}">
+                    <a16:creationId xmlns:a16="http://schemas.microsoft.com/office/drawing/2014/main" id="{0D30449A-5388-C89B-5C2C-AA0F36F3DE66}"/>
+                  </a:ext>
+                </a:extLst>
+              </p:cNvPr>
+              <p:cNvSpPr txBox="1"/>
+              <p:nvPr/>
+            </p:nvSpPr>
+            <p:spPr>
+              <a:xfrm>
+                <a:off x="10110853" y="2239136"/>
+                <a:ext cx="391774" cy="369332"/>
+              </a:xfrm>
+              <a:prstGeom prst="rect">
+                <a:avLst/>
+              </a:prstGeom>
+              <a:noFill/>
+            </p:spPr>
+            <p:txBody>
+              <a:bodyPr wrap="none" rtlCol="0">
+                <a:spAutoFit/>
+              </a:bodyPr>
+              <a:lstStyle/>
+              <a:p>
+                <a:pPr/>
+                <a14:m>
+                  <m:oMathPara xmlns:m="http://schemas.openxmlformats.org/officeDocument/2006/math">
+                    <m:oMathParaPr>
+                      <m:jc m:val="centerGroup"/>
+                    </m:oMathParaPr>
+                    <m:oMath xmlns:m="http://schemas.openxmlformats.org/officeDocument/2006/math">
+                      <m:r>
+                        <a:rPr kumimoji="1" lang="en-US" altLang="ja-JP" b="0" i="1" smtClean="0">
+                          <a:latin typeface="Cambria Math" panose="02040503050406030204" pitchFamily="18" charset="0"/>
+                        </a:rPr>
+                        <m:t>𝑅</m:t>
+                      </m:r>
+                    </m:oMath>
+                  </m:oMathPara>
+                </a14:m>
+                <a:endParaRPr kumimoji="1" lang="ja-JP" altLang="en-US"/>
+              </a:p>
+            </p:txBody>
+          </p:sp>
+        </mc:Choice>
+        <mc:Fallback>
+          <p:sp>
+            <p:nvSpPr>
+              <p:cNvPr id="16" name="テキスト ボックス 15">
+                <a:extLst>
+                  <a:ext uri="{FF2B5EF4-FFF2-40B4-BE49-F238E27FC236}">
+                    <a16:creationId xmlns:a16="http://schemas.microsoft.com/office/drawing/2014/main" id="{0D30449A-5388-C89B-5C2C-AA0F36F3DE66}"/>
+                  </a:ext>
+                </a:extLst>
+              </p:cNvPr>
+              <p:cNvSpPr txBox="1">
+                <a:spLocks noRot="1" noChangeAspect="1" noMove="1" noResize="1" noEditPoints="1" noAdjustHandles="1" noChangeArrowheads="1" noChangeShapeType="1" noTextEdit="1"/>
+              </p:cNvSpPr>
+              <p:nvPr/>
+            </p:nvSpPr>
+            <p:spPr>
+              <a:xfrm>
+                <a:off x="10110853" y="2239136"/>
+                <a:ext cx="391774" cy="369332"/>
+              </a:xfrm>
+              <a:prstGeom prst="rect">
+                <a:avLst/>
+              </a:prstGeom>
+              <a:blipFill>
+                <a:blip r:embed="rId3"/>
+                <a:stretch>
+                  <a:fillRect/>
+                </a:stretch>
+              </a:blipFill>
+            </p:spPr>
+            <p:txBody>
+              <a:bodyPr/>
+              <a:lstStyle/>
+              <a:p>
+                <a:r>
+                  <a:rPr lang="ja-JP" altLang="en-US">
+                    <a:noFill/>
+                  </a:rPr>
+                  <a:t> </a:t>
+                </a:r>
+              </a:p>
+            </p:txBody>
+          </p:sp>
+        </mc:Fallback>
+      </mc:AlternateContent>
+      <mc:AlternateContent xmlns:mc="http://schemas.openxmlformats.org/markup-compatibility/2006">
+        <mc:Choice xmlns:a14="http://schemas.microsoft.com/office/drawing/2010/main" Requires="a14">
+          <p:sp>
+            <p:nvSpPr>
+              <p:cNvPr id="17" name="テキスト ボックス 16">
+                <a:extLst>
+                  <a:ext uri="{FF2B5EF4-FFF2-40B4-BE49-F238E27FC236}">
+                    <a16:creationId xmlns:a16="http://schemas.microsoft.com/office/drawing/2014/main" id="{4F25E753-C88A-AB40-1496-5BA43EF9910C}"/>
+                  </a:ext>
+                </a:extLst>
+              </p:cNvPr>
+              <p:cNvSpPr txBox="1"/>
+              <p:nvPr/>
+            </p:nvSpPr>
+            <p:spPr>
+              <a:xfrm>
+                <a:off x="9176990" y="2180739"/>
+                <a:ext cx="351635" cy="369332"/>
+              </a:xfrm>
+              <a:prstGeom prst="rect">
+                <a:avLst/>
+              </a:prstGeom>
+              <a:noFill/>
+            </p:spPr>
+            <p:txBody>
+              <a:bodyPr wrap="none" rtlCol="0">
+                <a:spAutoFit/>
+              </a:bodyPr>
+              <a:lstStyle/>
+              <a:p>
+                <a:pPr/>
+                <a14:m>
+                  <m:oMathPara xmlns:m="http://schemas.openxmlformats.org/officeDocument/2006/math">
+                    <m:oMathParaPr>
+                      <m:jc m:val="centerGroup"/>
+                    </m:oMathParaPr>
+                    <m:oMath xmlns:m="http://schemas.openxmlformats.org/officeDocument/2006/math">
+                      <m:r>
+                        <a:rPr kumimoji="1" lang="en-US" altLang="ja-JP" b="0" i="1" smtClean="0">
+                          <a:latin typeface="Cambria Math" panose="02040503050406030204" pitchFamily="18" charset="0"/>
+                        </a:rPr>
+                        <m:t>𝑟</m:t>
+                      </m:r>
+                    </m:oMath>
+                  </m:oMathPara>
+                </a14:m>
+                <a:endParaRPr kumimoji="1" lang="ja-JP" altLang="en-US"/>
+              </a:p>
+            </p:txBody>
+          </p:sp>
+        </mc:Choice>
+        <mc:Fallback>
+          <p:sp>
+            <p:nvSpPr>
+              <p:cNvPr id="17" name="テキスト ボックス 16">
+                <a:extLst>
+                  <a:ext uri="{FF2B5EF4-FFF2-40B4-BE49-F238E27FC236}">
+                    <a16:creationId xmlns:a16="http://schemas.microsoft.com/office/drawing/2014/main" id="{4F25E753-C88A-AB40-1496-5BA43EF9910C}"/>
+                  </a:ext>
+                </a:extLst>
+              </p:cNvPr>
+              <p:cNvSpPr txBox="1">
+                <a:spLocks noRot="1" noChangeAspect="1" noMove="1" noResize="1" noEditPoints="1" noAdjustHandles="1" noChangeArrowheads="1" noChangeShapeType="1" noTextEdit="1"/>
+              </p:cNvSpPr>
+              <p:nvPr/>
+            </p:nvSpPr>
+            <p:spPr>
+              <a:xfrm>
+                <a:off x="9176990" y="2180739"/>
+                <a:ext cx="351635" cy="369332"/>
+              </a:xfrm>
+              <a:prstGeom prst="rect">
+                <a:avLst/>
+              </a:prstGeom>
+              <a:blipFill>
+                <a:blip r:embed="rId4"/>
+                <a:stretch>
+                  <a:fillRect/>
+                </a:stretch>
+              </a:blipFill>
+            </p:spPr>
+            <p:txBody>
+              <a:bodyPr/>
+              <a:lstStyle/>
+              <a:p>
+                <a:r>
+                  <a:rPr lang="ja-JP" altLang="en-US">
+                    <a:noFill/>
+                  </a:rPr>
+                  <a:t> </a:t>
+                </a:r>
+              </a:p>
+            </p:txBody>
+          </p:sp>
+        </mc:Fallback>
+      </mc:AlternateContent>
+    </p:spTree>
+    <p:extLst>
+      <p:ext uri="{BB962C8B-B14F-4D97-AF65-F5344CB8AC3E}">
+        <p14:creationId xmlns:p14="http://schemas.microsoft.com/office/powerpoint/2010/main" val="1019332950"/>
+      </p:ext>
+    </p:extLst>
+  </p:cSld>
+  <p:clrMapOvr>
+    <a:masterClrMapping/>
+  </p:clrMapOvr>
+</p:sld>
+</file>
+
+<file path=ppt/slides/slide26.xml><?xml version="1.0" encoding="utf-8"?>
+<p:sld xmlns:a="http://schemas.openxmlformats.org/drawingml/2006/main" xmlns:r="http://schemas.openxmlformats.org/officeDocument/2006/relationships" xmlns:p="http://schemas.openxmlformats.org/presentationml/2006/main">
+  <p:cSld>
+    <p:spTree>
+      <p:nvGrpSpPr>
+        <p:cNvPr id="1" name="">
+          <a:extLst>
+            <a:ext uri="{FF2B5EF4-FFF2-40B4-BE49-F238E27FC236}">
+              <a16:creationId xmlns:a16="http://schemas.microsoft.com/office/drawing/2014/main" id="{5AB7B642-15A9-3E5B-9BC1-A15C9719238D}"/>
+            </a:ext>
+          </a:extLst>
+        </p:cNvPr>
+        <p:cNvGrpSpPr/>
+        <p:nvPr/>
+      </p:nvGrpSpPr>
+      <p:grpSpPr>
+        <a:xfrm>
+          <a:off x="0" y="0"/>
+          <a:ext cx="0" cy="0"/>
+          <a:chOff x="0" y="0"/>
+          <a:chExt cx="0" cy="0"/>
+        </a:xfrm>
+      </p:grpSpPr>
+      <p:sp>
+        <p:nvSpPr>
+          <p:cNvPr id="2" name="タイトル 1">
+            <a:extLst>
+              <a:ext uri="{FF2B5EF4-FFF2-40B4-BE49-F238E27FC236}">
+                <a16:creationId xmlns:a16="http://schemas.microsoft.com/office/drawing/2014/main" id="{0179C64D-00F5-03B2-5820-9CA2E2ED173A}"/>
+              </a:ext>
+            </a:extLst>
+          </p:cNvPr>
+          <p:cNvSpPr>
+            <a:spLocks noGrp="1"/>
+          </p:cNvSpPr>
+          <p:nvPr>
+            <p:ph type="title"/>
+          </p:nvPr>
+        </p:nvSpPr>
+        <p:spPr/>
+        <p:txBody>
+          <a:bodyPr/>
+          <a:lstStyle/>
+          <a:p>
+            <a:r>
+              <a:rPr kumimoji="1" lang="en-US" altLang="ja-JP"/>
+              <a:t>bssrdf</a:t>
+            </a:r>
+            <a:endParaRPr kumimoji="1" lang="ja-JP" altLang="en-US"/>
+          </a:p>
+        </p:txBody>
+      </p:sp>
+      <mc:AlternateContent xmlns:mc="http://schemas.openxmlformats.org/markup-compatibility/2006">
+        <mc:Choice xmlns:a14="http://schemas.microsoft.com/office/drawing/2010/main" Requires="a14">
+          <p:sp>
+            <p:nvSpPr>
+              <p:cNvPr id="3" name="コンテンツ プレースホルダー 2">
+                <a:extLst>
+                  <a:ext uri="{FF2B5EF4-FFF2-40B4-BE49-F238E27FC236}">
+                    <a16:creationId xmlns:a16="http://schemas.microsoft.com/office/drawing/2014/main" id="{D9CE64A0-7341-37B7-C12D-89FE144DDF98}"/>
+                  </a:ext>
+                </a:extLst>
+              </p:cNvPr>
+              <p:cNvSpPr>
+                <a:spLocks noGrp="1"/>
+              </p:cNvSpPr>
+              <p:nvPr>
+                <p:ph idx="1"/>
+              </p:nvPr>
+            </p:nvSpPr>
+            <p:spPr>
+              <a:xfrm>
+                <a:off x="838200" y="1825625"/>
+                <a:ext cx="6914196" cy="4351338"/>
+              </a:xfrm>
+            </p:spPr>
+            <p:txBody>
+              <a:bodyPr>
+                <a:normAutofit fontScale="70000" lnSpcReduction="20000"/>
+              </a:bodyPr>
+              <a:lstStyle/>
+              <a:p>
+                <a:pPr/>
+                <a:endParaRPr kumimoji="1" lang="en-US" altLang="ja-JP" b="0"/>
+              </a:p>
+              <a:p>
+                <a:pPr marL="0" indent="0">
+                  <a:buNone/>
+                </a:pPr>
+                <a14:m>
+                  <m:oMathPara xmlns:m="http://schemas.openxmlformats.org/officeDocument/2006/math">
+                    <m:oMathParaPr>
+                      <m:jc m:val="centerGroup"/>
+                    </m:oMathParaPr>
+                    <m:oMath xmlns:m="http://schemas.openxmlformats.org/officeDocument/2006/math">
+                      <m:r>
+                        <a:rPr lang="en-US" altLang="ja-JP" b="0" i="1" smtClean="0">
+                          <a:latin typeface="Cambria Math" panose="02040503050406030204" pitchFamily="18" charset="0"/>
+                        </a:rPr>
+                        <m:t>𝑝</m:t>
+                      </m:r>
+                      <m:d>
+                        <m:dPr>
+                          <m:ctrlPr>
+                            <a:rPr lang="en-US" altLang="ja-JP" b="0" i="1" smtClean="0">
+                              <a:latin typeface="Cambria Math" panose="02040503050406030204" pitchFamily="18" charset="0"/>
+                            </a:rPr>
+                          </m:ctrlPr>
+                        </m:dPr>
+                        <m:e>
+                          <m:r>
+                            <a:rPr lang="en-US" altLang="ja-JP" b="0" i="1" smtClean="0">
+                              <a:latin typeface="Cambria Math" panose="02040503050406030204" pitchFamily="18" charset="0"/>
+                            </a:rPr>
+                            <m:t>𝑥</m:t>
+                          </m:r>
+                        </m:e>
+                      </m:d>
+                      <m:r>
+                        <a:rPr lang="en-US" altLang="ja-JP" b="0" i="1" smtClean="0">
+                          <a:latin typeface="Cambria Math" panose="02040503050406030204" pitchFamily="18" charset="0"/>
+                        </a:rPr>
+                        <m:t>𝑑𝐴</m:t>
+                      </m:r>
+                      <m:d>
+                        <m:dPr>
+                          <m:ctrlPr>
+                            <a:rPr lang="en-US" altLang="ja-JP" b="0" i="1" smtClean="0">
+                              <a:latin typeface="Cambria Math" panose="02040503050406030204" pitchFamily="18" charset="0"/>
+                            </a:rPr>
+                          </m:ctrlPr>
+                        </m:dPr>
+                        <m:e>
+                          <m:r>
+                            <a:rPr lang="en-US" altLang="ja-JP" b="0" i="1" smtClean="0">
+                              <a:latin typeface="Cambria Math" panose="02040503050406030204" pitchFamily="18" charset="0"/>
+                            </a:rPr>
+                            <m:t>𝑥</m:t>
+                          </m:r>
+                        </m:e>
+                      </m:d>
+                      <m:r>
+                        <a:rPr lang="en-US" altLang="ja-JP" b="0" i="1" smtClean="0">
+                          <a:latin typeface="Cambria Math" panose="02040503050406030204" pitchFamily="18" charset="0"/>
+                        </a:rPr>
+                        <m:t>=</m:t>
+                      </m:r>
+                      <m:r>
+                        <a:rPr lang="en-US" altLang="ja-JP" b="0" i="1" smtClean="0">
+                          <a:latin typeface="Cambria Math" panose="02040503050406030204" pitchFamily="18" charset="0"/>
+                        </a:rPr>
+                        <m:t>𝑝</m:t>
+                      </m:r>
+                      <m:d>
+                        <m:dPr>
+                          <m:ctrlPr>
+                            <a:rPr lang="en-US" altLang="ja-JP" b="0" i="1" smtClean="0">
+                              <a:latin typeface="Cambria Math" panose="02040503050406030204" pitchFamily="18" charset="0"/>
+                            </a:rPr>
+                          </m:ctrlPr>
+                        </m:dPr>
+                        <m:e>
+                          <m:sSup>
+                            <m:sSupPr>
+                              <m:ctrlPr>
+                                <a:rPr lang="en-US" altLang="ja-JP" b="0" i="1" smtClean="0">
+                                  <a:latin typeface="Cambria Math" panose="02040503050406030204" pitchFamily="18" charset="0"/>
+                                </a:rPr>
+                              </m:ctrlPr>
+                            </m:sSupPr>
+                            <m:e>
+                              <m:r>
+                                <a:rPr lang="en-US" altLang="ja-JP" b="0" i="1" smtClean="0">
+                                  <a:latin typeface="Cambria Math" panose="02040503050406030204" pitchFamily="18" charset="0"/>
+                                </a:rPr>
+                                <m:t>𝑥</m:t>
+                              </m:r>
+                            </m:e>
+                            <m:sup>
+                              <m:r>
+                                <a:rPr lang="en-US" altLang="ja-JP" b="0" i="1" smtClean="0">
+                                  <a:latin typeface="Cambria Math" panose="02040503050406030204" pitchFamily="18" charset="0"/>
+                                </a:rPr>
+                                <m:t>′</m:t>
+                              </m:r>
+                            </m:sup>
+                          </m:sSup>
+                        </m:e>
+                      </m:d>
+                      <m:r>
+                        <a:rPr lang="en-US" altLang="ja-JP" b="0" i="1" smtClean="0">
+                          <a:latin typeface="Cambria Math" panose="02040503050406030204" pitchFamily="18" charset="0"/>
+                        </a:rPr>
+                        <m:t>𝑑𝐴</m:t>
+                      </m:r>
+                      <m:d>
+                        <m:dPr>
+                          <m:ctrlPr>
+                            <a:rPr lang="en-US" altLang="ja-JP" b="0" i="1" smtClean="0">
+                              <a:latin typeface="Cambria Math" panose="02040503050406030204" pitchFamily="18" charset="0"/>
+                            </a:rPr>
+                          </m:ctrlPr>
+                        </m:dPr>
+                        <m:e>
+                          <m:sSup>
+                            <m:sSupPr>
+                              <m:ctrlPr>
+                                <a:rPr lang="en-US" altLang="ja-JP" b="0" i="1" smtClean="0">
+                                  <a:latin typeface="Cambria Math" panose="02040503050406030204" pitchFamily="18" charset="0"/>
+                                </a:rPr>
+                              </m:ctrlPr>
+                            </m:sSupPr>
+                            <m:e>
+                              <m:r>
+                                <a:rPr lang="en-US" altLang="ja-JP" b="0" i="1" smtClean="0">
+                                  <a:latin typeface="Cambria Math" panose="02040503050406030204" pitchFamily="18" charset="0"/>
+                                </a:rPr>
+                                <m:t>𝑥</m:t>
+                              </m:r>
+                            </m:e>
+                            <m:sup>
+                              <m:r>
+                                <a:rPr lang="en-US" altLang="ja-JP" b="0" i="1" smtClean="0">
+                                  <a:latin typeface="Cambria Math" panose="02040503050406030204" pitchFamily="18" charset="0"/>
+                                </a:rPr>
+                                <m:t>′</m:t>
+                              </m:r>
+                            </m:sup>
+                          </m:sSup>
+                        </m:e>
+                      </m:d>
+                    </m:oMath>
+                    <m:oMath xmlns:m="http://schemas.openxmlformats.org/officeDocument/2006/math">
+                      <m:r>
+                        <a:rPr lang="en-US" altLang="ja-JP" b="0" i="1" smtClean="0">
+                          <a:latin typeface="Cambria Math" panose="02040503050406030204" pitchFamily="18" charset="0"/>
+                        </a:rPr>
+                        <m:t> </m:t>
+                      </m:r>
+                    </m:oMath>
+                    <m:oMath xmlns:m="http://schemas.openxmlformats.org/officeDocument/2006/math">
+                      <m:r>
+                        <a:rPr lang="en-US" altLang="ja-JP" b="0" i="1" smtClean="0">
+                          <a:latin typeface="Cambria Math" panose="02040503050406030204" pitchFamily="18" charset="0"/>
+                        </a:rPr>
+                        <m:t>𝑝</m:t>
+                      </m:r>
+                      <m:d>
+                        <m:dPr>
+                          <m:ctrlPr>
+                            <a:rPr lang="en-US" altLang="ja-JP" b="0" i="1" smtClean="0">
+                              <a:latin typeface="Cambria Math" panose="02040503050406030204" pitchFamily="18" charset="0"/>
+                            </a:rPr>
+                          </m:ctrlPr>
+                        </m:dPr>
+                        <m:e>
+                          <m:r>
+                            <a:rPr lang="en-US" altLang="ja-JP" b="0" i="1" smtClean="0">
+                              <a:latin typeface="Cambria Math" panose="02040503050406030204" pitchFamily="18" charset="0"/>
+                            </a:rPr>
+                            <m:t>𝑥</m:t>
+                          </m:r>
+                        </m:e>
+                      </m:d>
+                      <m:r>
+                        <a:rPr lang="en-US" altLang="ja-JP" b="0" i="1" smtClean="0">
+                          <a:latin typeface="Cambria Math" panose="02040503050406030204" pitchFamily="18" charset="0"/>
+                        </a:rPr>
+                        <m:t>=</m:t>
+                      </m:r>
+                      <m:r>
+                        <a:rPr lang="en-US" altLang="ja-JP" b="0" i="1" smtClean="0">
+                          <a:latin typeface="Cambria Math" panose="02040503050406030204" pitchFamily="18" charset="0"/>
+                        </a:rPr>
+                        <m:t>𝑝</m:t>
+                      </m:r>
+                      <m:d>
+                        <m:dPr>
+                          <m:ctrlPr>
+                            <a:rPr lang="en-US" altLang="ja-JP" b="0" i="1" smtClean="0">
+                              <a:latin typeface="Cambria Math" panose="02040503050406030204" pitchFamily="18" charset="0"/>
+                            </a:rPr>
+                          </m:ctrlPr>
+                        </m:dPr>
+                        <m:e>
+                          <m:r>
+                            <a:rPr lang="en-US" altLang="ja-JP" b="0" i="1" smtClean="0">
+                              <a:latin typeface="Cambria Math" panose="02040503050406030204" pitchFamily="18" charset="0"/>
+                            </a:rPr>
+                            <m:t>𝑥</m:t>
+                          </m:r>
+                        </m:e>
+                      </m:d>
+                      <m:f>
+                        <m:fPr>
+                          <m:ctrlPr>
+                            <a:rPr lang="en-US" altLang="ja-JP" b="0" i="1" smtClean="0">
+                              <a:latin typeface="Cambria Math" panose="02040503050406030204" pitchFamily="18" charset="0"/>
+                            </a:rPr>
+                          </m:ctrlPr>
+                        </m:fPr>
+                        <m:num>
+                          <m:r>
+                            <a:rPr lang="en-US" altLang="ja-JP" b="0" i="1" smtClean="0">
+                              <a:latin typeface="Cambria Math" panose="02040503050406030204" pitchFamily="18" charset="0"/>
+                            </a:rPr>
+                            <m:t>𝑑𝐴</m:t>
+                          </m:r>
+                          <m:d>
+                            <m:dPr>
+                              <m:ctrlPr>
+                                <a:rPr lang="en-US" altLang="ja-JP" b="0" i="1" smtClean="0">
+                                  <a:latin typeface="Cambria Math" panose="02040503050406030204" pitchFamily="18" charset="0"/>
+                                </a:rPr>
+                              </m:ctrlPr>
+                            </m:dPr>
+                            <m:e>
+                              <m:sSup>
+                                <m:sSupPr>
+                                  <m:ctrlPr>
+                                    <a:rPr lang="en-US" altLang="ja-JP" b="0" i="1" smtClean="0">
+                                      <a:latin typeface="Cambria Math" panose="02040503050406030204" pitchFamily="18" charset="0"/>
+                                    </a:rPr>
+                                  </m:ctrlPr>
+                                </m:sSupPr>
+                                <m:e>
+                                  <m:r>
+                                    <a:rPr lang="en-US" altLang="ja-JP" b="0" i="1" smtClean="0">
+                                      <a:latin typeface="Cambria Math" panose="02040503050406030204" pitchFamily="18" charset="0"/>
+                                    </a:rPr>
+                                    <m:t>𝑥</m:t>
+                                  </m:r>
+                                </m:e>
+                                <m:sup>
+                                  <m:r>
+                                    <a:rPr lang="en-US" altLang="ja-JP" b="0" i="1" smtClean="0">
+                                      <a:latin typeface="Cambria Math" panose="02040503050406030204" pitchFamily="18" charset="0"/>
+                                    </a:rPr>
+                                    <m:t>′</m:t>
+                                  </m:r>
+                                </m:sup>
+                              </m:sSup>
+                            </m:e>
+                          </m:d>
+                        </m:num>
+                        <m:den>
+                          <m:r>
+                            <a:rPr lang="en-US" altLang="ja-JP" b="0" i="1" smtClean="0">
+                              <a:latin typeface="Cambria Math" panose="02040503050406030204" pitchFamily="18" charset="0"/>
+                            </a:rPr>
+                            <m:t>𝑑𝐴</m:t>
+                          </m:r>
+                          <m:d>
+                            <m:dPr>
+                              <m:ctrlPr>
+                                <a:rPr lang="en-US" altLang="ja-JP" b="0" i="1" smtClean="0">
+                                  <a:latin typeface="Cambria Math" panose="02040503050406030204" pitchFamily="18" charset="0"/>
+                                </a:rPr>
+                              </m:ctrlPr>
+                            </m:dPr>
+                            <m:e>
+                              <m:r>
+                                <a:rPr lang="en-US" altLang="ja-JP" b="0" i="1" smtClean="0">
+                                  <a:latin typeface="Cambria Math" panose="02040503050406030204" pitchFamily="18" charset="0"/>
+                                </a:rPr>
+                                <m:t>𝑥</m:t>
+                              </m:r>
+                            </m:e>
+                          </m:d>
+                        </m:den>
+                      </m:f>
+                      <m:r>
+                        <a:rPr lang="en-US" altLang="ja-JP" b="0" i="1" smtClean="0">
+                          <a:latin typeface="Cambria Math" panose="02040503050406030204" pitchFamily="18" charset="0"/>
+                        </a:rPr>
+                        <m:t>,  </m:t>
+                      </m:r>
+                      <m:r>
+                        <a:rPr lang="en-US" altLang="ja-JP" b="0" i="1" smtClean="0">
+                          <a:latin typeface="Cambria Math" panose="02040503050406030204" pitchFamily="18" charset="0"/>
+                        </a:rPr>
+                        <m:t>𝑑𝐴</m:t>
+                      </m:r>
+                      <m:d>
+                        <m:dPr>
+                          <m:ctrlPr>
+                            <a:rPr lang="en-US" altLang="ja-JP" b="0" i="1" smtClean="0">
+                              <a:latin typeface="Cambria Math" panose="02040503050406030204" pitchFamily="18" charset="0"/>
+                            </a:rPr>
+                          </m:ctrlPr>
+                        </m:dPr>
+                        <m:e>
+                          <m:sSup>
+                            <m:sSupPr>
+                              <m:ctrlPr>
+                                <a:rPr lang="en-US" altLang="ja-JP" b="0" i="1" smtClean="0">
+                                  <a:latin typeface="Cambria Math" panose="02040503050406030204" pitchFamily="18" charset="0"/>
+                                </a:rPr>
+                              </m:ctrlPr>
+                            </m:sSupPr>
+                            <m:e>
+                              <m:r>
+                                <a:rPr lang="en-US" altLang="ja-JP" b="0" i="1" smtClean="0">
+                                  <a:latin typeface="Cambria Math" panose="02040503050406030204" pitchFamily="18" charset="0"/>
+                                </a:rPr>
+                                <m:t>𝑥</m:t>
+                              </m:r>
+                            </m:e>
+                            <m:sup>
+                              <m:r>
+                                <a:rPr lang="en-US" altLang="ja-JP" b="0" i="1" smtClean="0">
+                                  <a:latin typeface="Cambria Math" panose="02040503050406030204" pitchFamily="18" charset="0"/>
+                                </a:rPr>
+                                <m:t>′</m:t>
+                              </m:r>
+                            </m:sup>
+                          </m:sSup>
+                        </m:e>
+                      </m:d>
+                      <m:r>
+                        <a:rPr lang="en-US" altLang="ja-JP" b="0" i="1" smtClean="0">
+                          <a:latin typeface="Cambria Math" panose="02040503050406030204" pitchFamily="18" charset="0"/>
+                        </a:rPr>
+                        <m:t>=</m:t>
+                      </m:r>
+                      <m:r>
+                        <a:rPr lang="en-US" altLang="ja-JP" b="0" i="1" smtClean="0">
+                          <a:latin typeface="Cambria Math" panose="02040503050406030204" pitchFamily="18" charset="0"/>
+                        </a:rPr>
+                        <m:t>𝑑𝐴</m:t>
+                      </m:r>
+                      <m:d>
+                        <m:dPr>
+                          <m:ctrlPr>
+                            <a:rPr lang="en-US" altLang="ja-JP" b="0" i="1" smtClean="0">
+                              <a:latin typeface="Cambria Math" panose="02040503050406030204" pitchFamily="18" charset="0"/>
+                            </a:rPr>
+                          </m:ctrlPr>
+                        </m:dPr>
+                        <m:e>
+                          <m:r>
+                            <a:rPr lang="en-US" altLang="ja-JP" b="0" i="1" smtClean="0">
+                              <a:latin typeface="Cambria Math" panose="02040503050406030204" pitchFamily="18" charset="0"/>
+                            </a:rPr>
+                            <m:t>𝑥</m:t>
+                          </m:r>
+                        </m:e>
+                      </m:d>
+                      <m:func>
+                        <m:funcPr>
+                          <m:ctrlPr>
+                            <a:rPr lang="en-US" altLang="ja-JP" b="0" i="1" smtClean="0">
+                              <a:latin typeface="Cambria Math" panose="02040503050406030204" pitchFamily="18" charset="0"/>
+                            </a:rPr>
+                          </m:ctrlPr>
+                        </m:funcPr>
+                        <m:fName>
+                          <m:r>
+                            <m:rPr>
+                              <m:sty m:val="p"/>
+                            </m:rPr>
+                            <a:rPr lang="en-US" altLang="ja-JP" b="0" i="0" smtClean="0">
+                              <a:latin typeface="Cambria Math" panose="02040503050406030204" pitchFamily="18" charset="0"/>
+                            </a:rPr>
+                            <m:t>cos</m:t>
+                          </m:r>
+                        </m:fName>
+                        <m:e>
+                          <m:r>
+                            <a:rPr lang="en-US" altLang="ja-JP" b="0" i="1" smtClean="0">
+                              <a:latin typeface="Cambria Math" panose="02040503050406030204" pitchFamily="18" charset="0"/>
+                            </a:rPr>
+                            <m:t>𝜃</m:t>
+                          </m:r>
+                        </m:e>
+                      </m:func>
+                    </m:oMath>
+                    <m:oMath xmlns:m="http://schemas.openxmlformats.org/officeDocument/2006/math">
+                      <m:r>
+                        <a:rPr lang="en-US" altLang="ja-JP" b="0" i="1" smtClean="0">
+                          <a:latin typeface="Cambria Math" panose="02040503050406030204" pitchFamily="18" charset="0"/>
+                        </a:rPr>
+                        <m:t> </m:t>
+                      </m:r>
+                    </m:oMath>
+                    <m:oMath xmlns:m="http://schemas.openxmlformats.org/officeDocument/2006/math">
+                      <m:r>
+                        <a:rPr lang="en-US" altLang="ja-JP" i="1">
+                          <a:latin typeface="Cambria Math" panose="02040503050406030204" pitchFamily="18" charset="0"/>
+                        </a:rPr>
+                        <m:t>𝑝</m:t>
+                      </m:r>
+                      <m:d>
+                        <m:dPr>
+                          <m:ctrlPr>
+                            <a:rPr lang="en-US" altLang="ja-JP" i="1">
+                              <a:latin typeface="Cambria Math" panose="02040503050406030204" pitchFamily="18" charset="0"/>
+                            </a:rPr>
+                          </m:ctrlPr>
+                        </m:dPr>
+                        <m:e>
+                          <m:r>
+                            <a:rPr lang="en-US" altLang="ja-JP" b="0" i="1" smtClean="0">
+                              <a:latin typeface="Cambria Math" panose="02040503050406030204" pitchFamily="18" charset="0"/>
+                            </a:rPr>
+                            <m:t>𝑥</m:t>
+                          </m:r>
+                        </m:e>
+                      </m:d>
+                      <m:r>
+                        <a:rPr lang="en-US" altLang="ja-JP" i="1">
+                          <a:latin typeface="Cambria Math" panose="02040503050406030204" pitchFamily="18" charset="0"/>
+                        </a:rPr>
+                        <m:t>=</m:t>
+                      </m:r>
+                      <m:r>
+                        <a:rPr lang="en-US" altLang="ja-JP" i="1">
+                          <a:latin typeface="Cambria Math" panose="02040503050406030204" pitchFamily="18" charset="0"/>
+                        </a:rPr>
+                        <m:t>𝑝</m:t>
+                      </m:r>
+                      <m:d>
+                        <m:dPr>
+                          <m:ctrlPr>
+                            <a:rPr lang="en-US" altLang="ja-JP" i="1">
+                              <a:latin typeface="Cambria Math" panose="02040503050406030204" pitchFamily="18" charset="0"/>
+                            </a:rPr>
+                          </m:ctrlPr>
+                        </m:dPr>
+                        <m:e>
+                          <m:sSup>
+                            <m:sSupPr>
+                              <m:ctrlPr>
+                                <a:rPr lang="en-US" altLang="ja-JP" b="0" i="1" smtClean="0">
+                                  <a:latin typeface="Cambria Math" panose="02040503050406030204" pitchFamily="18" charset="0"/>
+                                </a:rPr>
+                              </m:ctrlPr>
+                            </m:sSupPr>
+                            <m:e>
+                              <m:r>
+                                <a:rPr lang="en-US" altLang="ja-JP" b="0" i="1" smtClean="0">
+                                  <a:latin typeface="Cambria Math" panose="02040503050406030204" pitchFamily="18" charset="0"/>
+                                </a:rPr>
+                                <m:t>𝑥</m:t>
+                              </m:r>
+                            </m:e>
+                            <m:sup>
+                              <m:r>
+                                <a:rPr lang="en-US" altLang="ja-JP" b="0" i="1" smtClean="0">
+                                  <a:latin typeface="Cambria Math" panose="02040503050406030204" pitchFamily="18" charset="0"/>
+                                </a:rPr>
+                                <m:t>′</m:t>
+                              </m:r>
+                            </m:sup>
+                          </m:sSup>
+                        </m:e>
+                      </m:d>
+                      <m:func>
+                        <m:funcPr>
+                          <m:ctrlPr>
+                            <a:rPr lang="en-US" altLang="ja-JP" b="0" i="1" smtClean="0">
+                              <a:latin typeface="Cambria Math" panose="02040503050406030204" pitchFamily="18" charset="0"/>
+                            </a:rPr>
+                          </m:ctrlPr>
+                        </m:funcPr>
+                        <m:fName>
+                          <m:r>
+                            <m:rPr>
+                              <m:sty m:val="p"/>
+                            </m:rPr>
+                            <a:rPr lang="en-US" altLang="ja-JP" b="0" i="0" smtClean="0">
+                              <a:latin typeface="Cambria Math" panose="02040503050406030204" pitchFamily="18" charset="0"/>
+                            </a:rPr>
+                            <m:t>cos</m:t>
+                          </m:r>
+                        </m:fName>
+                        <m:e>
+                          <m:r>
+                            <a:rPr lang="en-US" altLang="ja-JP" b="0" i="1" smtClean="0">
+                              <a:latin typeface="Cambria Math" panose="02040503050406030204" pitchFamily="18" charset="0"/>
+                            </a:rPr>
+                            <m:t>𝜃</m:t>
+                          </m:r>
+                        </m:e>
+                      </m:func>
+                    </m:oMath>
+                  </m:oMathPara>
+                </a14:m>
+                <a:endParaRPr lang="en-US" altLang="ja-JP"/>
+              </a:p>
+              <a:p>
+                <a:pPr lvl="8"/>
+                <a:endParaRPr kumimoji="1" lang="en-US" altLang="ja-JP"/>
+              </a:p>
+              <a:p>
+                <a:r>
+                  <a:rPr kumimoji="1" lang="ja-JP" altLang="en-US"/>
+                  <a:t>複数ヒット時は一様サンプリング</a:t>
+                </a:r>
+                <a:endParaRPr kumimoji="1" lang="en-US" altLang="ja-JP"/>
+              </a:p>
+              <a:p>
+                <a:r>
+                  <a:rPr lang="en-US" altLang="ja-JP"/>
+                  <a:t>RGB&amp;3</a:t>
+                </a:r>
+                <a:r>
+                  <a:rPr lang="ja-JP" altLang="en-US"/>
+                  <a:t>軸で</a:t>
+                </a:r>
+                <a:r>
+                  <a:rPr lang="en-US" altLang="ja-JP"/>
+                  <a:t>MIS</a:t>
+                </a:r>
+              </a:p>
+              <a:p>
+                <a:pPr marL="0" indent="0">
+                  <a:buNone/>
+                </a:pPr>
+                <a14:m>
+                  <m:oMathPara xmlns:m="http://schemas.openxmlformats.org/officeDocument/2006/math">
+                    <m:oMathParaPr>
+                      <m:jc m:val="centerGroup"/>
+                    </m:oMathParaPr>
+                    <m:oMath xmlns:m="http://schemas.openxmlformats.org/officeDocument/2006/math">
+                      <m:r>
+                        <a:rPr kumimoji="1" lang="en-US" altLang="ja-JP" b="0" i="1" smtClean="0">
+                          <a:latin typeface="Cambria Math" panose="02040503050406030204" pitchFamily="18" charset="0"/>
+                        </a:rPr>
+                        <m:t>𝑝</m:t>
+                      </m:r>
+                      <m:d>
+                        <m:dPr>
+                          <m:ctrlPr>
+                            <a:rPr kumimoji="1" lang="en-US" altLang="ja-JP" b="0" i="1" smtClean="0">
+                              <a:latin typeface="Cambria Math" panose="02040503050406030204" pitchFamily="18" charset="0"/>
+                            </a:rPr>
+                          </m:ctrlPr>
+                        </m:dPr>
+                        <m:e>
+                          <m:r>
+                            <a:rPr kumimoji="1" lang="en-US" altLang="ja-JP" b="0" i="1" smtClean="0">
+                              <a:latin typeface="Cambria Math" panose="02040503050406030204" pitchFamily="18" charset="0"/>
+                            </a:rPr>
+                            <m:t>𝑥</m:t>
+                          </m:r>
+                        </m:e>
+                      </m:d>
+                      <m:r>
+                        <a:rPr kumimoji="1" lang="en-US" altLang="ja-JP" b="0" i="1" smtClean="0">
+                          <a:latin typeface="Cambria Math" panose="02040503050406030204" pitchFamily="18" charset="0"/>
+                        </a:rPr>
+                        <m:t>=</m:t>
+                      </m:r>
+                      <m:nary>
+                        <m:naryPr>
+                          <m:chr m:val="∑"/>
+                          <m:ctrlPr>
+                            <a:rPr kumimoji="1" lang="en-US" altLang="ja-JP" b="0" i="1" smtClean="0">
+                              <a:latin typeface="Cambria Math" panose="02040503050406030204" pitchFamily="18" charset="0"/>
+                            </a:rPr>
+                          </m:ctrlPr>
+                        </m:naryPr>
+                        <m:sub>
+                          <m:r>
+                            <a:rPr kumimoji="1" lang="en-US" altLang="ja-JP" b="0" i="1" smtClean="0">
+                              <a:latin typeface="Cambria Math" panose="02040503050406030204" pitchFamily="18" charset="0"/>
+                            </a:rPr>
+                            <m:t>𝑣</m:t>
+                          </m:r>
+                          <m:r>
+                            <a:rPr kumimoji="1" lang="en-US" altLang="ja-JP" b="0" i="1" smtClean="0">
+                              <a:latin typeface="Cambria Math" panose="02040503050406030204" pitchFamily="18" charset="0"/>
+                            </a:rPr>
+                            <m:t>=1</m:t>
+                          </m:r>
+                        </m:sub>
+                        <m:sup>
+                          <m:r>
+                            <a:rPr kumimoji="1" lang="en-US" altLang="ja-JP" b="0" i="1" smtClean="0">
+                              <a:latin typeface="Cambria Math" panose="02040503050406030204" pitchFamily="18" charset="0"/>
+                            </a:rPr>
+                            <m:t>3</m:t>
+                          </m:r>
+                        </m:sup>
+                        <m:e>
+                          <m:nary>
+                            <m:naryPr>
+                              <m:chr m:val="∑"/>
+                              <m:ctrlPr>
+                                <a:rPr kumimoji="1" lang="en-US" altLang="ja-JP" b="0" i="1" smtClean="0">
+                                  <a:latin typeface="Cambria Math" panose="02040503050406030204" pitchFamily="18" charset="0"/>
+                                </a:rPr>
+                              </m:ctrlPr>
+                            </m:naryPr>
+                            <m:sub>
+                              <m:r>
+                                <a:rPr kumimoji="1" lang="en-US" altLang="ja-JP" b="0" i="1" smtClean="0">
+                                  <a:latin typeface="Cambria Math" panose="02040503050406030204" pitchFamily="18" charset="0"/>
+                                </a:rPr>
+                                <m:t>𝑐</m:t>
+                              </m:r>
+                              <m:r>
+                                <a:rPr kumimoji="1" lang="en-US" altLang="ja-JP" b="0" i="1" smtClean="0">
+                                  <a:latin typeface="Cambria Math" panose="02040503050406030204" pitchFamily="18" charset="0"/>
+                                </a:rPr>
+                                <m:t>=1</m:t>
+                              </m:r>
+                            </m:sub>
+                            <m:sup>
+                              <m:r>
+                                <a:rPr kumimoji="1" lang="en-US" altLang="ja-JP" b="0" i="1" smtClean="0">
+                                  <a:latin typeface="Cambria Math" panose="02040503050406030204" pitchFamily="18" charset="0"/>
+                                </a:rPr>
+                                <m:t>3</m:t>
+                              </m:r>
+                            </m:sup>
+                            <m:e>
+                              <m:sSub>
+                                <m:sSubPr>
+                                  <m:ctrlPr>
+                                    <a:rPr lang="en-US" altLang="ja-JP" i="1">
+                                      <a:latin typeface="Cambria Math" panose="02040503050406030204" pitchFamily="18" charset="0"/>
+                                    </a:rPr>
+                                  </m:ctrlPr>
+                                </m:sSubPr>
+                                <m:e>
+                                  <m:r>
+                                    <a:rPr lang="en-US" altLang="ja-JP" i="1">
+                                      <a:latin typeface="Cambria Math" panose="02040503050406030204" pitchFamily="18" charset="0"/>
+                                    </a:rPr>
+                                    <m:t>𝑃</m:t>
+                                  </m:r>
+                                </m:e>
+                                <m:sub>
+                                  <m:r>
+                                    <a:rPr lang="en-US" altLang="ja-JP" b="0" i="1" smtClean="0">
+                                      <a:latin typeface="Cambria Math" panose="02040503050406030204" pitchFamily="18" charset="0"/>
+                                    </a:rPr>
+                                    <m:t>𝑣</m:t>
+                                  </m:r>
+                                </m:sub>
+                              </m:sSub>
+                              <m:sSub>
+                                <m:sSubPr>
+                                  <m:ctrlPr>
+                                    <a:rPr lang="en-US" altLang="ja-JP" b="0" i="1" smtClean="0">
+                                      <a:latin typeface="Cambria Math" panose="02040503050406030204" pitchFamily="18" charset="0"/>
+                                    </a:rPr>
+                                  </m:ctrlPr>
+                                </m:sSubPr>
+                                <m:e>
+                                  <m:r>
+                                    <a:rPr lang="en-US" altLang="ja-JP" b="0" i="1" smtClean="0">
+                                      <a:latin typeface="Cambria Math" panose="02040503050406030204" pitchFamily="18" charset="0"/>
+                                    </a:rPr>
+                                    <m:t>𝑃</m:t>
+                                  </m:r>
+                                </m:e>
+                                <m:sub>
+                                  <m:r>
+                                    <a:rPr lang="en-US" altLang="ja-JP" b="0" i="1" smtClean="0">
+                                      <a:latin typeface="Cambria Math" panose="02040503050406030204" pitchFamily="18" charset="0"/>
+                                    </a:rPr>
+                                    <m:t>𝑐</m:t>
+                                  </m:r>
+                                </m:sub>
+                              </m:sSub>
+                              <m:f>
+                                <m:fPr>
+                                  <m:ctrlPr>
+                                    <a:rPr lang="en-US" altLang="ja-JP" i="1">
+                                      <a:latin typeface="Cambria Math" panose="02040503050406030204" pitchFamily="18" charset="0"/>
+                                    </a:rPr>
+                                  </m:ctrlPr>
+                                </m:fPr>
+                                <m:num>
+                                  <m:sSub>
+                                    <m:sSubPr>
+                                      <m:ctrlPr>
+                                        <a:rPr lang="en-US" altLang="ja-JP" i="1">
+                                          <a:latin typeface="Cambria Math" panose="02040503050406030204" pitchFamily="18" charset="0"/>
+                                        </a:rPr>
+                                      </m:ctrlPr>
+                                    </m:sSubPr>
+                                    <m:e>
+                                      <m:r>
+                                        <a:rPr lang="en-US" altLang="ja-JP" i="1">
+                                          <a:latin typeface="Cambria Math" panose="02040503050406030204" pitchFamily="18" charset="0"/>
+                                        </a:rPr>
+                                        <m:t>𝑝</m:t>
+                                      </m:r>
+                                    </m:e>
+                                    <m:sub>
+                                      <m:r>
+                                        <a:rPr lang="en-US" altLang="ja-JP" b="0" i="1" smtClean="0">
+                                          <a:latin typeface="Cambria Math" panose="02040503050406030204" pitchFamily="18" charset="0"/>
+                                        </a:rPr>
+                                        <m:t>𝑣</m:t>
+                                      </m:r>
+                                      <m:r>
+                                        <a:rPr lang="en-US" altLang="ja-JP" b="0" i="1" smtClean="0">
+                                          <a:latin typeface="Cambria Math" panose="02040503050406030204" pitchFamily="18" charset="0"/>
+                                        </a:rPr>
+                                        <m:t>,</m:t>
+                                      </m:r>
+                                      <m:r>
+                                        <a:rPr lang="en-US" altLang="ja-JP" b="0" i="1" smtClean="0">
+                                          <a:latin typeface="Cambria Math" panose="02040503050406030204" pitchFamily="18" charset="0"/>
+                                        </a:rPr>
+                                        <m:t>𝑐</m:t>
+                                      </m:r>
+                                    </m:sub>
+                                  </m:sSub>
+                                  <m:d>
+                                    <m:dPr>
+                                      <m:ctrlPr>
+                                        <a:rPr lang="en-US" altLang="ja-JP" i="1">
+                                          <a:latin typeface="Cambria Math" panose="02040503050406030204" pitchFamily="18" charset="0"/>
+                                        </a:rPr>
+                                      </m:ctrlPr>
+                                    </m:dPr>
+                                    <m:e>
+                                      <m:sSup>
+                                        <m:sSupPr>
+                                          <m:ctrlPr>
+                                            <a:rPr lang="en-US" altLang="ja-JP" i="1">
+                                              <a:latin typeface="Cambria Math" panose="02040503050406030204" pitchFamily="18" charset="0"/>
+                                            </a:rPr>
+                                          </m:ctrlPr>
+                                        </m:sSupPr>
+                                        <m:e>
+                                          <m:r>
+                                            <a:rPr lang="en-US" altLang="ja-JP" i="1">
+                                              <a:latin typeface="Cambria Math" panose="02040503050406030204" pitchFamily="18" charset="0"/>
+                                            </a:rPr>
+                                            <m:t>𝑥</m:t>
+                                          </m:r>
+                                        </m:e>
+                                        <m:sup>
+                                          <m:r>
+                                            <a:rPr lang="en-US" altLang="ja-JP" i="1">
+                                              <a:latin typeface="Cambria Math" panose="02040503050406030204" pitchFamily="18" charset="0"/>
+                                            </a:rPr>
+                                            <m:t>′</m:t>
+                                          </m:r>
+                                        </m:sup>
+                                      </m:sSup>
+                                    </m:e>
+                                  </m:d>
+                                  <m:func>
+                                    <m:funcPr>
+                                      <m:ctrlPr>
+                                        <a:rPr lang="en-US" altLang="ja-JP" i="1">
+                                          <a:latin typeface="Cambria Math" panose="02040503050406030204" pitchFamily="18" charset="0"/>
+                                        </a:rPr>
+                                      </m:ctrlPr>
+                                    </m:funcPr>
+                                    <m:fName>
+                                      <m:r>
+                                        <m:rPr>
+                                          <m:sty m:val="p"/>
+                                        </m:rPr>
+                                        <a:rPr lang="en-US" altLang="ja-JP">
+                                          <a:latin typeface="Cambria Math" panose="02040503050406030204" pitchFamily="18" charset="0"/>
+                                        </a:rPr>
+                                        <m:t>cos</m:t>
+                                      </m:r>
+                                    </m:fName>
+                                    <m:e>
+                                      <m:sSub>
+                                        <m:sSubPr>
+                                          <m:ctrlPr>
+                                            <a:rPr lang="en-US" altLang="ja-JP" i="1">
+                                              <a:latin typeface="Cambria Math" panose="02040503050406030204" pitchFamily="18" charset="0"/>
+                                            </a:rPr>
+                                          </m:ctrlPr>
+                                        </m:sSubPr>
+                                        <m:e>
+                                          <m:r>
+                                            <a:rPr lang="en-US" altLang="ja-JP" i="1">
+                                              <a:latin typeface="Cambria Math" panose="02040503050406030204" pitchFamily="18" charset="0"/>
+                                            </a:rPr>
+                                            <m:t>𝜃</m:t>
+                                          </m:r>
+                                        </m:e>
+                                        <m:sub>
+                                          <m:r>
+                                            <a:rPr lang="en-US" altLang="ja-JP" b="0" i="1" smtClean="0">
+                                              <a:latin typeface="Cambria Math" panose="02040503050406030204" pitchFamily="18" charset="0"/>
+                                            </a:rPr>
+                                            <m:t>𝑣</m:t>
+                                          </m:r>
+                                        </m:sub>
+                                      </m:sSub>
+                                    </m:e>
+                                  </m:func>
+                                </m:num>
+                                <m:den>
+                                  <m:sSub>
+                                    <m:sSubPr>
+                                      <m:ctrlPr>
+                                        <a:rPr lang="en-US" altLang="ja-JP" i="1" smtClean="0">
+                                          <a:latin typeface="Cambria Math" panose="02040503050406030204" pitchFamily="18" charset="0"/>
+                                        </a:rPr>
+                                      </m:ctrlPr>
+                                    </m:sSubPr>
+                                    <m:e>
+                                      <m:r>
+                                        <a:rPr lang="en-US" altLang="ja-JP" i="1">
+                                          <a:latin typeface="Cambria Math" panose="02040503050406030204" pitchFamily="18" charset="0"/>
+                                        </a:rPr>
+                                        <m:t>𝑛</m:t>
+                                      </m:r>
+                                    </m:e>
+                                    <m:sub>
+                                      <m:r>
+                                        <a:rPr lang="en-US" altLang="ja-JP" b="0" i="1" smtClean="0">
+                                          <a:latin typeface="Cambria Math" panose="02040503050406030204" pitchFamily="18" charset="0"/>
+                                        </a:rPr>
+                                        <m:t>𝑣</m:t>
+                                      </m:r>
+                                    </m:sub>
+                                  </m:sSub>
+                                </m:den>
+                              </m:f>
+                            </m:e>
+                          </m:nary>
+                        </m:e>
+                      </m:nary>
+                    </m:oMath>
+                  </m:oMathPara>
+                </a14:m>
+                <a:endParaRPr kumimoji="1" lang="en-US" altLang="ja-JP"/>
+              </a:p>
+              <a:p>
+                <a:pPr lvl="8"/>
+                <a:endParaRPr lang="en-US" altLang="ja-JP"/>
+              </a:p>
+              <a:p>
+                <a:pPr lvl="1"/>
+                <a:r>
+                  <a:rPr lang="ja-JP" altLang="en-US"/>
+                  <a:t>ヒット数</a:t>
+                </a:r>
+                <a14:m>
+                  <m:oMath xmlns:m="http://schemas.openxmlformats.org/officeDocument/2006/math">
+                    <m:sSub>
+                      <m:sSubPr>
+                        <m:ctrlPr>
+                          <a:rPr kumimoji="1" lang="en-US" altLang="ja-JP" b="0" i="1" smtClean="0">
+                            <a:latin typeface="Cambria Math" panose="02040503050406030204" pitchFamily="18" charset="0"/>
+                          </a:rPr>
+                        </m:ctrlPr>
+                      </m:sSubPr>
+                      <m:e>
+                        <m:r>
+                          <a:rPr kumimoji="1" lang="en-US" altLang="ja-JP" b="0" i="1" smtClean="0">
+                            <a:latin typeface="Cambria Math" panose="02040503050406030204" pitchFamily="18" charset="0"/>
+                          </a:rPr>
+                          <m:t>𝑛</m:t>
+                        </m:r>
+                      </m:e>
+                      <m:sub>
+                        <m:r>
+                          <a:rPr kumimoji="1" lang="en-US" altLang="ja-JP" b="0" i="1" smtClean="0">
+                            <a:latin typeface="Cambria Math" panose="02040503050406030204" pitchFamily="18" charset="0"/>
+                          </a:rPr>
+                          <m:t>𝑣</m:t>
+                        </m:r>
+                      </m:sub>
+                    </m:sSub>
+                  </m:oMath>
+                </a14:m>
+                <a:r>
+                  <a:rPr kumimoji="1" lang="ja-JP" altLang="en-US"/>
+                  <a:t>はサンプリングした軸のもので近似</a:t>
+                </a:r>
+                <a:endParaRPr kumimoji="1" lang="en-US" altLang="ja-JP"/>
+              </a:p>
+            </p:txBody>
+          </p:sp>
+        </mc:Choice>
+        <mc:Fallback>
+          <p:sp>
+            <p:nvSpPr>
+              <p:cNvPr id="3" name="コンテンツ プレースホルダー 2">
+                <a:extLst>
+                  <a:ext uri="{FF2B5EF4-FFF2-40B4-BE49-F238E27FC236}">
+                    <a16:creationId xmlns:a16="http://schemas.microsoft.com/office/drawing/2014/main" id="{D9CE64A0-7341-37B7-C12D-89FE144DDF98}"/>
+                  </a:ext>
+                </a:extLst>
+              </p:cNvPr>
+              <p:cNvSpPr>
+                <a:spLocks noGrp="1" noRot="1" noChangeAspect="1" noMove="1" noResize="1" noEditPoints="1" noAdjustHandles="1" noChangeArrowheads="1" noChangeShapeType="1" noTextEdit="1"/>
+              </p:cNvSpPr>
+              <p:nvPr>
+                <p:ph idx="1"/>
+              </p:nvPr>
+            </p:nvSpPr>
+            <p:spPr>
+              <a:xfrm>
+                <a:off x="838200" y="1825625"/>
+                <a:ext cx="6914196" cy="4351338"/>
+              </a:xfrm>
+              <a:blipFill>
+                <a:blip r:embed="rId2"/>
+                <a:stretch>
+                  <a:fillRect l="-794"/>
+                </a:stretch>
+              </a:blipFill>
+            </p:spPr>
+            <p:txBody>
+              <a:bodyPr/>
+              <a:lstStyle/>
+              <a:p>
+                <a:r>
+                  <a:rPr lang="ja-JP" altLang="en-US">
+                    <a:noFill/>
+                  </a:rPr>
+                  <a:t> </a:t>
+                </a:r>
+              </a:p>
+            </p:txBody>
+          </p:sp>
+        </mc:Fallback>
+      </mc:AlternateContent>
+      <p:grpSp>
+        <p:nvGrpSpPr>
+          <p:cNvPr id="48" name="グループ化 47">
+            <a:extLst>
+              <a:ext uri="{FF2B5EF4-FFF2-40B4-BE49-F238E27FC236}">
+                <a16:creationId xmlns:a16="http://schemas.microsoft.com/office/drawing/2014/main" id="{726B3033-A4EB-5A33-F78F-F70DF8D75857}"/>
+              </a:ext>
+            </a:extLst>
+          </p:cNvPr>
+          <p:cNvGrpSpPr/>
+          <p:nvPr/>
+        </p:nvGrpSpPr>
+        <p:grpSpPr>
+          <a:xfrm>
+            <a:off x="8571929" y="2278863"/>
+            <a:ext cx="2498894" cy="2598330"/>
+            <a:chOff x="8086556" y="2782237"/>
+            <a:chExt cx="2498894" cy="2598330"/>
+          </a:xfrm>
+        </p:grpSpPr>
+        <p:sp>
+          <p:nvSpPr>
+            <p:cNvPr id="4" name="楕円 3">
+              <a:extLst>
+                <a:ext uri="{FF2B5EF4-FFF2-40B4-BE49-F238E27FC236}">
+                  <a16:creationId xmlns:a16="http://schemas.microsoft.com/office/drawing/2014/main" id="{AB0D6BF0-C4A7-78E4-9E0B-5C941C8AECE7}"/>
+                </a:ext>
+              </a:extLst>
+            </p:cNvPr>
+            <p:cNvSpPr/>
+            <p:nvPr/>
+          </p:nvSpPr>
+          <p:spPr>
+            <a:xfrm>
+              <a:off x="8180388" y="3011488"/>
+              <a:ext cx="2235200" cy="2235200"/>
+            </a:xfrm>
+            <a:prstGeom prst="ellipse">
+              <a:avLst/>
+            </a:prstGeom>
+            <a:noFill/>
+          </p:spPr>
+          <p:style>
+            <a:lnRef idx="2">
+              <a:schemeClr val="accent1">
+                <a:shade val="15000"/>
+              </a:schemeClr>
+            </a:lnRef>
+            <a:fillRef idx="1">
+              <a:schemeClr val="accent1"/>
+            </a:fillRef>
+            <a:effectRef idx="0">
+              <a:schemeClr val="accent1"/>
+            </a:effectRef>
+            <a:fontRef idx="minor">
+              <a:schemeClr val="lt1"/>
+            </a:fontRef>
+          </p:style>
+          <p:txBody>
+            <a:bodyPr rtlCol="0" anchor="ctr"/>
+            <a:lstStyle/>
+            <a:p>
+              <a:pPr algn="ctr"/>
+              <a:endParaRPr kumimoji="1" lang="ja-JP" altLang="en-US"/>
+            </a:p>
+          </p:txBody>
+        </p:sp>
+        <p:sp>
+          <p:nvSpPr>
+            <p:cNvPr id="5" name="フリーフォーム: 図形 4">
+              <a:extLst>
+                <a:ext uri="{FF2B5EF4-FFF2-40B4-BE49-F238E27FC236}">
+                  <a16:creationId xmlns:a16="http://schemas.microsoft.com/office/drawing/2014/main" id="{C3D7775B-0887-5565-B72C-5F52BD0A287B}"/>
+                </a:ext>
+              </a:extLst>
+            </p:cNvPr>
+            <p:cNvSpPr/>
+            <p:nvPr/>
+          </p:nvSpPr>
+          <p:spPr>
+            <a:xfrm>
+              <a:off x="8216900" y="4072991"/>
+              <a:ext cx="2368550" cy="975259"/>
+            </a:xfrm>
+            <a:custGeom>
+              <a:avLst/>
+              <a:gdLst>
+                <a:gd name="connsiteX0" fmla="*/ 0 w 2368550"/>
+                <a:gd name="connsiteY0" fmla="*/ 975259 h 975259"/>
+                <a:gd name="connsiteX1" fmla="*/ 857250 w 2368550"/>
+                <a:gd name="connsiteY1" fmla="*/ 118009 h 975259"/>
+                <a:gd name="connsiteX2" fmla="*/ 2368550 w 2368550"/>
+                <a:gd name="connsiteY2" fmla="*/ 29109 h 975259"/>
+              </a:gdLst>
+              <a:ahLst/>
+              <a:cxnLst>
+                <a:cxn ang="0">
+                  <a:pos x="connsiteX0" y="connsiteY0"/>
+                </a:cxn>
+                <a:cxn ang="0">
+                  <a:pos x="connsiteX1" y="connsiteY1"/>
+                </a:cxn>
+                <a:cxn ang="0">
+                  <a:pos x="connsiteX2" y="connsiteY2"/>
+                </a:cxn>
+              </a:cxnLst>
+              <a:rect l="l" t="t" r="r" b="b"/>
+              <a:pathLst>
+                <a:path w="2368550" h="975259">
+                  <a:moveTo>
+                    <a:pt x="0" y="975259"/>
+                  </a:moveTo>
+                  <a:cubicBezTo>
+                    <a:pt x="231246" y="625480"/>
+                    <a:pt x="462492" y="275701"/>
+                    <a:pt x="857250" y="118009"/>
+                  </a:cubicBezTo>
+                  <a:cubicBezTo>
+                    <a:pt x="1252008" y="-39683"/>
+                    <a:pt x="1810279" y="-5287"/>
+                    <a:pt x="2368550" y="29109"/>
+                  </a:cubicBezTo>
+                </a:path>
+              </a:pathLst>
+            </a:custGeom>
+            <a:noFill/>
+          </p:spPr>
+          <p:style>
+            <a:lnRef idx="2">
+              <a:schemeClr val="accent1">
+                <a:shade val="15000"/>
+              </a:schemeClr>
+            </a:lnRef>
+            <a:fillRef idx="1">
+              <a:schemeClr val="accent1"/>
+            </a:fillRef>
+            <a:effectRef idx="0">
+              <a:schemeClr val="accent1"/>
+            </a:effectRef>
+            <a:fontRef idx="minor">
+              <a:schemeClr val="lt1"/>
+            </a:fontRef>
+          </p:style>
+          <p:txBody>
+            <a:bodyPr rtlCol="0" anchor="ctr"/>
+            <a:lstStyle/>
+            <a:p>
+              <a:pPr algn="ctr"/>
+              <a:endParaRPr kumimoji="1" lang="ja-JP" altLang="en-US"/>
+            </a:p>
+          </p:txBody>
+        </p:sp>
+        <p:cxnSp>
+          <p:nvCxnSpPr>
+            <p:cNvPr id="7" name="直線矢印コネクタ 6">
+              <a:extLst>
+                <a:ext uri="{FF2B5EF4-FFF2-40B4-BE49-F238E27FC236}">
+                  <a16:creationId xmlns:a16="http://schemas.microsoft.com/office/drawing/2014/main" id="{872B2C1E-0537-DB97-A40B-2641AFE3DF05}"/>
+                </a:ext>
+              </a:extLst>
+            </p:cNvPr>
+            <p:cNvCxnSpPr>
+              <a:cxnSpLocks/>
+            </p:cNvCxnSpPr>
+            <p:nvPr/>
+          </p:nvCxnSpPr>
+          <p:spPr>
+            <a:xfrm flipH="1" flipV="1">
+              <a:off x="9036776" y="3035300"/>
+              <a:ext cx="261212" cy="1093788"/>
+            </a:xfrm>
+            <a:prstGeom prst="straightConnector1">
+              <a:avLst/>
+            </a:prstGeom>
+            <a:ln>
+              <a:tailEnd type="triangle"/>
+            </a:ln>
+          </p:spPr>
+          <p:style>
+            <a:lnRef idx="1">
+              <a:schemeClr val="accent1"/>
+            </a:lnRef>
+            <a:fillRef idx="0">
+              <a:schemeClr val="accent1"/>
+            </a:fillRef>
+            <a:effectRef idx="0">
+              <a:schemeClr val="accent1"/>
+            </a:effectRef>
+            <a:fontRef idx="minor">
+              <a:schemeClr val="tx1"/>
+            </a:fontRef>
+          </p:style>
+        </p:cxnSp>
+        <p:sp>
+          <p:nvSpPr>
+            <p:cNvPr id="10" name="正方形/長方形 9">
+              <a:extLst>
+                <a:ext uri="{FF2B5EF4-FFF2-40B4-BE49-F238E27FC236}">
+                  <a16:creationId xmlns:a16="http://schemas.microsoft.com/office/drawing/2014/main" id="{F77ED0C2-DFF6-6E75-BE8E-3F3811795314}"/>
+                </a:ext>
+              </a:extLst>
+            </p:cNvPr>
+            <p:cNvSpPr/>
+            <p:nvPr/>
+          </p:nvSpPr>
+          <p:spPr>
+            <a:xfrm rot="20793201">
+              <a:off x="8180388" y="3011487"/>
+              <a:ext cx="2235200" cy="2235199"/>
+            </a:xfrm>
+            <a:prstGeom prst="rect">
+              <a:avLst/>
+            </a:prstGeom>
+            <a:noFill/>
+            <a:ln>
+              <a:prstDash val="dash"/>
+            </a:ln>
+          </p:spPr>
+          <p:style>
+            <a:lnRef idx="2">
+              <a:schemeClr val="accent1">
+                <a:shade val="15000"/>
+              </a:schemeClr>
+            </a:lnRef>
+            <a:fillRef idx="1">
+              <a:schemeClr val="accent1"/>
+            </a:fillRef>
+            <a:effectRef idx="0">
+              <a:schemeClr val="accent1"/>
+            </a:effectRef>
+            <a:fontRef idx="minor">
+              <a:schemeClr val="lt1"/>
+            </a:fontRef>
+          </p:style>
+          <p:txBody>
+            <a:bodyPr rtlCol="0" anchor="ctr"/>
+            <a:lstStyle/>
+            <a:p>
+              <a:pPr algn="ctr"/>
+              <a:endParaRPr kumimoji="1" lang="ja-JP" altLang="en-US"/>
+            </a:p>
+          </p:txBody>
+        </p:sp>
+        <p:cxnSp>
+          <p:nvCxnSpPr>
+            <p:cNvPr id="11" name="直線矢印コネクタ 10">
+              <a:extLst>
+                <a:ext uri="{FF2B5EF4-FFF2-40B4-BE49-F238E27FC236}">
+                  <a16:creationId xmlns:a16="http://schemas.microsoft.com/office/drawing/2014/main" id="{8B40261B-E7EF-11E8-9D86-322A36FE0767}"/>
+                </a:ext>
+              </a:extLst>
+            </p:cNvPr>
+            <p:cNvCxnSpPr>
+              <a:cxnSpLocks/>
+            </p:cNvCxnSpPr>
+            <p:nvPr/>
+          </p:nvCxnSpPr>
+          <p:spPr>
+            <a:xfrm>
+              <a:off x="8379768" y="3517900"/>
+              <a:ext cx="378536" cy="1576917"/>
+            </a:xfrm>
+            <a:prstGeom prst="straightConnector1">
+              <a:avLst/>
+            </a:prstGeom>
+            <a:ln>
+              <a:tailEnd type="triangle"/>
+            </a:ln>
+          </p:spPr>
+          <p:style>
+            <a:lnRef idx="1">
+              <a:schemeClr val="accent1"/>
+            </a:lnRef>
+            <a:fillRef idx="0">
+              <a:schemeClr val="accent1"/>
+            </a:fillRef>
+            <a:effectRef idx="0">
+              <a:schemeClr val="accent1"/>
+            </a:effectRef>
+            <a:fontRef idx="minor">
+              <a:schemeClr val="tx1"/>
+            </a:fontRef>
+          </p:style>
+        </p:cxnSp>
+        <p:cxnSp>
+          <p:nvCxnSpPr>
+            <p:cNvPr id="17" name="直線矢印コネクタ 16">
+              <a:extLst>
+                <a:ext uri="{FF2B5EF4-FFF2-40B4-BE49-F238E27FC236}">
+                  <a16:creationId xmlns:a16="http://schemas.microsoft.com/office/drawing/2014/main" id="{1BAA7982-2CAA-633D-E8B6-2288A07378C4}"/>
+                </a:ext>
+              </a:extLst>
+            </p:cNvPr>
+            <p:cNvCxnSpPr>
+              <a:cxnSpLocks/>
+            </p:cNvCxnSpPr>
+            <p:nvPr/>
+          </p:nvCxnSpPr>
+          <p:spPr>
+            <a:xfrm>
+              <a:off x="8307802" y="3217333"/>
+              <a:ext cx="519280" cy="2163234"/>
+            </a:xfrm>
+            <a:prstGeom prst="straightConnector1">
+              <a:avLst/>
+            </a:prstGeom>
+            <a:ln>
+              <a:prstDash val="dash"/>
+              <a:headEnd type="none" w="med" len="med"/>
+              <a:tailEnd type="none" w="med" len="med"/>
+            </a:ln>
+          </p:spPr>
+          <p:style>
+            <a:lnRef idx="1">
+              <a:schemeClr val="accent1"/>
+            </a:lnRef>
+            <a:fillRef idx="0">
+              <a:schemeClr val="accent1"/>
+            </a:fillRef>
+            <a:effectRef idx="0">
+              <a:schemeClr val="accent1"/>
+            </a:effectRef>
+            <a:fontRef idx="minor">
+              <a:schemeClr val="tx1"/>
+            </a:fontRef>
+          </p:style>
+        </p:cxnSp>
+        <p:cxnSp>
+          <p:nvCxnSpPr>
+            <p:cNvPr id="19" name="直線矢印コネクタ 18">
+              <a:extLst>
+                <a:ext uri="{FF2B5EF4-FFF2-40B4-BE49-F238E27FC236}">
+                  <a16:creationId xmlns:a16="http://schemas.microsoft.com/office/drawing/2014/main" id="{1A2986A5-33E8-3198-C90A-3FBEB101A6F0}"/>
+                </a:ext>
+              </a:extLst>
+            </p:cNvPr>
+            <p:cNvCxnSpPr>
+              <a:cxnSpLocks/>
+            </p:cNvCxnSpPr>
+            <p:nvPr/>
+          </p:nvCxnSpPr>
+          <p:spPr>
+            <a:xfrm flipH="1" flipV="1">
+              <a:off x="8274050" y="4078817"/>
+              <a:ext cx="340255" cy="439738"/>
+            </a:xfrm>
+            <a:prstGeom prst="straightConnector1">
+              <a:avLst/>
+            </a:prstGeom>
+            <a:ln>
+              <a:tailEnd type="triangle"/>
+            </a:ln>
+          </p:spPr>
+          <p:style>
+            <a:lnRef idx="1">
+              <a:schemeClr val="accent1"/>
+            </a:lnRef>
+            <a:fillRef idx="0">
+              <a:schemeClr val="accent1"/>
+            </a:fillRef>
+            <a:effectRef idx="0">
+              <a:schemeClr val="accent1"/>
+            </a:effectRef>
+            <a:fontRef idx="minor">
+              <a:schemeClr val="tx1"/>
+            </a:fontRef>
+          </p:style>
+        </p:cxnSp>
+        <p:sp>
+          <p:nvSpPr>
+            <p:cNvPr id="21" name="楕円 20">
+              <a:extLst>
+                <a:ext uri="{FF2B5EF4-FFF2-40B4-BE49-F238E27FC236}">
+                  <a16:creationId xmlns:a16="http://schemas.microsoft.com/office/drawing/2014/main" id="{A21D15A5-1383-709D-A0CC-48E66683CFCA}"/>
+                </a:ext>
+              </a:extLst>
+            </p:cNvPr>
+            <p:cNvSpPr/>
+            <p:nvPr/>
+          </p:nvSpPr>
+          <p:spPr>
+            <a:xfrm>
+              <a:off x="9237108" y="4072991"/>
+              <a:ext cx="114300" cy="114300"/>
+            </a:xfrm>
+            <a:prstGeom prst="ellipse">
+              <a:avLst/>
+            </a:prstGeom>
+          </p:spPr>
+          <p:style>
+            <a:lnRef idx="2">
+              <a:schemeClr val="accent1">
+                <a:shade val="15000"/>
+              </a:schemeClr>
+            </a:lnRef>
+            <a:fillRef idx="1">
+              <a:schemeClr val="accent1"/>
+            </a:fillRef>
+            <a:effectRef idx="0">
+              <a:schemeClr val="accent1"/>
+            </a:effectRef>
+            <a:fontRef idx="minor">
+              <a:schemeClr val="lt1"/>
+            </a:fontRef>
+          </p:style>
+          <p:txBody>
+            <a:bodyPr rtlCol="0" anchor="ctr"/>
+            <a:lstStyle/>
+            <a:p>
+              <a:pPr algn="ctr"/>
+              <a:endParaRPr kumimoji="1" lang="ja-JP" altLang="en-US"/>
+            </a:p>
+          </p:txBody>
+        </p:sp>
+        <p:sp>
+          <p:nvSpPr>
+            <p:cNvPr id="22" name="楕円 21">
+              <a:extLst>
+                <a:ext uri="{FF2B5EF4-FFF2-40B4-BE49-F238E27FC236}">
+                  <a16:creationId xmlns:a16="http://schemas.microsoft.com/office/drawing/2014/main" id="{26F2468B-FE44-563F-FFED-CC82F611AAAB}"/>
+                </a:ext>
+              </a:extLst>
+            </p:cNvPr>
+            <p:cNvSpPr/>
+            <p:nvPr/>
+          </p:nvSpPr>
+          <p:spPr>
+            <a:xfrm>
+              <a:off x="8557155" y="4461729"/>
+              <a:ext cx="114300" cy="114300"/>
+            </a:xfrm>
+            <a:prstGeom prst="ellipse">
+              <a:avLst/>
+            </a:prstGeom>
+          </p:spPr>
+          <p:style>
+            <a:lnRef idx="2">
+              <a:schemeClr val="accent1">
+                <a:shade val="15000"/>
+              </a:schemeClr>
+            </a:lnRef>
+            <a:fillRef idx="1">
+              <a:schemeClr val="accent1"/>
+            </a:fillRef>
+            <a:effectRef idx="0">
+              <a:schemeClr val="accent1"/>
+            </a:effectRef>
+            <a:fontRef idx="minor">
+              <a:schemeClr val="lt1"/>
+            </a:fontRef>
+          </p:style>
+          <p:txBody>
+            <a:bodyPr rtlCol="0" anchor="ctr"/>
+            <a:lstStyle/>
+            <a:p>
+              <a:pPr algn="ctr"/>
+              <a:endParaRPr kumimoji="1" lang="ja-JP" altLang="en-US"/>
+            </a:p>
+          </p:txBody>
+        </p:sp>
+        <mc:AlternateContent xmlns:mc="http://schemas.openxmlformats.org/markup-compatibility/2006" xmlns:a14="http://schemas.microsoft.com/office/drawing/2010/main">
+          <mc:Choice Requires="a14">
+            <p:sp>
+              <p:nvSpPr>
+                <p:cNvPr id="23" name="テキスト ボックス 22">
+                  <a:extLst>
+                    <a:ext uri="{FF2B5EF4-FFF2-40B4-BE49-F238E27FC236}">
+                      <a16:creationId xmlns:a16="http://schemas.microsoft.com/office/drawing/2014/main" id="{FA9FB08E-0878-53E6-31A4-AFE817CB7774}"/>
+                    </a:ext>
+                  </a:extLst>
+                </p:cNvPr>
+                <p:cNvSpPr txBox="1"/>
+                <p:nvPr/>
+              </p:nvSpPr>
+              <p:spPr>
+                <a:xfrm>
+                  <a:off x="9224565" y="4092397"/>
+                  <a:ext cx="471411" cy="369332"/>
+                </a:xfrm>
+                <a:prstGeom prst="rect">
+                  <a:avLst/>
+                </a:prstGeom>
+                <a:noFill/>
+              </p:spPr>
+              <p:txBody>
+                <a:bodyPr wrap="none" rtlCol="0">
+                  <a:spAutoFit/>
+                </a:bodyPr>
+                <a:lstStyle/>
+                <a:p>
+                  <a:pPr/>
+                  <a14:m>
+                    <m:oMathPara xmlns:m="http://schemas.openxmlformats.org/officeDocument/2006/math">
+                      <m:oMathParaPr>
+                        <m:jc m:val="centerGroup"/>
+                      </m:oMathParaPr>
+                      <m:oMath xmlns:m="http://schemas.openxmlformats.org/officeDocument/2006/math">
+                        <m:sSub>
+                          <m:sSubPr>
+                            <m:ctrlPr>
+                              <a:rPr kumimoji="1" lang="en-US" altLang="ja-JP" b="0" i="1" smtClean="0">
+                                <a:latin typeface="Cambria Math" panose="02040503050406030204" pitchFamily="18" charset="0"/>
+                              </a:rPr>
+                            </m:ctrlPr>
+                          </m:sSubPr>
+                          <m:e>
+                            <m:r>
+                              <a:rPr kumimoji="1" lang="en-US" altLang="ja-JP" b="0" i="1" smtClean="0">
+                                <a:latin typeface="Cambria Math" panose="02040503050406030204" pitchFamily="18" charset="0"/>
+                              </a:rPr>
+                              <m:t>𝑥</m:t>
+                            </m:r>
+                          </m:e>
+                          <m:sub>
+                            <m:r>
+                              <a:rPr kumimoji="1" lang="en-US" altLang="ja-JP" b="0" i="1" smtClean="0">
+                                <a:latin typeface="Cambria Math" panose="02040503050406030204" pitchFamily="18" charset="0"/>
+                              </a:rPr>
+                              <m:t>𝑜</m:t>
+                            </m:r>
+                          </m:sub>
+                        </m:sSub>
+                      </m:oMath>
+                    </m:oMathPara>
+                  </a14:m>
+                  <a:endParaRPr kumimoji="1" lang="ja-JP" altLang="en-US"/>
+                </a:p>
+              </p:txBody>
+            </p:sp>
+          </mc:Choice>
+          <mc:Fallback xmlns="">
+            <p:sp>
+              <p:nvSpPr>
+                <p:cNvPr id="23" name="テキスト ボックス 22">
+                  <a:extLst>
+                    <a:ext uri="{FF2B5EF4-FFF2-40B4-BE49-F238E27FC236}">
+                      <a16:creationId xmlns:a16="http://schemas.microsoft.com/office/drawing/2014/main" id="{FA9FB08E-0878-53E6-31A4-AFE817CB7774}"/>
+                    </a:ext>
+                  </a:extLst>
+                </p:cNvPr>
+                <p:cNvSpPr txBox="1">
+                  <a:spLocks noRot="1" noChangeAspect="1" noMove="1" noResize="1" noEditPoints="1" noAdjustHandles="1" noChangeArrowheads="1" noChangeShapeType="1" noTextEdit="1"/>
+                </p:cNvSpPr>
+                <p:nvPr/>
+              </p:nvSpPr>
+              <p:spPr>
+                <a:xfrm>
+                  <a:off x="9224565" y="4092397"/>
+                  <a:ext cx="471411" cy="369332"/>
+                </a:xfrm>
+                <a:prstGeom prst="rect">
+                  <a:avLst/>
+                </a:prstGeom>
+                <a:blipFill>
+                  <a:blip r:embed="rId3"/>
+                  <a:stretch>
+                    <a:fillRect/>
+                  </a:stretch>
+                </a:blipFill>
+              </p:spPr>
+              <p:txBody>
+                <a:bodyPr/>
+                <a:lstStyle/>
+                <a:p>
+                  <a:r>
+                    <a:rPr lang="ja-JP" altLang="en-US">
+                      <a:noFill/>
+                    </a:rPr>
+                    <a:t> </a:t>
+                  </a:r>
+                </a:p>
+              </p:txBody>
+            </p:sp>
+          </mc:Fallback>
+        </mc:AlternateContent>
+        <mc:AlternateContent xmlns:mc="http://schemas.openxmlformats.org/markup-compatibility/2006" xmlns:a14="http://schemas.microsoft.com/office/drawing/2010/main">
+          <mc:Choice Requires="a14">
+            <p:sp>
+              <p:nvSpPr>
+                <p:cNvPr id="24" name="テキスト ボックス 23">
+                  <a:extLst>
+                    <a:ext uri="{FF2B5EF4-FFF2-40B4-BE49-F238E27FC236}">
+                      <a16:creationId xmlns:a16="http://schemas.microsoft.com/office/drawing/2014/main" id="{13B7A277-A21C-0FF5-7419-1F34F3F77311}"/>
+                    </a:ext>
+                  </a:extLst>
+                </p:cNvPr>
+                <p:cNvSpPr txBox="1"/>
+                <p:nvPr/>
+              </p:nvSpPr>
+              <p:spPr>
+                <a:xfrm>
+                  <a:off x="8592436" y="4355068"/>
+                  <a:ext cx="433387" cy="369332"/>
+                </a:xfrm>
+                <a:prstGeom prst="rect">
+                  <a:avLst/>
+                </a:prstGeom>
+                <a:noFill/>
+              </p:spPr>
+              <p:txBody>
+                <a:bodyPr wrap="none" rtlCol="0">
+                  <a:spAutoFit/>
+                </a:bodyPr>
+                <a:lstStyle/>
+                <a:p>
+                  <a:pPr/>
+                  <a14:m>
+                    <m:oMathPara xmlns:m="http://schemas.openxmlformats.org/officeDocument/2006/math">
+                      <m:oMathParaPr>
+                        <m:jc m:val="centerGroup"/>
+                      </m:oMathParaPr>
+                      <m:oMath xmlns:m="http://schemas.openxmlformats.org/officeDocument/2006/math">
+                        <m:sSub>
+                          <m:sSubPr>
+                            <m:ctrlPr>
+                              <a:rPr kumimoji="1" lang="en-US" altLang="ja-JP" b="0" i="1" smtClean="0">
+                                <a:latin typeface="Cambria Math" panose="02040503050406030204" pitchFamily="18" charset="0"/>
+                              </a:rPr>
+                            </m:ctrlPr>
+                          </m:sSubPr>
+                          <m:e>
+                            <m:r>
+                              <a:rPr kumimoji="1" lang="en-US" altLang="ja-JP" b="0" i="1" smtClean="0">
+                                <a:latin typeface="Cambria Math" panose="02040503050406030204" pitchFamily="18" charset="0"/>
+                              </a:rPr>
+                              <m:t>𝑥</m:t>
+                            </m:r>
+                          </m:e>
+                          <m:sub>
+                            <m:r>
+                              <a:rPr kumimoji="1" lang="en-US" altLang="ja-JP" b="0" i="1" smtClean="0">
+                                <a:latin typeface="Cambria Math" panose="02040503050406030204" pitchFamily="18" charset="0"/>
+                              </a:rPr>
+                              <m:t>𝑖</m:t>
+                            </m:r>
+                          </m:sub>
+                        </m:sSub>
+                      </m:oMath>
+                    </m:oMathPara>
+                  </a14:m>
+                  <a:endParaRPr kumimoji="1" lang="ja-JP" altLang="en-US"/>
+                </a:p>
+              </p:txBody>
+            </p:sp>
+          </mc:Choice>
+          <mc:Fallback xmlns="">
+            <p:sp>
+              <p:nvSpPr>
+                <p:cNvPr id="24" name="テキスト ボックス 23">
+                  <a:extLst>
+                    <a:ext uri="{FF2B5EF4-FFF2-40B4-BE49-F238E27FC236}">
+                      <a16:creationId xmlns:a16="http://schemas.microsoft.com/office/drawing/2014/main" id="{13B7A277-A21C-0FF5-7419-1F34F3F77311}"/>
+                    </a:ext>
+                  </a:extLst>
+                </p:cNvPr>
+                <p:cNvSpPr txBox="1">
+                  <a:spLocks noRot="1" noChangeAspect="1" noMove="1" noResize="1" noEditPoints="1" noAdjustHandles="1" noChangeArrowheads="1" noChangeShapeType="1" noTextEdit="1"/>
+                </p:cNvSpPr>
+                <p:nvPr/>
+              </p:nvSpPr>
+              <p:spPr>
+                <a:xfrm>
+                  <a:off x="8592436" y="4355068"/>
+                  <a:ext cx="433387" cy="369332"/>
+                </a:xfrm>
+                <a:prstGeom prst="rect">
+                  <a:avLst/>
+                </a:prstGeom>
+                <a:blipFill>
+                  <a:blip r:embed="rId4"/>
+                  <a:stretch>
+                    <a:fillRect/>
+                  </a:stretch>
+                </a:blipFill>
+              </p:spPr>
+              <p:txBody>
+                <a:bodyPr/>
+                <a:lstStyle/>
+                <a:p>
+                  <a:r>
+                    <a:rPr lang="ja-JP" altLang="en-US">
+                      <a:noFill/>
+                    </a:rPr>
+                    <a:t> </a:t>
+                  </a:r>
+                </a:p>
+              </p:txBody>
+            </p:sp>
+          </mc:Fallback>
+        </mc:AlternateContent>
+        <p:sp>
+          <p:nvSpPr>
+            <p:cNvPr id="25" name="楕円 24">
+              <a:extLst>
+                <a:ext uri="{FF2B5EF4-FFF2-40B4-BE49-F238E27FC236}">
+                  <a16:creationId xmlns:a16="http://schemas.microsoft.com/office/drawing/2014/main" id="{D3664CB7-5DE9-0135-59C0-16EF1FFBEAAC}"/>
+                </a:ext>
+              </a:extLst>
+            </p:cNvPr>
+            <p:cNvSpPr/>
+            <p:nvPr/>
+          </p:nvSpPr>
+          <p:spPr>
+            <a:xfrm>
+              <a:off x="8250652" y="3160183"/>
+              <a:ext cx="114300" cy="114300"/>
+            </a:xfrm>
+            <a:prstGeom prst="ellipse">
+              <a:avLst/>
+            </a:prstGeom>
+          </p:spPr>
+          <p:style>
+            <a:lnRef idx="2">
+              <a:schemeClr val="accent1">
+                <a:shade val="15000"/>
+              </a:schemeClr>
+            </a:lnRef>
+            <a:fillRef idx="1">
+              <a:schemeClr val="accent1"/>
+            </a:fillRef>
+            <a:effectRef idx="0">
+              <a:schemeClr val="accent1"/>
+            </a:effectRef>
+            <a:fontRef idx="minor">
+              <a:schemeClr val="lt1"/>
+            </a:fontRef>
+          </p:style>
+          <p:txBody>
+            <a:bodyPr rtlCol="0" anchor="ctr"/>
+            <a:lstStyle/>
+            <a:p>
+              <a:pPr algn="ctr"/>
+              <a:endParaRPr kumimoji="1" lang="ja-JP" altLang="en-US"/>
+            </a:p>
+          </p:txBody>
+        </p:sp>
+        <mc:AlternateContent xmlns:mc="http://schemas.openxmlformats.org/markup-compatibility/2006" xmlns:a14="http://schemas.microsoft.com/office/drawing/2010/main">
+          <mc:Choice Requires="a14">
+            <p:sp>
+              <p:nvSpPr>
+                <p:cNvPr id="26" name="テキスト ボックス 25">
+                  <a:extLst>
+                    <a:ext uri="{FF2B5EF4-FFF2-40B4-BE49-F238E27FC236}">
+                      <a16:creationId xmlns:a16="http://schemas.microsoft.com/office/drawing/2014/main" id="{340660A7-81B7-606C-2DEA-21ADC5B2C989}"/>
+                    </a:ext>
+                  </a:extLst>
+                </p:cNvPr>
+                <p:cNvSpPr txBox="1"/>
+                <p:nvPr/>
+              </p:nvSpPr>
+              <p:spPr>
+                <a:xfrm>
+                  <a:off x="8086556" y="2782237"/>
+                  <a:ext cx="442492" cy="369588"/>
+                </a:xfrm>
+                <a:prstGeom prst="rect">
+                  <a:avLst/>
+                </a:prstGeom>
+                <a:noFill/>
+              </p:spPr>
+              <p:txBody>
+                <a:bodyPr wrap="none" rtlCol="0">
+                  <a:spAutoFit/>
+                </a:bodyPr>
+                <a:lstStyle/>
+                <a:p>
+                  <a:pPr/>
+                  <a14:m>
+                    <m:oMathPara xmlns:m="http://schemas.openxmlformats.org/officeDocument/2006/math">
+                      <m:oMathParaPr>
+                        <m:jc m:val="centerGroup"/>
+                      </m:oMathParaPr>
+                      <m:oMath xmlns:m="http://schemas.openxmlformats.org/officeDocument/2006/math">
+                        <m:sSubSup>
+                          <m:sSubSupPr>
+                            <m:ctrlPr>
+                              <a:rPr kumimoji="1" lang="en-US" altLang="ja-JP" b="0" i="1" smtClean="0">
+                                <a:latin typeface="Cambria Math" panose="02040503050406030204" pitchFamily="18" charset="0"/>
+                              </a:rPr>
+                            </m:ctrlPr>
+                          </m:sSubSupPr>
+                          <m:e>
+                            <m:r>
+                              <a:rPr kumimoji="1" lang="en-US" altLang="ja-JP" b="0" i="1" smtClean="0">
+                                <a:latin typeface="Cambria Math" panose="02040503050406030204" pitchFamily="18" charset="0"/>
+                              </a:rPr>
+                              <m:t>𝑥</m:t>
+                            </m:r>
+                          </m:e>
+                          <m:sub>
+                            <m:r>
+                              <a:rPr kumimoji="1" lang="en-US" altLang="ja-JP" b="0" i="1" smtClean="0">
+                                <a:latin typeface="Cambria Math" panose="02040503050406030204" pitchFamily="18" charset="0"/>
+                              </a:rPr>
+                              <m:t>𝑖</m:t>
+                            </m:r>
+                          </m:sub>
+                          <m:sup>
+                            <m:r>
+                              <a:rPr kumimoji="1" lang="en-US" altLang="ja-JP" b="0" i="1" smtClean="0">
+                                <a:latin typeface="Cambria Math" panose="02040503050406030204" pitchFamily="18" charset="0"/>
+                              </a:rPr>
+                              <m:t>′</m:t>
+                            </m:r>
+                          </m:sup>
+                        </m:sSubSup>
+                      </m:oMath>
+                    </m:oMathPara>
+                  </a14:m>
+                  <a:endParaRPr kumimoji="1" lang="ja-JP" altLang="en-US"/>
+                </a:p>
+              </p:txBody>
+            </p:sp>
+          </mc:Choice>
+          <mc:Fallback xmlns="">
+            <p:sp>
+              <p:nvSpPr>
+                <p:cNvPr id="26" name="テキスト ボックス 25">
+                  <a:extLst>
+                    <a:ext uri="{FF2B5EF4-FFF2-40B4-BE49-F238E27FC236}">
+                      <a16:creationId xmlns:a16="http://schemas.microsoft.com/office/drawing/2014/main" id="{340660A7-81B7-606C-2DEA-21ADC5B2C989}"/>
+                    </a:ext>
+                  </a:extLst>
+                </p:cNvPr>
+                <p:cNvSpPr txBox="1">
+                  <a:spLocks noRot="1" noChangeAspect="1" noMove="1" noResize="1" noEditPoints="1" noAdjustHandles="1" noChangeArrowheads="1" noChangeShapeType="1" noTextEdit="1"/>
+                </p:cNvSpPr>
+                <p:nvPr/>
+              </p:nvSpPr>
+              <p:spPr>
+                <a:xfrm>
+                  <a:off x="8086556" y="2782237"/>
+                  <a:ext cx="442492" cy="369588"/>
+                </a:xfrm>
+                <a:prstGeom prst="rect">
+                  <a:avLst/>
+                </a:prstGeom>
+                <a:blipFill>
+                  <a:blip r:embed="rId5"/>
+                  <a:stretch>
+                    <a:fillRect b="-3279"/>
+                  </a:stretch>
+                </a:blipFill>
+              </p:spPr>
+              <p:txBody>
+                <a:bodyPr/>
+                <a:lstStyle/>
+                <a:p>
+                  <a:r>
+                    <a:rPr lang="ja-JP" altLang="en-US">
+                      <a:noFill/>
+                    </a:rPr>
+                    <a:t> </a:t>
+                  </a:r>
+                </a:p>
+              </p:txBody>
+            </p:sp>
+          </mc:Fallback>
+        </mc:AlternateContent>
+        <p:cxnSp>
+          <p:nvCxnSpPr>
+            <p:cNvPr id="28" name="直線コネクタ 27">
+              <a:extLst>
+                <a:ext uri="{FF2B5EF4-FFF2-40B4-BE49-F238E27FC236}">
+                  <a16:creationId xmlns:a16="http://schemas.microsoft.com/office/drawing/2014/main" id="{74501F36-DA59-8822-9284-CD0AFBDBA487}"/>
+                </a:ext>
+              </a:extLst>
+            </p:cNvPr>
+            <p:cNvCxnSpPr>
+              <a:cxnSpLocks/>
+            </p:cNvCxnSpPr>
+            <p:nvPr/>
+          </p:nvCxnSpPr>
+          <p:spPr>
+            <a:xfrm>
+              <a:off x="8307917" y="3221567"/>
+              <a:ext cx="986341" cy="907519"/>
+            </a:xfrm>
+            <a:prstGeom prst="line">
+              <a:avLst/>
+            </a:prstGeom>
+          </p:spPr>
+          <p:style>
+            <a:lnRef idx="1">
+              <a:schemeClr val="accent1"/>
+            </a:lnRef>
+            <a:fillRef idx="0">
+              <a:schemeClr val="accent1"/>
+            </a:fillRef>
+            <a:effectRef idx="0">
+              <a:schemeClr val="accent1"/>
+            </a:effectRef>
+            <a:fontRef idx="minor">
+              <a:schemeClr val="tx1"/>
+            </a:fontRef>
+          </p:style>
+        </p:cxnSp>
+        <p:cxnSp>
+          <p:nvCxnSpPr>
+            <p:cNvPr id="32" name="直線コネクタ 31">
+              <a:extLst>
+                <a:ext uri="{FF2B5EF4-FFF2-40B4-BE49-F238E27FC236}">
+                  <a16:creationId xmlns:a16="http://schemas.microsoft.com/office/drawing/2014/main" id="{3F0F3C9C-030E-9D9A-1EB1-FF89E2C1ACAD}"/>
+                </a:ext>
+              </a:extLst>
+            </p:cNvPr>
+            <p:cNvCxnSpPr>
+              <a:cxnSpLocks/>
+            </p:cNvCxnSpPr>
+            <p:nvPr/>
+          </p:nvCxnSpPr>
+          <p:spPr>
+            <a:xfrm flipV="1">
+              <a:off x="8145541" y="3176797"/>
+              <a:ext cx="324408" cy="81072"/>
+            </a:xfrm>
+            <a:prstGeom prst="line">
+              <a:avLst/>
+            </a:prstGeom>
+            <a:ln w="38100"/>
+          </p:spPr>
+          <p:style>
+            <a:lnRef idx="1">
+              <a:schemeClr val="accent1"/>
+            </a:lnRef>
+            <a:fillRef idx="0">
+              <a:schemeClr val="accent1"/>
+            </a:fillRef>
+            <a:effectRef idx="0">
+              <a:schemeClr val="accent1"/>
+            </a:effectRef>
+            <a:fontRef idx="minor">
+              <a:schemeClr val="tx1"/>
+            </a:fontRef>
+          </p:style>
+        </p:cxnSp>
+        <p:cxnSp>
+          <p:nvCxnSpPr>
+            <p:cNvPr id="34" name="直線コネクタ 33">
+              <a:extLst>
+                <a:ext uri="{FF2B5EF4-FFF2-40B4-BE49-F238E27FC236}">
+                  <a16:creationId xmlns:a16="http://schemas.microsoft.com/office/drawing/2014/main" id="{D6E303EA-2686-EC76-CB07-12D63FCC1A27}"/>
+                </a:ext>
+              </a:extLst>
+            </p:cNvPr>
+            <p:cNvCxnSpPr>
+              <a:cxnSpLocks/>
+            </p:cNvCxnSpPr>
+            <p:nvPr/>
+          </p:nvCxnSpPr>
+          <p:spPr>
+            <a:xfrm flipV="1">
+              <a:off x="8485188" y="4378325"/>
+              <a:ext cx="276225" cy="264918"/>
+            </a:xfrm>
+            <a:prstGeom prst="line">
+              <a:avLst/>
+            </a:prstGeom>
+            <a:ln w="38100"/>
+          </p:spPr>
+          <p:style>
+            <a:lnRef idx="1">
+              <a:schemeClr val="accent1"/>
+            </a:lnRef>
+            <a:fillRef idx="0">
+              <a:schemeClr val="accent1"/>
+            </a:fillRef>
+            <a:effectRef idx="0">
+              <a:schemeClr val="accent1"/>
+            </a:effectRef>
+            <a:fontRef idx="minor">
+              <a:schemeClr val="tx1"/>
+            </a:fontRef>
+          </p:style>
+        </p:cxnSp>
+        <p:cxnSp>
+          <p:nvCxnSpPr>
+            <p:cNvPr id="39" name="直線矢印コネクタ 38">
+              <a:extLst>
+                <a:ext uri="{FF2B5EF4-FFF2-40B4-BE49-F238E27FC236}">
+                  <a16:creationId xmlns:a16="http://schemas.microsoft.com/office/drawing/2014/main" id="{A78182AD-0D08-9F6D-0AC4-FD3D639E1439}"/>
+                </a:ext>
+              </a:extLst>
+            </p:cNvPr>
+            <p:cNvCxnSpPr>
+              <a:cxnSpLocks/>
+            </p:cNvCxnSpPr>
+            <p:nvPr/>
+          </p:nvCxnSpPr>
+          <p:spPr>
+            <a:xfrm>
+              <a:off x="8470580" y="3176797"/>
+              <a:ext cx="287658" cy="1198335"/>
+            </a:xfrm>
+            <a:prstGeom prst="straightConnector1">
+              <a:avLst/>
+            </a:prstGeom>
+            <a:ln>
+              <a:prstDash val="dash"/>
+              <a:headEnd type="none" w="med" len="med"/>
+              <a:tailEnd type="none" w="med" len="med"/>
+            </a:ln>
+          </p:spPr>
+          <p:style>
+            <a:lnRef idx="1">
+              <a:schemeClr val="accent1"/>
+            </a:lnRef>
+            <a:fillRef idx="0">
+              <a:schemeClr val="accent1"/>
+            </a:fillRef>
+            <a:effectRef idx="0">
+              <a:schemeClr val="accent1"/>
+            </a:effectRef>
+            <a:fontRef idx="minor">
+              <a:schemeClr val="tx1"/>
+            </a:fontRef>
+          </p:style>
+        </p:cxnSp>
+        <p:cxnSp>
+          <p:nvCxnSpPr>
+            <p:cNvPr id="41" name="直線矢印コネクタ 40">
+              <a:extLst>
+                <a:ext uri="{FF2B5EF4-FFF2-40B4-BE49-F238E27FC236}">
+                  <a16:creationId xmlns:a16="http://schemas.microsoft.com/office/drawing/2014/main" id="{84169E18-CA9E-F050-0996-BE8F0B20815A}"/>
+                </a:ext>
+              </a:extLst>
+            </p:cNvPr>
+            <p:cNvCxnSpPr>
+              <a:cxnSpLocks/>
+            </p:cNvCxnSpPr>
+            <p:nvPr/>
+          </p:nvCxnSpPr>
+          <p:spPr>
+            <a:xfrm>
+              <a:off x="8146969" y="3246300"/>
+              <a:ext cx="337031" cy="1404017"/>
+            </a:xfrm>
+            <a:prstGeom prst="straightConnector1">
+              <a:avLst/>
+            </a:prstGeom>
+            <a:ln>
+              <a:prstDash val="dash"/>
+              <a:headEnd type="none" w="med" len="med"/>
+              <a:tailEnd type="none" w="med" len="med"/>
+            </a:ln>
+          </p:spPr>
+          <p:style>
+            <a:lnRef idx="1">
+              <a:schemeClr val="accent1"/>
+            </a:lnRef>
+            <a:fillRef idx="0">
+              <a:schemeClr val="accent1"/>
+            </a:fillRef>
+            <a:effectRef idx="0">
+              <a:schemeClr val="accent1"/>
+            </a:effectRef>
+            <a:fontRef idx="minor">
+              <a:schemeClr val="tx1"/>
+            </a:fontRef>
+          </p:style>
+        </p:cxnSp>
+        <p:cxnSp>
+          <p:nvCxnSpPr>
+            <p:cNvPr id="44" name="直線矢印コネクタ 43">
+              <a:extLst>
+                <a:ext uri="{FF2B5EF4-FFF2-40B4-BE49-F238E27FC236}">
+                  <a16:creationId xmlns:a16="http://schemas.microsoft.com/office/drawing/2014/main" id="{084FAF09-D59F-E5FB-A3FB-227F1C2F6450}"/>
+                </a:ext>
+              </a:extLst>
+            </p:cNvPr>
+            <p:cNvCxnSpPr>
+              <a:cxnSpLocks/>
+            </p:cNvCxnSpPr>
+            <p:nvPr/>
+          </p:nvCxnSpPr>
+          <p:spPr>
+            <a:xfrm flipH="1">
+              <a:off x="8443679" y="4377529"/>
+              <a:ext cx="317734" cy="84200"/>
+            </a:xfrm>
+            <a:prstGeom prst="straightConnector1">
+              <a:avLst/>
+            </a:prstGeom>
+            <a:ln>
+              <a:prstDash val="dash"/>
+              <a:headEnd type="none" w="med" len="med"/>
+              <a:tailEnd type="none" w="med" len="med"/>
+            </a:ln>
+          </p:spPr>
+          <p:style>
+            <a:lnRef idx="1">
+              <a:schemeClr val="accent1"/>
+            </a:lnRef>
+            <a:fillRef idx="0">
+              <a:schemeClr val="accent1"/>
+            </a:fillRef>
+            <a:effectRef idx="0">
+              <a:schemeClr val="accent1"/>
+            </a:effectRef>
+            <a:fontRef idx="minor">
+              <a:schemeClr val="tx1"/>
+            </a:fontRef>
+          </p:style>
+        </p:cxnSp>
+      </p:grpSp>
+    </p:spTree>
+    <p:extLst>
+      <p:ext uri="{BB962C8B-B14F-4D97-AF65-F5344CB8AC3E}">
+        <p14:creationId xmlns:p14="http://schemas.microsoft.com/office/powerpoint/2010/main" val="2333234819"/>
+      </p:ext>
+    </p:extLst>
+  </p:cSld>
+  <p:clrMapOvr>
+    <a:masterClrMapping/>
+  </p:clrMapOvr>
+</p:sld>
+</file>
+
+<file path=ppt/slides/slide27.xml><?xml version="1.0" encoding="utf-8"?>
 <p:sld xmlns:a="http://schemas.openxmlformats.org/drawingml/2006/main" xmlns:r="http://schemas.openxmlformats.org/officeDocument/2006/relationships" xmlns:p="http://schemas.openxmlformats.org/presentationml/2006/main">
   <p:cSld>
     <p:spTree>
@@ -26178,7 +31978,7 @@
 </p:sld>
 </file>
 
-<file path=ppt/slides/slide25.xml><?xml version="1.0" encoding="utf-8"?>
+<file path=ppt/slides/slide28.xml><?xml version="1.0" encoding="utf-8"?>
 <p:sld xmlns:a="http://schemas.openxmlformats.org/drawingml/2006/main" xmlns:r="http://schemas.openxmlformats.org/officeDocument/2006/relationships" xmlns:p="http://schemas.openxmlformats.org/presentationml/2006/main">
   <p:cSld>
     <p:spTree>
@@ -26720,7 +32520,7 @@
 </p:sld>
 </file>
 
-<file path=ppt/slides/slide26.xml><?xml version="1.0" encoding="utf-8"?>
+<file path=ppt/slides/slide29.xml><?xml version="1.0" encoding="utf-8"?>
 <p:sld xmlns:a="http://schemas.openxmlformats.org/drawingml/2006/main" xmlns:r="http://schemas.openxmlformats.org/officeDocument/2006/relationships" xmlns:p="http://schemas.openxmlformats.org/presentationml/2006/main">
   <p:cSld>
     <p:spTree>
